--- a/presentation/ROGJ_Deepspeech2_topic_presentation.pptx
+++ b/presentation/ROGJ_Deepspeech2_topic_presentation.pptx
@@ -390,7 +390,7 @@
                 </a:solidFill>
                 <a:latin typeface="Aptos"/>
               </a:rPr>
-              <a:t>VEPRAD -&gt; splitovi -&gt; DeepSpeech2 trening -&gt; KenLM dekodiranje -&gt; WER/CER</a:t>
+              <a:t>VEPRAD -&gt; DeepSpeech2 trening -&gt; KenLM -&gt; WER/CER</a:t>
             </a:r>
             <a:endParaRPr lang="hr-HR" sz="2100"/>
           </a:p>
@@ -708,7 +708,7 @@
                 </a:solidFill>
                 <a:latin typeface="Aptos"/>
               </a:rPr>
-              <a:t>U prezentaciji: kako smo izolirali test skup, kako je definiran CV split, koje DS2 konfiguracije smo trenirali i koliko KenLM mijenja rezultate.</a:t>
+              <a:t>U prezentaciji: kako smo pripremili VEPRAD, izolirali test skup, definirali CV splitove, trenirali DS2 konfiguracije i izmjerili utjecaj KenLM-a.</a:t>
             </a:r>
             <a:endParaRPr lang="hr-HR" sz="1900"/>
           </a:p>
@@ -813,7 +813,7 @@
                 </a:solidFill>
                 <a:latin typeface="Aptos"/>
               </a:rPr>
-              <a:t>02 · PODACI I SPLITOVI</a:t>
+              <a:t>02 · VEPRAD PODACI I SPLITOVI</a:t>
             </a:r>
             <a:endParaRPr lang="hr-HR" sz="1500"/>
           </a:p>
@@ -828,30 +828,30 @@
         <p:spPr>
           <a:xfrm>
             <a:off x="444500" y="520700"/>
-            <a:ext cx="7493000" cy="393700"/>
-          </a:xfrm>
-          <a:prstGeom prst="rect">
-            <a:avLst/>
-          </a:prstGeom>
-          <a:noFill/>
-          <a:ln>
-            <a:noFill/>
-          </a:ln>
-        </p:spPr>
-        <p:txBody>
-          <a:bodyPr wrap="square" lIns="0" tIns="0" rIns="0" bIns="0"/>
-          <a:lstStyle/>
-          <a:p>
-            <a:r>
-              <a:rPr lang="hr-HR" sz="2500" b="1">
+            <a:ext cx="7937500" cy="546100"/>
+          </a:xfrm>
+          <a:prstGeom prst="rect">
+            <a:avLst/>
+          </a:prstGeom>
+          <a:noFill/>
+          <a:ln>
+            <a:noFill/>
+          </a:ln>
+        </p:spPr>
+        <p:txBody>
+          <a:bodyPr wrap="square" lIns="0" tIns="0" rIns="0" bIns="0"/>
+          <a:lstStyle/>
+          <a:p>
+            <a:r>
+              <a:rPr lang="hr-HR" sz="2350" b="1">
                 <a:solidFill>
                   <a:srgbClr val="15171A"/>
                 </a:solidFill>
                 <a:latin typeface="Aptos"/>
               </a:rPr>
-              <a:t>Test skup je odvojen prije cross-validacije.</a:t>
-            </a:r>
-            <a:endParaRPr lang="hr-HR" sz="2500"/>
+              <a:t>VEPRAD test skup je odvojen prije cross-validacije.</a:t>
+            </a:r>
+            <a:endParaRPr lang="hr-HR" sz="2350"/>
           </a:p>
         </p:txBody>
       </p:sp>
@@ -863,31 +863,31 @@
         </p:nvSpPr>
         <p:spPr>
           <a:xfrm>
-            <a:off x="444500" y="952500"/>
-            <a:ext cx="7493000" cy="292100"/>
-          </a:xfrm>
-          <a:prstGeom prst="rect">
-            <a:avLst/>
-          </a:prstGeom>
-          <a:noFill/>
-          <a:ln>
-            <a:noFill/>
-          </a:ln>
-        </p:spPr>
-        <p:txBody>
-          <a:bodyPr wrap="square" lIns="0" tIns="0" rIns="0" bIns="0"/>
-          <a:lstStyle/>
-          <a:p>
-            <a:r>
-              <a:rPr lang="hr-HR" sz="1180">
+            <a:off x="444500" y="1130300"/>
+            <a:ext cx="7937500" cy="266700"/>
+          </a:xfrm>
+          <a:prstGeom prst="rect">
+            <a:avLst/>
+          </a:prstGeom>
+          <a:noFill/>
+          <a:ln>
+            <a:noFill/>
+          </a:ln>
+        </p:spPr>
+        <p:txBody>
+          <a:bodyPr wrap="square" lIns="0" tIns="0" rIns="0" bIns="0"/>
+          <a:lstStyle/>
+          <a:p>
+            <a:r>
+              <a:rPr lang="hr-HR" sz="1080">
                 <a:solidFill>
                   <a:srgbClr val="6F6A5B"/>
                 </a:solidFill>
                 <a:latin typeface="Aptos"/>
               </a:rPr>
-              <a:t>VEPRAD se tretira kao govor + transkript, s govornicima kao važnom osi generalizacije.</a:t>
-            </a:r>
-            <a:endParaRPr lang="hr-HR" sz="1180"/>
+              <a:t>Skup koristimo kao uparene audio snimke i transkripte, a govornike držimo kao posebnu os generalizacije.</a:t>
+            </a:r>
+            <a:endParaRPr lang="hr-HR" sz="1080"/>
           </a:p>
         </p:txBody>
       </p:sp>
@@ -899,7 +899,7 @@
         </p:nvSpPr>
         <p:spPr>
           <a:xfrm>
-            <a:off x="444500" y="1333500"/>
+            <a:off x="444500" y="1447800"/>
             <a:ext cx="736600" cy="44450"/>
           </a:xfrm>
           <a:prstGeom prst="rect">
@@ -943,7 +943,7 @@
                 </a:solidFill>
                 <a:latin typeface="Aptos"/>
               </a:rPr>
-              <a:t>Permanentni test skup</a:t>
+              <a:t>Permanentni test</a:t>
             </a:r>
             <a:endParaRPr lang="hr-HR" sz="1800"/>
           </a:p>
@@ -1247,7 +1247,7 @@
                 </a:solidFill>
                 <a:latin typeface="Aptos"/>
               </a:rPr>
-              <a:t>test audio + test JSONL žive u data/test i ne ulaze u CV</a:t>
+              <a:t>VEPRAD test audio + JSONL žive u data/test i ne ulaze u CV</a:t>
             </a:r>
             <a:endParaRPr lang="hr-HR" sz="1250"/>
           </a:p>
@@ -1319,7 +1319,7 @@
                 </a:solidFill>
                 <a:latin typeface="Aptos"/>
               </a:rPr>
-              <a:t>Jedan CV split</a:t>
+              <a:t>Jedan VEPRAD CV split</a:t>
             </a:r>
             <a:endParaRPr lang="hr-HR" sz="1800"/>
           </a:p>
@@ -2929,7 +2929,7 @@
                 </a:solidFill>
                 <a:latin typeface="Aptos"/>
               </a:rPr>
-              <a:t>Namjera splitova je mjeriti dvije stvari odvojeno: koliko model generalizira na nove rečenice istih govornika i koliko generalizira na potpuno neviđene govornike.</a:t>
+              <a:t>Namjera VEPRAD splitova je mjeriti dvije stvari odvojeno: koliko model generalizira na nove rečenice istih govornika i koliko generalizira na potpuno neviđene govornike.</a:t>
             </a:r>
             <a:endParaRPr lang="hr-HR" sz="1400"/>
           </a:p>
@@ -3109,30 +3109,30 @@
         <p:spPr>
           <a:xfrm>
             <a:off x="444500" y="520700"/>
-            <a:ext cx="7493000" cy="393700"/>
-          </a:xfrm>
-          <a:prstGeom prst="rect">
-            <a:avLst/>
-          </a:prstGeom>
-          <a:noFill/>
-          <a:ln>
-            <a:noFill/>
-          </a:ln>
-        </p:spPr>
-        <p:txBody>
-          <a:bodyPr wrap="square" lIns="0" tIns="0" rIns="0" bIns="0"/>
-          <a:lstStyle/>
-          <a:p>
-            <a:r>
-              <a:rPr lang="hr-HR" sz="2500" b="1">
+            <a:ext cx="7937500" cy="546100"/>
+          </a:xfrm>
+          <a:prstGeom prst="rect">
+            <a:avLst/>
+          </a:prstGeom>
+          <a:noFill/>
+          <a:ln>
+            <a:noFill/>
+          </a:ln>
+        </p:spPr>
+        <p:txBody>
+          <a:bodyPr wrap="square" lIns="0" tIns="0" rIns="0" bIns="0"/>
+          <a:lstStyle/>
+          <a:p>
+            <a:r>
+              <a:rPr lang="hr-HR" sz="2350" b="1">
                 <a:solidFill>
                   <a:srgbClr val="15171A"/>
                 </a:solidFill>
                 <a:latin typeface="Aptos"/>
               </a:rPr>
-              <a:t>Pipeline je sada jedan Python tok, ne stari shell recipe.</a:t>
-            </a:r>
-            <a:endParaRPr lang="hr-HR" sz="2500"/>
+              <a:t>VEPRAD pipeline je jedan Python tok, ne stari shell recipe.</a:t>
+            </a:r>
+            <a:endParaRPr lang="hr-HR" sz="2350"/>
           </a:p>
         </p:txBody>
       </p:sp>
@@ -3144,31 +3144,31 @@
         </p:nvSpPr>
         <p:spPr>
           <a:xfrm>
-            <a:off x="444500" y="952500"/>
-            <a:ext cx="7493000" cy="292100"/>
-          </a:xfrm>
-          <a:prstGeom prst="rect">
-            <a:avLst/>
-          </a:prstGeom>
-          <a:noFill/>
-          <a:ln>
-            <a:noFill/>
-          </a:ln>
-        </p:spPr>
-        <p:txBody>
-          <a:bodyPr wrap="square" lIns="0" tIns="0" rIns="0" bIns="0"/>
-          <a:lstStyle/>
-          <a:p>
-            <a:r>
-              <a:rPr lang="hr-HR" sz="1180">
+            <a:off x="444500" y="1130300"/>
+            <a:ext cx="7937500" cy="266700"/>
+          </a:xfrm>
+          <a:prstGeom prst="rect">
+            <a:avLst/>
+          </a:prstGeom>
+          <a:noFill/>
+          <a:ln>
+            <a:noFill/>
+          </a:ln>
+        </p:spPr>
+        <p:txBody>
+          <a:bodyPr wrap="square" lIns="0" tIns="0" rIns="0" bIns="0"/>
+          <a:lstStyle/>
+          <a:p>
+            <a:r>
+              <a:rPr lang="hr-HR" sz="1080">
                 <a:solidFill>
                   <a:srgbClr val="6F6A5B"/>
                 </a:solidFill>
                 <a:latin typeface="Aptos"/>
               </a:rPr>
-              <a:t>Skripta poziva PaddleSpeech Python funkcije direktno: split/manifesti, trening, averaging, eval i metrike.</a:t>
-            </a:r>
-            <a:endParaRPr lang="hr-HR" sz="1180"/>
+              <a:t>Skripta poziva PaddleSpeech Python funkcije direktno: VEPRAD split/manifesti, trening, averaging, eval i metrike.</a:t>
+            </a:r>
+            <a:endParaRPr lang="hr-HR" sz="1080"/>
           </a:p>
         </p:txBody>
       </p:sp>
@@ -3180,7 +3180,7 @@
         </p:nvSpPr>
         <p:spPr>
           <a:xfrm>
-            <a:off x="444500" y="1333500"/>
+            <a:off x="444500" y="1447800"/>
             <a:ext cx="736600" cy="44450"/>
           </a:xfrm>
           <a:prstGeom prst="rect">
@@ -4238,7 +4238,7 @@
                 </a:solidFill>
                 <a:latin typeface="Aptos"/>
               </a:rPr>
-              <a:t>Programski tok: scripts/run_ds2_pipeline.py generira PaddleSpeech podatke, trenira model, računa avg_1 checkpoint i evaluira val/test seen/unseen podskupove.</a:t>
+              <a:t>Programski tok: scripts/run_ds2_pipeline.py uzima VEPRAD manifest, generira PaddleSpeech podatke, trenira model, računa avg_1 checkpoint i evaluira VEPRAD val/test seen/unseen podskupove.</a:t>
             </a:r>
             <a:endParaRPr lang="hr-HR" sz="1350"/>
           </a:p>
@@ -4358,30 +4358,30 @@
         <p:spPr>
           <a:xfrm>
             <a:off x="444500" y="520700"/>
-            <a:ext cx="7493000" cy="393700"/>
-          </a:xfrm>
-          <a:prstGeom prst="rect">
-            <a:avLst/>
-          </a:prstGeom>
-          <a:noFill/>
-          <a:ln>
-            <a:noFill/>
-          </a:ln>
-        </p:spPr>
-        <p:txBody>
-          <a:bodyPr wrap="square" lIns="0" tIns="0" rIns="0" bIns="0"/>
-          <a:lstStyle/>
-          <a:p>
-            <a:r>
-              <a:rPr lang="hr-HR" sz="2500" b="1">
+            <a:ext cx="7937500" cy="546100"/>
+          </a:xfrm>
+          <a:prstGeom prst="rect">
+            <a:avLst/>
+          </a:prstGeom>
+          <a:noFill/>
+          <a:ln>
+            <a:noFill/>
+          </a:ln>
+        </p:spPr>
+        <p:txBody>
+          <a:bodyPr wrap="square" lIns="0" tIns="0" rIns="0" bIns="0"/>
+          <a:lstStyle/>
+          <a:p>
+            <a:r>
+              <a:rPr lang="hr-HR" sz="2350" b="1">
                 <a:solidFill>
                   <a:srgbClr val="15171A"/>
                 </a:solidFill>
                 <a:latin typeface="Aptos"/>
               </a:rPr>
-              <a:t>DeepSpeech2 pretvara akustičke značajke u vjerojatnosti znakova kroz CTC.</a:t>
-            </a:r>
-            <a:endParaRPr lang="hr-HR" sz="2500"/>
+              <a:t>DeepSpeech2 je akustički model koji smo trenirali na VEPRAD govoru.</a:t>
+            </a:r>
+            <a:endParaRPr lang="hr-HR" sz="2350"/>
           </a:p>
         </p:txBody>
       </p:sp>
@@ -4393,23 +4393,23 @@
         </p:nvSpPr>
         <p:spPr>
           <a:xfrm>
-            <a:off x="444500" y="952500"/>
-            <a:ext cx="7493000" cy="292100"/>
-          </a:xfrm>
-          <a:prstGeom prst="rect">
-            <a:avLst/>
-          </a:prstGeom>
-          <a:noFill/>
-          <a:ln>
-            <a:noFill/>
-          </a:ln>
-        </p:spPr>
-        <p:txBody>
-          <a:bodyPr wrap="square" lIns="0" tIns="0" rIns="0" bIns="0"/>
-          <a:lstStyle/>
-          <a:p>
-            <a:r>
-              <a:rPr lang="hr-HR" sz="1180">
+            <a:off x="444500" y="1130300"/>
+            <a:ext cx="7937500" cy="266700"/>
+          </a:xfrm>
+          <a:prstGeom prst="rect">
+            <a:avLst/>
+          </a:prstGeom>
+          <a:noFill/>
+          <a:ln>
+            <a:noFill/>
+          </a:ln>
+        </p:spPr>
+        <p:txBody>
+          <a:bodyPr wrap="square" lIns="0" tIns="0" rIns="0" bIns="0"/>
+          <a:lstStyle/>
+          <a:p>
+            <a:r>
+              <a:rPr lang="hr-HR" sz="1080">
                 <a:solidFill>
                   <a:srgbClr val="6F6A5B"/>
                 </a:solidFill>
@@ -4417,7 +4417,7 @@
               </a:rPr>
               <a:t>Slika prikazuje paper-style tok; desni stupac navodi što smo točno mogli reproducirati bez mijenjanja PaddleSpeech sourcea.</a:t>
             </a:r>
-            <a:endParaRPr lang="hr-HR" sz="1180"/>
+            <a:endParaRPr lang="hr-HR" sz="1080"/>
           </a:p>
         </p:txBody>
       </p:sp>
@@ -4429,7 +4429,7 @@
         </p:nvSpPr>
         <p:spPr>
           <a:xfrm>
-            <a:off x="444500" y="1333500"/>
+            <a:off x="444500" y="1447800"/>
             <a:ext cx="736600" cy="44450"/>
           </a:xfrm>
           <a:prstGeom prst="rect">
@@ -4733,7 +4733,7 @@
                 </a:solidFill>
                 <a:latin typeface="Aptos"/>
               </a:rPr>
-              <a:t>Zaključak: model je paper-close approximation, ne bit-for-bit reprodukcija Deep Speech 2 rada.</a:t>
+              <a:t>Zaključak: VEPRAD run je paper-close approximation, ne bit-for-bit reprodukcija Deep Speech 2 rada.</a:t>
             </a:r>
             <a:endParaRPr lang="hr-HR" sz="1350"/>
           </a:p>
@@ -4853,30 +4853,30 @@
         <p:spPr>
           <a:xfrm>
             <a:off x="444500" y="520700"/>
-            <a:ext cx="7493000" cy="393700"/>
-          </a:xfrm>
-          <a:prstGeom prst="rect">
-            <a:avLst/>
-          </a:prstGeom>
-          <a:noFill/>
-          <a:ln>
-            <a:noFill/>
-          </a:ln>
-        </p:spPr>
-        <p:txBody>
-          <a:bodyPr wrap="square" lIns="0" tIns="0" rIns="0" bIns="0"/>
-          <a:lstStyle/>
-          <a:p>
-            <a:r>
-              <a:rPr lang="hr-HR" sz="2500" b="1">
+            <a:ext cx="7937500" cy="546100"/>
+          </a:xfrm>
+          <a:prstGeom prst="rect">
+            <a:avLst/>
+          </a:prstGeom>
+          <a:noFill/>
+          <a:ln>
+            <a:noFill/>
+          </a:ln>
+        </p:spPr>
+        <p:txBody>
+          <a:bodyPr wrap="square" lIns="0" tIns="0" rIns="0" bIns="0"/>
+          <a:lstStyle/>
+          <a:p>
+            <a:r>
+              <a:rPr lang="hr-HR" sz="2350" b="1">
                 <a:solidFill>
                   <a:srgbClr val="15171A"/>
                 </a:solidFill>
                 <a:latin typeface="Aptos"/>
               </a:rPr>
-              <a:t>Trenirali smo paper-small konfiguraciju i dvije dublje varijante.</a:t>
-            </a:r>
-            <a:endParaRPr lang="hr-HR" sz="2500"/>
+              <a:t>Na istom VEPRAD splitu trenirali smo paper-small konfiguraciju i dvije dublje varijante.</a:t>
+            </a:r>
+            <a:endParaRPr lang="hr-HR" sz="2350"/>
           </a:p>
         </p:txBody>
       </p:sp>
@@ -4888,31 +4888,31 @@
         </p:nvSpPr>
         <p:spPr>
           <a:xfrm>
-            <a:off x="444500" y="952500"/>
-            <a:ext cx="7493000" cy="292100"/>
-          </a:xfrm>
-          <a:prstGeom prst="rect">
-            <a:avLst/>
-          </a:prstGeom>
-          <a:noFill/>
-          <a:ln>
-            <a:noFill/>
-          </a:ln>
-        </p:spPr>
-        <p:txBody>
-          <a:bodyPr wrap="square" lIns="0" tIns="0" rIns="0" bIns="0"/>
-          <a:lstStyle/>
-          <a:p>
-            <a:r>
-              <a:rPr lang="hr-HR" sz="1180">
+            <a:off x="444500" y="1130300"/>
+            <a:ext cx="7937500" cy="266700"/>
+          </a:xfrm>
+          <a:prstGeom prst="rect">
+            <a:avLst/>
+          </a:prstGeom>
+          <a:noFill/>
+          <a:ln>
+            <a:noFill/>
+          </a:ln>
+        </p:spPr>
+        <p:txBody>
+          <a:bodyPr wrap="square" lIns="0" tIns="0" rIns="0" bIns="0"/>
+          <a:lstStyle/>
+          <a:p>
+            <a:r>
+              <a:rPr lang="hr-HR" sz="1080">
                 <a:solidFill>
                   <a:srgbClr val="6F6A5B"/>
                 </a:solidFill>
                 <a:latin typeface="Aptos"/>
               </a:rPr>
-              <a:t>Cilj nije bio samo dobiti jedan score, nego vidjeti što se mijenja s dubinom i tipom rekurentne ćelije.</a:t>
-            </a:r>
-            <a:endParaRPr lang="hr-HR" sz="1180"/>
+              <a:t>Cilj nije bio samo dobiti jedan score, nego vidjeti što se na VEPRAD-u mijenja s dubinom i tipom rekurentne ćelije.</a:t>
+            </a:r>
+            <a:endParaRPr lang="hr-HR" sz="1080"/>
           </a:p>
         </p:txBody>
       </p:sp>
@@ -4924,7 +4924,7 @@
         </p:nvSpPr>
         <p:spPr>
           <a:xfrm>
-            <a:off x="444500" y="1333500"/>
+            <a:off x="444500" y="1447800"/>
             <a:ext cx="736600" cy="44450"/>
           </a:xfrm>
           <a:prstGeom prst="rect">
@@ -6280,7 +6280,7 @@
                 </a:solidFill>
                 <a:latin typeface="Aptos"/>
               </a:rPr>
-              <a:t>Paper-small run drži hidden size 650 i GRU kao najbližu izvedivu varijantu unutar PaddleSpeecha.</a:t>
+              <a:t>Paper-small run drži hidden size 650 i GRU kao najbližu izvedivu VEPRAD varijantu unutar PaddleSpeecha.</a:t>
             </a:r>
             <a:endParaRPr lang="hr-HR" sz="1350"/>
           </a:p>
@@ -6292,7 +6292,7 @@
                 </a:solidFill>
                 <a:latin typeface="Aptos"/>
               </a:rPr>
-              <a:t>Dublji GRU testira samu dubinu. LSTM testira je li druga recurrent cell bolja pod istim splitom i decoding protokolom.</a:t>
+              <a:t>Dublji GRU testira samu dubinu. LSTM testira je li druga recurrent cell bolja na istom VEPRAD splitu i decoding protokolu.</a:t>
             </a:r>
             <a:endParaRPr lang="hr-HR" sz="1350"/>
           </a:p>
@@ -6472,30 +6472,30 @@
         <p:spPr>
           <a:xfrm>
             <a:off x="444500" y="520700"/>
-            <a:ext cx="7493000" cy="393700"/>
-          </a:xfrm>
-          <a:prstGeom prst="rect">
-            <a:avLst/>
-          </a:prstGeom>
-          <a:noFill/>
-          <a:ln>
-            <a:noFill/>
-          </a:ln>
-        </p:spPr>
-        <p:txBody>
-          <a:bodyPr wrap="square" lIns="0" tIns="0" rIns="0" bIns="0"/>
-          <a:lstStyle/>
-          <a:p>
-            <a:r>
-              <a:rPr lang="hr-HR" sz="2500" b="1">
+            <a:ext cx="7937500" cy="546100"/>
+          </a:xfrm>
+          <a:prstGeom prst="rect">
+            <a:avLst/>
+          </a:prstGeom>
+          <a:noFill/>
+          <a:ln>
+            <a:noFill/>
+          </a:ln>
+        </p:spPr>
+        <p:txBody>
+          <a:bodyPr wrap="square" lIns="0" tIns="0" rIns="0" bIns="0"/>
+          <a:lstStyle/>
+          <a:p>
+            <a:r>
+              <a:rPr lang="hr-HR" sz="2350" b="1">
                 <a:solidFill>
                   <a:srgbClr val="15171A"/>
                 </a:solidFill>
                 <a:latin typeface="Aptos"/>
               </a:rPr>
-              <a:t>KenLM je vanjski word-level scorer koji dramatično pomaže na vremenskim prognozama.</a:t>
-            </a:r>
-            <a:endParaRPr lang="hr-HR" sz="2500"/>
+              <a:t>KenLM se trenira na VEPRAD train transkriptima.</a:t>
+            </a:r>
+            <a:endParaRPr lang="hr-HR" sz="2350"/>
           </a:p>
         </p:txBody>
       </p:sp>
@@ -6507,31 +6507,31 @@
         </p:nvSpPr>
         <p:spPr>
           <a:xfrm>
-            <a:off x="444500" y="952500"/>
-            <a:ext cx="7493000" cy="292100"/>
-          </a:xfrm>
-          <a:prstGeom prst="rect">
-            <a:avLst/>
-          </a:prstGeom>
-          <a:noFill/>
-          <a:ln>
-            <a:noFill/>
-          </a:ln>
-        </p:spPr>
-        <p:txBody>
-          <a:bodyPr wrap="square" lIns="0" tIns="0" rIns="0" bIns="0"/>
-          <a:lstStyle/>
-          <a:p>
-            <a:r>
-              <a:rPr lang="hr-HR" sz="1180">
+            <a:off x="444500" y="1130300"/>
+            <a:ext cx="7937500" cy="266700"/>
+          </a:xfrm>
+          <a:prstGeom prst="rect">
+            <a:avLst/>
+          </a:prstGeom>
+          <a:noFill/>
+          <a:ln>
+            <a:noFill/>
+          </a:ln>
+        </p:spPr>
+        <p:txBody>
+          <a:bodyPr wrap="square" lIns="0" tIns="0" rIns="0" bIns="0"/>
+          <a:lstStyle/>
+          <a:p>
+            <a:r>
+              <a:rPr lang="hr-HR" sz="1080">
                 <a:solidFill>
                   <a:srgbClr val="6F6A5B"/>
                 </a:solidFill>
                 <a:latin typeface="Aptos"/>
               </a:rPr>
-              <a:t>LM se trenira iz train transkripata, ali prije toga izbacujemo rečenice koje se previše poklapaju s val/test tekstom.</a:t>
-            </a:r>
-            <a:endParaRPr lang="hr-HR" sz="1180"/>
+              <a:t>Prije LM treninga izbacujemo VEPRAD train rečenice koje se previše poklapaju s val/test tekstom.</a:t>
+            </a:r>
+            <a:endParaRPr lang="hr-HR" sz="1080"/>
           </a:p>
         </p:txBody>
       </p:sp>
@@ -6543,7 +6543,7 @@
         </p:nvSpPr>
         <p:spPr>
           <a:xfrm>
-            <a:off x="444500" y="1333500"/>
+            <a:off x="444500" y="1447800"/>
             <a:ext cx="736600" cy="44450"/>
           </a:xfrm>
           <a:prstGeom prst="rect">
@@ -6932,7 +6932,7 @@
         <p:spPr>
           <a:xfrm>
             <a:off x="444500" y="3429000"/>
-            <a:ext cx="3302000" cy="190500"/>
+            <a:ext cx="3556000" cy="190500"/>
           </a:xfrm>
           <a:prstGeom prst="rect">
             <a:avLst/>
@@ -6953,7 +6953,7 @@
                 </a:solidFill>
                 <a:latin typeface="Aptos"/>
               </a:rPr>
-              <a:t>Najbolji validation-selected decoder</a:t>
+              <a:t>Najbolji VEPRAD decoder</a:t>
             </a:r>
             <a:endParaRPr lang="hr-HR" sz="1800"/>
           </a:p>
@@ -8123,30 +8123,30 @@
         <p:spPr>
           <a:xfrm>
             <a:off x="444500" y="520700"/>
-            <a:ext cx="7493000" cy="393700"/>
-          </a:xfrm>
-          <a:prstGeom prst="rect">
-            <a:avLst/>
-          </a:prstGeom>
-          <a:noFill/>
-          <a:ln>
-            <a:noFill/>
-          </a:ln>
-        </p:spPr>
-        <p:txBody>
-          <a:bodyPr wrap="square" lIns="0" tIns="0" rIns="0" bIns="0"/>
-          <a:lstStyle/>
-          <a:p>
-            <a:r>
-              <a:rPr lang="hr-HR" sz="2500" b="1">
+            <a:ext cx="7937500" cy="546100"/>
+          </a:xfrm>
+          <a:prstGeom prst="rect">
+            <a:avLst/>
+          </a:prstGeom>
+          <a:noFill/>
+          <a:ln>
+            <a:noFill/>
+          </a:ln>
+        </p:spPr>
+        <p:txBody>
+          <a:bodyPr wrap="square" lIns="0" tIns="0" rIns="0" bIns="0"/>
+          <a:lstStyle/>
+          <a:p>
+            <a:r>
+              <a:rPr lang="hr-HR" sz="2350" b="1">
                 <a:solidFill>
                   <a:srgbClr val="15171A"/>
                 </a:solidFill>
                 <a:latin typeface="Aptos"/>
               </a:rPr>
-              <a:t>Najbolji rezultat: paper-small GRU + KenLM.</a:t>
-            </a:r>
-            <a:endParaRPr lang="hr-HR" sz="2500"/>
+              <a:t>Najbolji VEPRAD rezultat: paper-small GRU + KenLM.</a:t>
+            </a:r>
+            <a:endParaRPr lang="hr-HR" sz="2350"/>
           </a:p>
         </p:txBody>
       </p:sp>
@@ -8158,31 +8158,31 @@
         </p:nvSpPr>
         <p:spPr>
           <a:xfrm>
-            <a:off x="444500" y="952500"/>
-            <a:ext cx="7493000" cy="292100"/>
-          </a:xfrm>
-          <a:prstGeom prst="rect">
-            <a:avLst/>
-          </a:prstGeom>
-          <a:noFill/>
-          <a:ln>
-            <a:noFill/>
-          </a:ln>
-        </p:spPr>
-        <p:txBody>
-          <a:bodyPr wrap="square" lIns="0" tIns="0" rIns="0" bIns="0"/>
-          <a:lstStyle/>
-          <a:p>
-            <a:r>
-              <a:rPr lang="hr-HR" sz="1180">
+            <a:off x="444500" y="1130300"/>
+            <a:ext cx="7937500" cy="266700"/>
+          </a:xfrm>
+          <a:prstGeom prst="rect">
+            <a:avLst/>
+          </a:prstGeom>
+          <a:noFill/>
+          <a:ln>
+            <a:noFill/>
+          </a:ln>
+        </p:spPr>
+        <p:txBody>
+          <a:bodyPr wrap="square" lIns="0" tIns="0" rIns="0" bIns="0"/>
+          <a:lstStyle/>
+          <a:p>
+            <a:r>
+              <a:rPr lang="hr-HR" sz="1080">
                 <a:solidFill>
                   <a:srgbClr val="6F6A5B"/>
                 </a:solidFill>
                 <a:latin typeface="Aptos"/>
               </a:rPr>
-              <a:t>Validation odabire beam 40; KenLM smanjuje WER nekoliko puta u odnosu na no-LM CTC decoding.</a:t>
-            </a:r>
-            <a:endParaRPr lang="hr-HR" sz="1180"/>
+              <a:t>VEPRAD validation odabire beam 40; KenLM smanjuje WER nekoliko puta u odnosu na no-LM CTC decoding.</a:t>
+            </a:r>
+            <a:endParaRPr lang="hr-HR" sz="1080"/>
           </a:p>
         </p:txBody>
       </p:sp>
@@ -8194,7 +8194,7 @@
         </p:nvSpPr>
         <p:spPr>
           <a:xfrm>
-            <a:off x="444500" y="1333500"/>
+            <a:off x="444500" y="1447800"/>
             <a:ext cx="736600" cy="44450"/>
           </a:xfrm>
           <a:prstGeom prst="rect">
@@ -9336,7 +9336,7 @@
                 </a:solidFill>
                 <a:latin typeface="Aptos"/>
               </a:rPr>
-              <a:t>Best model</a:t>
+              <a:t>Best VEPRAD model</a:t>
             </a:r>
             <a:endParaRPr lang="hr-HR" sz="1300"/>
           </a:p>
@@ -9466,7 +9466,7 @@
                 </a:solidFill>
                 <a:latin typeface="Aptos"/>
               </a:rPr>
-              <a:t>LM effect</a:t>
+              <a:t>VEPRAD LM effect</a:t>
             </a:r>
             <a:endParaRPr lang="hr-HR" sz="1300"/>
           </a:p>
@@ -9668,7 +9668,7 @@
                 </a:solidFill>
                 <a:latin typeface="Aptos"/>
               </a:rPr>
-              <a:t>seen vs unseen test WER</a:t>
+              <a:t>seen vs unseen VEPRAD</a:t>
             </a:r>
             <a:endParaRPr lang="hr-HR" sz="1050"/>
           </a:p>

--- a/presentation/ROGJ_Deepspeech2_topic_presentation.pptx
+++ b/presentation/ROGJ_Deepspeech2_topic_presentation.pptx
@@ -12,6 +12,7 @@
     <p:sldId id="260" r:id="rId6"/>
     <p:sldId id="261" r:id="rId7"/>
     <p:sldId id="262" r:id="rId8"/>
+    <p:sldId id="263" r:id="rId9"/>
   </p:sldIdLst>
   <p:sldSz cx="12192000" cy="6858000" type="wide"/>
   <p:notesSz cx="6858000" cy="9144000"/>
@@ -142,7 +143,7 @@
         </p:nvSpPr>
         <p:spPr>
           <a:xfrm>
-            <a:off x="419100" y="457200"/>
+            <a:off x="419100" y="520700"/>
             <a:ext cx="2032000" cy="241300"/>
           </a:xfrm>
           <a:prstGeom prst="rect">
@@ -178,23 +179,23 @@
         </p:nvSpPr>
         <p:spPr>
           <a:xfrm>
-            <a:off x="419100" y="863600"/>
-            <a:ext cx="2095500" cy="330200"/>
-          </a:xfrm>
-          <a:prstGeom prst="rect">
-            <a:avLst/>
-          </a:prstGeom>
-          <a:noFill/>
-          <a:ln>
-            <a:noFill/>
-          </a:ln>
-        </p:spPr>
-        <p:txBody>
-          <a:bodyPr wrap="square" lIns="0" tIns="0" rIns="0" bIns="0"/>
-          <a:lstStyle/>
-          <a:p>
-            <a:r>
-              <a:rPr lang="hr-HR" sz="3400" b="1">
+            <a:off x="419100" y="952500"/>
+            <a:ext cx="2095500" cy="368300"/>
+          </a:xfrm>
+          <a:prstGeom prst="rect">
+            <a:avLst/>
+          </a:prstGeom>
+          <a:noFill/>
+          <a:ln>
+            <a:noFill/>
+          </a:ln>
+        </p:spPr>
+        <p:txBody>
+          <a:bodyPr wrap="square" lIns="0" tIns="0" rIns="0" bIns="0"/>
+          <a:lstStyle/>
+          <a:p>
+            <a:r>
+              <a:rPr lang="hr-HR" sz="3800" b="1">
                 <a:solidFill>
                   <a:srgbClr val="F8F3E8"/>
                 </a:solidFill>
@@ -202,7 +203,7 @@
               </a:rPr>
               <a:t>Tema 12</a:t>
             </a:r>
-            <a:endParaRPr lang="hr-HR" sz="3400"/>
+            <a:endParaRPr lang="hr-HR" sz="3800"/>
           </a:p>
         </p:txBody>
       </p:sp>
@@ -214,139 +215,55 @@
         </p:nvSpPr>
         <p:spPr>
           <a:xfrm>
-            <a:off x="419100" y="1365250"/>
-            <a:ext cx="2159000" cy="952500"/>
-          </a:xfrm>
-          <a:prstGeom prst="rect">
-            <a:avLst/>
-          </a:prstGeom>
-          <a:noFill/>
-          <a:ln>
-            <a:noFill/>
-          </a:ln>
-        </p:spPr>
-        <p:txBody>
-          <a:bodyPr wrap="square" lIns="0" tIns="0" rIns="0" bIns="0"/>
-          <a:lstStyle/>
-          <a:p>
-            <a:r>
-              <a:rPr lang="hr-HR" sz="2300">
-                <a:solidFill>
-                  <a:srgbClr val="F2DFC7"/>
-                </a:solidFill>
-                <a:latin typeface="Aptos"/>
-              </a:rPr>
-              <a:t>Učenje akustičkih</a:t>
-            </a:r>
-            <a:endParaRPr lang="hr-HR" sz="2300"/>
-          </a:p>
-          <a:p>
-            <a:r>
-              <a:rPr lang="hr-HR" sz="2300">
-                <a:solidFill>
-                  <a:srgbClr val="F2DFC7"/>
-                </a:solidFill>
-                <a:latin typeface="Aptos"/>
-              </a:rPr>
-              <a:t>modela govora</a:t>
-            </a:r>
-            <a:endParaRPr lang="hr-HR" sz="2300"/>
-          </a:p>
-          <a:p>
-            <a:r>
-              <a:rPr lang="hr-HR" sz="2300">
-                <a:solidFill>
-                  <a:srgbClr val="F2DFC7"/>
-                </a:solidFill>
-                <a:latin typeface="Aptos"/>
-              </a:rPr>
-              <a:t>za raspoznavanje</a:t>
-            </a:r>
-            <a:endParaRPr lang="hr-HR" sz="2300"/>
-          </a:p>
-        </p:txBody>
-      </p:sp>
-      <p:sp>
-        <p:nvSpPr>
-          <p:cNvPr id="7" name="Text"/>
-          <p:cNvSpPr txBox="1"/>
-          <p:nvPr/>
-        </p:nvSpPr>
-        <p:spPr>
-          <a:xfrm>
-            <a:off x="3873500" y="666750"/>
-            <a:ext cx="6667500" cy="749300"/>
-          </a:xfrm>
-          <a:prstGeom prst="rect">
-            <a:avLst/>
-          </a:prstGeom>
-          <a:noFill/>
-          <a:ln>
-            <a:noFill/>
-          </a:ln>
-        </p:spPr>
-        <p:txBody>
-          <a:bodyPr wrap="square" lIns="0" tIns="0" rIns="0" bIns="0"/>
-          <a:lstStyle/>
-          <a:p>
-            <a:r>
-              <a:rPr lang="hr-HR" sz="4100" b="1">
+            <a:off x="3873500" y="952500"/>
+            <a:ext cx="6858000" cy="1333500"/>
+          </a:xfrm>
+          <a:prstGeom prst="rect">
+            <a:avLst/>
+          </a:prstGeom>
+          <a:noFill/>
+          <a:ln>
+            <a:noFill/>
+          </a:ln>
+        </p:spPr>
+        <p:txBody>
+          <a:bodyPr wrap="square" lIns="0" tIns="0" rIns="0" bIns="0"/>
+          <a:lstStyle/>
+          <a:p>
+            <a:r>
+              <a:rPr lang="hr-HR" sz="3700" b="1">
                 <a:solidFill>
                   <a:srgbClr val="15171A"/>
                 </a:solidFill>
                 <a:latin typeface="Aptos"/>
               </a:rPr>
-              <a:t>DeepSpeech2 na VEPRAD-u</a:t>
-            </a:r>
-            <a:endParaRPr lang="hr-HR" sz="4100"/>
-          </a:p>
-        </p:txBody>
-      </p:sp>
-      <p:sp>
-        <p:nvSpPr>
-          <p:cNvPr id="8" name="Text"/>
-          <p:cNvSpPr txBox="1"/>
-          <p:nvPr/>
-        </p:nvSpPr>
-        <p:spPr>
-          <a:xfrm>
-            <a:off x="3911600" y="1854200"/>
-            <a:ext cx="6667500" cy="457200"/>
-          </a:xfrm>
-          <a:prstGeom prst="rect">
-            <a:avLst/>
-          </a:prstGeom>
-          <a:noFill/>
-          <a:ln>
-            <a:noFill/>
-          </a:ln>
-        </p:spPr>
-        <p:txBody>
-          <a:bodyPr wrap="square" lIns="0" tIns="0" rIns="0" bIns="0"/>
-          <a:lstStyle/>
-          <a:p>
-            <a:r>
-              <a:rPr lang="hr-HR" sz="2300">
-                <a:solidFill>
-                  <a:srgbClr val="20282C"/>
-                </a:solidFill>
-                <a:latin typeface="Aptos"/>
-              </a:rPr>
-              <a:t>Zadatak: na temelju baze snimljenog i transkribiranog govora naučiti akustičke modele i testirati rad sustava.</a:t>
-            </a:r>
-            <a:endParaRPr lang="hr-HR" sz="2300"/>
-          </a:p>
-        </p:txBody>
-      </p:sp>
-      <p:sp>
-        <p:nvSpPr>
-          <p:cNvPr id="9" name="Rule"/>
+              <a:t>Učenje akustičkih modela govora za raspoznavanje</a:t>
+            </a:r>
+            <a:endParaRPr lang="hr-HR" sz="3700"/>
+          </a:p>
+          <a:p>
+            <a:r>
+              <a:rPr lang="hr-HR" sz="3700" b="1">
+                <a:solidFill>
+                  <a:srgbClr val="15171A"/>
+                </a:solidFill>
+                <a:latin typeface="Aptos"/>
+              </a:rPr>
+              <a:t>pomoću alata DeepSpeech2</a:t>
+            </a:r>
+            <a:endParaRPr lang="hr-HR" sz="3700"/>
+          </a:p>
+        </p:txBody>
+      </p:sp>
+      <p:sp>
+        <p:nvSpPr>
+          <p:cNvPr id="7" name="Rule"/>
           <p:cNvSpPr/>
           <p:nvPr/>
         </p:nvSpPr>
         <p:spPr>
           <a:xfrm>
-            <a:off x="3911600" y="2654300"/>
+            <a:off x="3911600" y="2730500"/>
             <a:ext cx="5588000" cy="57150"/>
           </a:xfrm>
           <a:prstGeom prst="rect">
@@ -362,391 +279,73 @@
       </p:sp>
       <p:sp>
         <p:nvSpPr>
-          <p:cNvPr id="10" name="Text"/>
-          <p:cNvSpPr txBox="1"/>
-          <p:nvPr/>
-        </p:nvSpPr>
-        <p:spPr>
-          <a:xfrm>
-            <a:off x="3911600" y="2933700"/>
-            <a:ext cx="5715000" cy="444500"/>
-          </a:xfrm>
-          <a:prstGeom prst="rect">
-            <a:avLst/>
-          </a:prstGeom>
-          <a:noFill/>
-          <a:ln>
-            <a:noFill/>
-          </a:ln>
-        </p:spPr>
-        <p:txBody>
-          <a:bodyPr wrap="square" lIns="0" tIns="0" rIns="0" bIns="0"/>
-          <a:lstStyle/>
-          <a:p>
-            <a:r>
-              <a:rPr lang="hr-HR" sz="2100" b="1">
-                <a:solidFill>
-                  <a:srgbClr val="15171A"/>
-                </a:solidFill>
-                <a:latin typeface="Aptos"/>
-              </a:rPr>
-              <a:t>VEPRAD -&gt; DeepSpeech2 trening -&gt; KenLM -&gt; WER/CER</a:t>
-            </a:r>
-            <a:endParaRPr lang="hr-HR" sz="2100"/>
-          </a:p>
-        </p:txBody>
-      </p:sp>
-      <p:sp>
-        <p:nvSpPr>
-          <p:cNvPr id="11" name="Rectangle"/>
-          <p:cNvSpPr/>
-          <p:nvPr/>
-        </p:nvSpPr>
-        <p:spPr>
-          <a:xfrm>
-            <a:off x="3911600" y="3683000"/>
-            <a:ext cx="1555750" cy="736600"/>
-          </a:xfrm>
-          <a:prstGeom prst="rect">
-            <a:avLst/>
-          </a:prstGeom>
-          <a:solidFill>
-            <a:srgbClr val="2C8C99"/>
-          </a:solidFill>
-          <a:ln>
-            <a:noFill/>
-          </a:ln>
-        </p:spPr>
-      </p:sp>
-      <p:sp>
-        <p:nvSpPr>
-          <p:cNvPr id="12" name="Text"/>
-          <p:cNvSpPr txBox="1"/>
-          <p:nvPr/>
-        </p:nvSpPr>
-        <p:spPr>
-          <a:xfrm>
-            <a:off x="4051300" y="3784600"/>
-            <a:ext cx="1143000" cy="279400"/>
-          </a:xfrm>
-          <a:prstGeom prst="rect">
-            <a:avLst/>
-          </a:prstGeom>
-          <a:noFill/>
-          <a:ln>
-            <a:noFill/>
-          </a:ln>
-        </p:spPr>
-        <p:txBody>
-          <a:bodyPr wrap="square" lIns="0" tIns="0" rIns="0" bIns="0"/>
-          <a:lstStyle/>
-          <a:p>
-            <a:r>
-              <a:rPr lang="hr-HR" sz="3000" b="1">
-                <a:solidFill>
-                  <a:srgbClr val="F8F3E8"/>
-                </a:solidFill>
-                <a:latin typeface="Aptos"/>
-              </a:rPr>
-              <a:t>3</a:t>
-            </a:r>
-            <a:endParaRPr lang="hr-HR" sz="3000"/>
-          </a:p>
-        </p:txBody>
-      </p:sp>
-      <p:sp>
-        <p:nvSpPr>
-          <p:cNvPr id="13" name="Text"/>
-          <p:cNvSpPr txBox="1"/>
-          <p:nvPr/>
-        </p:nvSpPr>
-        <p:spPr>
-          <a:xfrm>
-            <a:off x="4051300" y="4102100"/>
-            <a:ext cx="1270000" cy="158750"/>
-          </a:xfrm>
-          <a:prstGeom prst="rect">
-            <a:avLst/>
-          </a:prstGeom>
-          <a:noFill/>
-          <a:ln>
-            <a:noFill/>
-          </a:ln>
-        </p:spPr>
-        <p:txBody>
-          <a:bodyPr wrap="square" lIns="0" tIns="0" rIns="0" bIns="0"/>
-          <a:lstStyle/>
-          <a:p>
-            <a:r>
-              <a:rPr lang="hr-HR" sz="1300">
-                <a:solidFill>
-                  <a:srgbClr val="F8F3E8"/>
-                </a:solidFill>
-                <a:latin typeface="Aptos"/>
-              </a:rPr>
-              <a:t>trenirana modela</a:t>
-            </a:r>
-            <a:endParaRPr lang="hr-HR" sz="1300"/>
-          </a:p>
-        </p:txBody>
-      </p:sp>
-      <p:sp>
-        <p:nvSpPr>
-          <p:cNvPr id="14" name="Rectangle"/>
-          <p:cNvSpPr/>
-          <p:nvPr/>
-        </p:nvSpPr>
-        <p:spPr>
-          <a:xfrm>
-            <a:off x="5721350" y="3683000"/>
-            <a:ext cx="1555750" cy="736600"/>
-          </a:xfrm>
-          <a:prstGeom prst="rect">
-            <a:avLst/>
-          </a:prstGeom>
-          <a:solidFill>
-            <a:srgbClr val="F0B429"/>
-          </a:solidFill>
-          <a:ln>
-            <a:noFill/>
-          </a:ln>
-        </p:spPr>
-      </p:sp>
-      <p:sp>
-        <p:nvSpPr>
-          <p:cNvPr id="15" name="Text"/>
-          <p:cNvSpPr txBox="1"/>
-          <p:nvPr/>
-        </p:nvSpPr>
-        <p:spPr>
-          <a:xfrm>
-            <a:off x="5861050" y="3784600"/>
-            <a:ext cx="1143000" cy="279400"/>
-          </a:xfrm>
-          <a:prstGeom prst="rect">
-            <a:avLst/>
-          </a:prstGeom>
-          <a:noFill/>
-          <a:ln>
-            <a:noFill/>
-          </a:ln>
-        </p:spPr>
-        <p:txBody>
-          <a:bodyPr wrap="square" lIns="0" tIns="0" rIns="0" bIns="0"/>
-          <a:lstStyle/>
-          <a:p>
-            <a:r>
-              <a:rPr lang="hr-HR" sz="3000" b="1">
-                <a:solidFill>
-                  <a:srgbClr val="15171A"/>
-                </a:solidFill>
-                <a:latin typeface="Aptos"/>
-              </a:rPr>
-              <a:t>6</a:t>
-            </a:r>
-            <a:endParaRPr lang="hr-HR" sz="3000"/>
-          </a:p>
-        </p:txBody>
-      </p:sp>
-      <p:sp>
-        <p:nvSpPr>
-          <p:cNvPr id="16" name="Text"/>
-          <p:cNvSpPr txBox="1"/>
-          <p:nvPr/>
-        </p:nvSpPr>
-        <p:spPr>
-          <a:xfrm>
-            <a:off x="5861050" y="4102100"/>
-            <a:ext cx="1270000" cy="158750"/>
-          </a:xfrm>
-          <a:prstGeom prst="rect">
-            <a:avLst/>
-          </a:prstGeom>
-          <a:noFill/>
-          <a:ln>
-            <a:noFill/>
-          </a:ln>
-        </p:spPr>
-        <p:txBody>
-          <a:bodyPr wrap="square" lIns="0" tIns="0" rIns="0" bIns="0"/>
-          <a:lstStyle/>
-          <a:p>
-            <a:r>
-              <a:rPr lang="hr-HR" sz="1300">
-                <a:solidFill>
-                  <a:srgbClr val="15171A"/>
-                </a:solidFill>
-                <a:latin typeface="Aptos"/>
-              </a:rPr>
-              <a:t>eval subsetova</a:t>
-            </a:r>
-            <a:endParaRPr lang="hr-HR" sz="1300"/>
-          </a:p>
-        </p:txBody>
-      </p:sp>
-      <p:sp>
-        <p:nvSpPr>
-          <p:cNvPr id="17" name="Rectangle"/>
-          <p:cNvSpPr/>
-          <p:nvPr/>
-        </p:nvSpPr>
-        <p:spPr>
-          <a:xfrm>
-            <a:off x="7531100" y="3683000"/>
-            <a:ext cx="1555750" cy="736600"/>
-          </a:xfrm>
-          <a:prstGeom prst="rect">
-            <a:avLst/>
-          </a:prstGeom>
-          <a:solidFill>
-            <a:srgbClr val="E24A2A"/>
-          </a:solidFill>
-          <a:ln>
-            <a:noFill/>
-          </a:ln>
-        </p:spPr>
-      </p:sp>
-      <p:sp>
-        <p:nvSpPr>
-          <p:cNvPr id="18" name="Text"/>
-          <p:cNvSpPr txBox="1"/>
-          <p:nvPr/>
-        </p:nvSpPr>
-        <p:spPr>
-          <a:xfrm>
-            <a:off x="7670800" y="3784600"/>
-            <a:ext cx="1143000" cy="279400"/>
-          </a:xfrm>
-          <a:prstGeom prst="rect">
-            <a:avLst/>
-          </a:prstGeom>
-          <a:noFill/>
-          <a:ln>
-            <a:noFill/>
-          </a:ln>
-        </p:spPr>
-        <p:txBody>
-          <a:bodyPr wrap="square" lIns="0" tIns="0" rIns="0" bIns="0"/>
-          <a:lstStyle/>
-          <a:p>
-            <a:r>
-              <a:rPr lang="hr-HR" sz="3000" b="1">
-                <a:solidFill>
-                  <a:srgbClr val="F8F3E8"/>
-                </a:solidFill>
-                <a:latin typeface="Aptos"/>
-              </a:rPr>
-              <a:t>0.118</a:t>
-            </a:r>
-            <a:endParaRPr lang="hr-HR" sz="3000"/>
-          </a:p>
-        </p:txBody>
-      </p:sp>
-      <p:sp>
-        <p:nvSpPr>
-          <p:cNvPr id="19" name="Text"/>
-          <p:cNvSpPr txBox="1"/>
-          <p:nvPr/>
-        </p:nvSpPr>
-        <p:spPr>
-          <a:xfrm>
-            <a:off x="7670800" y="4102100"/>
-            <a:ext cx="1270000" cy="158750"/>
-          </a:xfrm>
-          <a:prstGeom prst="rect">
-            <a:avLst/>
-          </a:prstGeom>
-          <a:noFill/>
-          <a:ln>
-            <a:noFill/>
-          </a:ln>
-        </p:spPr>
-        <p:txBody>
-          <a:bodyPr wrap="square" lIns="0" tIns="0" rIns="0" bIns="0"/>
-          <a:lstStyle/>
-          <a:p>
-            <a:r>
-              <a:rPr lang="hr-HR" sz="1300">
-                <a:solidFill>
-                  <a:srgbClr val="F8F3E8"/>
-                </a:solidFill>
-                <a:latin typeface="Aptos"/>
-              </a:rPr>
-              <a:t>najbolji test WER</a:t>
-            </a:r>
-            <a:endParaRPr lang="hr-HR" sz="1300"/>
-          </a:p>
-        </p:txBody>
-      </p:sp>
-      <p:sp>
-        <p:nvSpPr>
-          <p:cNvPr id="20" name="Text"/>
-          <p:cNvSpPr txBox="1"/>
-          <p:nvPr/>
-        </p:nvSpPr>
-        <p:spPr>
-          <a:xfrm>
-            <a:off x="3911600" y="4889500"/>
-            <a:ext cx="6223000" cy="825500"/>
-          </a:xfrm>
-          <a:prstGeom prst="rect">
-            <a:avLst/>
-          </a:prstGeom>
-          <a:noFill/>
-          <a:ln>
-            <a:noFill/>
-          </a:ln>
-        </p:spPr>
-        <p:txBody>
-          <a:bodyPr wrap="square" lIns="0" tIns="0" rIns="0" bIns="0"/>
-          <a:lstStyle/>
-          <a:p>
-            <a:r>
-              <a:rPr lang="hr-HR" sz="1900">
+          <p:cNvPr id="8" name="Text"/>
+          <p:cNvSpPr txBox="1"/>
+          <p:nvPr/>
+        </p:nvSpPr>
+        <p:spPr>
+          <a:xfrm>
+            <a:off x="3911600" y="3175000"/>
+            <a:ext cx="6858000" cy="952500"/>
+          </a:xfrm>
+          <a:prstGeom prst="rect">
+            <a:avLst/>
+          </a:prstGeom>
+          <a:noFill/>
+          <a:ln>
+            <a:noFill/>
+          </a:ln>
+        </p:spPr>
+        <p:txBody>
+          <a:bodyPr wrap="square" lIns="0" tIns="0" rIns="0" bIns="0"/>
+          <a:lstStyle/>
+          <a:p>
+            <a:r>
+              <a:rPr lang="hr-HR" sz="2400">
+                <a:solidFill>
+                  <a:srgbClr val="20282C"/>
+                </a:solidFill>
+                <a:latin typeface="Aptos"/>
+              </a:rPr>
+              <a:t>Zadatak: na temelju VEPRAD baze snimljenog i transkribiranog govora naučiti akustičke modele govora i testirati rad sustava.</a:t>
+            </a:r>
+            <a:endParaRPr lang="hr-HR" sz="2400"/>
+          </a:p>
+        </p:txBody>
+      </p:sp>
+      <p:sp>
+        <p:nvSpPr>
+          <p:cNvPr id="9" name="Text"/>
+          <p:cNvSpPr txBox="1"/>
+          <p:nvPr/>
+        </p:nvSpPr>
+        <p:spPr>
+          <a:xfrm>
+            <a:off x="3911600" y="4826000"/>
+            <a:ext cx="3302000" cy="215900"/>
+          </a:xfrm>
+          <a:prstGeom prst="rect">
+            <a:avLst/>
+          </a:prstGeom>
+          <a:noFill/>
+          <a:ln>
+            <a:noFill/>
+          </a:ln>
+        </p:spPr>
+        <p:txBody>
+          <a:bodyPr wrap="square" lIns="0" tIns="0" rIns="0" bIns="0"/>
+          <a:lstStyle/>
+          <a:p>
+            <a:r>
+              <a:rPr lang="hr-HR" sz="1800">
                 <a:solidFill>
                   <a:srgbClr val="6F6A5B"/>
                 </a:solidFill>
                 <a:latin typeface="Aptos"/>
               </a:rPr>
-              <a:t>U prezentaciji: kako smo pripremili VEPRAD, izolirali test skup, definirali CV splitove, trenirali DS2 konfiguracije i izmjerili utjecaj KenLM-a.</a:t>
-            </a:r>
-            <a:endParaRPr lang="hr-HR" sz="1900"/>
-          </a:p>
-        </p:txBody>
-      </p:sp>
-      <p:sp>
-        <p:nvSpPr>
-          <p:cNvPr id="21" name="Text"/>
-          <p:cNvSpPr txBox="1"/>
-          <p:nvPr/>
-        </p:nvSpPr>
-        <p:spPr>
-          <a:xfrm>
-            <a:off x="3911600" y="6146800"/>
-            <a:ext cx="5715000" cy="203200"/>
-          </a:xfrm>
-          <a:prstGeom prst="rect">
-            <a:avLst/>
-          </a:prstGeom>
-          <a:noFill/>
-          <a:ln>
-            <a:noFill/>
-          </a:ln>
-        </p:spPr>
-        <p:txBody>
-          <a:bodyPr wrap="square" lIns="0" tIns="0" rIns="0" bIns="0"/>
-          <a:lstStyle/>
-          <a:p>
-            <a:r>
-              <a:rPr lang="hr-HR" sz="1300">
-                <a:solidFill>
-                  <a:srgbClr val="6F6A5B"/>
-                </a:solidFill>
-                <a:latin typeface="Aptos"/>
-              </a:rPr>
-              <a:t>Repo: PaddleSpeech DeepSpeech2 pipeline + VEPRAD manifesti + rezultatne metrike</a:t>
-            </a:r>
-            <a:endParaRPr lang="hr-HR" sz="1300"/>
+              <a:t>Luka Ivanić</a:t>
+            </a:r>
+            <a:endParaRPr lang="hr-HR" sz="1800"/>
           </a:p>
         </p:txBody>
       </p:sp>
@@ -813,7 +412,7 @@
                 </a:solidFill>
                 <a:latin typeface="Aptos"/>
               </a:rPr>
-              <a:t>02 · VEPRAD PODACI I SPLITOVI</a:t>
+              <a:t>02</a:t>
             </a:r>
             <a:endParaRPr lang="hr-HR" sz="1500"/>
           </a:p>
@@ -849,7 +448,7 @@
                 </a:solidFill>
                 <a:latin typeface="Aptos"/>
               </a:rPr>
-              <a:t>VEPRAD test skup je odvojen prije cross-validacije.</a:t>
+              <a:t>VEPRAD dataset</a:t>
             </a:r>
             <a:endParaRPr lang="hr-HR" sz="2350"/>
           </a:p>
@@ -885,7 +484,7 @@
                 </a:solidFill>
                 <a:latin typeface="Aptos"/>
               </a:rPr>
-              <a:t>Skup koristimo kao uparene audio snimke i transkripte, a govornike držimo kao posebnu os generalizacije.</a:t>
+              <a:t>Korišteni VEPRAD korpus nakon izdvajanja sm04 ima 25 govornika, 5 255 snimljenih iskaza i 8.03 h govora.</a:t>
             </a:r>
             <a:endParaRPr lang="hr-HR" sz="1080"/>
           </a:p>
@@ -943,7 +542,7 @@
                 </a:solidFill>
                 <a:latin typeface="Aptos"/>
               </a:rPr>
-              <a:t>Permanentni test</a:t>
+              <a:t>Test skup</a:t>
             </a:r>
             <a:endParaRPr lang="hr-HR" sz="1800"/>
           </a:p>
@@ -1247,7 +846,7 @@
                 </a:solidFill>
                 <a:latin typeface="Aptos"/>
               </a:rPr>
-              <a:t>VEPRAD test audio + JSONL žive u data/test i ne ulaze u CV</a:t>
+              <a:t>test snimke i transkripte izdvojili smo jednom i držimo ih odvojeno od CV skupova</a:t>
             </a:r>
             <a:endParaRPr lang="hr-HR" sz="1250"/>
           </a:p>
@@ -2992,42 +2591,6 @@
               <a:t>Reproducibilnost: permanentni test skup ne diramo nakon stvaranja; za nove validacijske eksperimente generiramo nove CV splitove iz non-test poola.</a:t>
             </a:r>
             <a:endParaRPr lang="hr-HR" sz="1450"/>
-          </a:p>
-        </p:txBody>
-      </p:sp>
-      <p:sp>
-        <p:nvSpPr>
-          <p:cNvPr id="68" name="Footer"/>
-          <p:cNvSpPr txBox="1"/>
-          <p:nvPr/>
-        </p:nvSpPr>
-        <p:spPr>
-          <a:xfrm>
-            <a:off x="444500" y="6591300"/>
-            <a:ext cx="9207500" cy="152400"/>
-          </a:xfrm>
-          <a:prstGeom prst="rect">
-            <a:avLst/>
-          </a:prstGeom>
-          <a:noFill/>
-          <a:ln>
-            <a:noFill/>
-          </a:ln>
-        </p:spPr>
-        <p:txBody>
-          <a:bodyPr wrap="square" lIns="0" tIns="0" rIns="0" bIns="0"/>
-          <a:lstStyle/>
-          <a:p>
-            <a:r>
-              <a:rPr lang="hr-HR" sz="850">
-                <a:solidFill>
-                  <a:srgbClr val="6F6A5B"/>
-                </a:solidFill>
-                <a:latin typeface="Aptos"/>
-              </a:rPr>
-              <a:t>Izvori u repozitoriju: data/test/*.meta.json, data/cross_validation_splits/cv_paper_small_001, README.</a:t>
-            </a:r>
-            <a:endParaRPr lang="hr-HR" sz="850"/>
           </a:p>
         </p:txBody>
       </p:sp>
@@ -3094,7 +2657,7 @@
                 </a:solidFill>
                 <a:latin typeface="Aptos"/>
               </a:rPr>
-              <a:t>03 · PIPELINE</a:t>
+              <a:t>03</a:t>
             </a:r>
             <a:endParaRPr lang="hr-HR" sz="1500"/>
           </a:p>
@@ -3130,7 +2693,7 @@
                 </a:solidFill>
                 <a:latin typeface="Aptos"/>
               </a:rPr>
-              <a:t>VEPRAD pipeline je jedan Python tok, ne stari shell recipe.</a:t>
+              <a:t>VEPRAD + DeepSpeech2 Pipeline</a:t>
             </a:r>
             <a:endParaRPr lang="hr-HR" sz="2350"/>
           </a:p>
@@ -3166,7 +2729,7 @@
                 </a:solidFill>
                 <a:latin typeface="Aptos"/>
               </a:rPr>
-              <a:t>Skripta poziva PaddleSpeech Python funkcije direktno: VEPRAD split/manifesti, trening, averaging, eval i metrike.</a:t>
+              <a:t>Od VEPRAD snimki i transkripata gradimo značajke, CTC rječnik, akustički model i WER/CER evaluaciju.</a:t>
             </a:r>
             <a:endParaRPr lang="hr-HR" sz="1080"/>
           </a:p>
@@ -3202,8 +2765,8 @@
         </p:nvSpPr>
         <p:spPr>
           <a:xfrm>
-            <a:off x="584200" y="1854200"/>
-            <a:ext cx="1282700" cy="584200"/>
+            <a:off x="444500" y="1854200"/>
+            <a:ext cx="1422400" cy="711200"/>
           </a:xfrm>
           <a:prstGeom prst="rect">
             <a:avLst/>
@@ -3224,8 +2787,8 @@
         </p:nvSpPr>
         <p:spPr>
           <a:xfrm>
-            <a:off x="698500" y="1955800"/>
-            <a:ext cx="1079500" cy="177800"/>
+            <a:off x="558800" y="1955800"/>
+            <a:ext cx="1193800" cy="190500"/>
           </a:xfrm>
           <a:prstGeom prst="rect">
             <a:avLst/>
@@ -3260,23 +2823,23 @@
         </p:nvSpPr>
         <p:spPr>
           <a:xfrm>
-            <a:off x="698500" y="2190750"/>
-            <a:ext cx="1066800" cy="127000"/>
-          </a:xfrm>
-          <a:prstGeom prst="rect">
-            <a:avLst/>
-          </a:prstGeom>
-          <a:noFill/>
-          <a:ln>
-            <a:noFill/>
-          </a:ln>
-        </p:spPr>
-        <p:txBody>
-          <a:bodyPr wrap="square" lIns="0" tIns="0" rIns="0" bIns="0"/>
-          <a:lstStyle/>
-          <a:p>
-            <a:r>
-              <a:rPr lang="hr-HR" sz="1150">
+            <a:off x="558800" y="2197100"/>
+            <a:ext cx="1193800" cy="304800"/>
+          </a:xfrm>
+          <a:prstGeom prst="rect">
+            <a:avLst/>
+          </a:prstGeom>
+          <a:noFill/>
+          <a:ln>
+            <a:noFill/>
+          </a:ln>
+        </p:spPr>
+        <p:txBody>
+          <a:bodyPr wrap="square" lIns="0" tIns="0" rIns="0" bIns="0"/>
+          <a:lstStyle/>
+          <a:p>
+            <a:r>
+              <a:rPr lang="hr-HR" sz="980">
                 <a:solidFill>
                   <a:srgbClr val="F8F3E8"/>
                 </a:solidFill>
@@ -3284,7 +2847,7 @@
               </a:rPr>
               <a:t>audio + txt</a:t>
             </a:r>
-            <a:endParaRPr lang="hr-HR" sz="1150"/>
+            <a:endParaRPr lang="hr-HR" sz="980"/>
           </a:p>
         </p:txBody>
       </p:sp>
@@ -3296,7 +2859,7 @@
         </p:nvSpPr>
         <p:spPr>
           <a:xfrm>
-            <a:off x="1943100" y="2019300"/>
+            <a:off x="1943100" y="2076450"/>
             <a:ext cx="228600" cy="203200"/>
           </a:xfrm>
           <a:prstGeom prst="rect">
@@ -3332,8 +2895,8 @@
         </p:nvSpPr>
         <p:spPr>
           <a:xfrm>
-            <a:off x="2159000" y="1854200"/>
-            <a:ext cx="1282700" cy="584200"/>
+            <a:off x="2197100" y="1854200"/>
+            <a:ext cx="1422400" cy="711200"/>
           </a:xfrm>
           <a:prstGeom prst="rect">
             <a:avLst/>
@@ -3354,8 +2917,8 @@
         </p:nvSpPr>
         <p:spPr>
           <a:xfrm>
-            <a:off x="2273300" y="1955800"/>
-            <a:ext cx="1079500" cy="177800"/>
+            <a:off x="2311400" y="1955800"/>
+            <a:ext cx="1193800" cy="190500"/>
           </a:xfrm>
           <a:prstGeom prst="rect">
             <a:avLst/>
@@ -3390,23 +2953,23 @@
         </p:nvSpPr>
         <p:spPr>
           <a:xfrm>
-            <a:off x="2273300" y="2190750"/>
-            <a:ext cx="1066800" cy="127000"/>
-          </a:xfrm>
-          <a:prstGeom prst="rect">
-            <a:avLst/>
-          </a:prstGeom>
-          <a:noFill/>
-          <a:ln>
-            <a:noFill/>
-          </a:ln>
-        </p:spPr>
-        <p:txBody>
-          <a:bodyPr wrap="square" lIns="0" tIns="0" rIns="0" bIns="0"/>
-          <a:lstStyle/>
-          <a:p>
-            <a:r>
-              <a:rPr lang="hr-HR" sz="1150">
+            <a:off x="2311400" y="2197100"/>
+            <a:ext cx="1193800" cy="304800"/>
+          </a:xfrm>
+          <a:prstGeom prst="rect">
+            <a:avLst/>
+          </a:prstGeom>
+          <a:noFill/>
+          <a:ln>
+            <a:noFill/>
+          </a:ln>
+        </p:spPr>
+        <p:txBody>
+          <a:bodyPr wrap="square" lIns="0" tIns="0" rIns="0" bIns="0"/>
+          <a:lstStyle/>
+          <a:p>
+            <a:r>
+              <a:rPr lang="hr-HR" sz="980">
                 <a:solidFill>
                   <a:srgbClr val="F8F3E8"/>
                 </a:solidFill>
@@ -3414,7 +2977,7 @@
               </a:rPr>
               <a:t>JSONL rel. paths</a:t>
             </a:r>
-            <a:endParaRPr lang="hr-HR" sz="1150"/>
+            <a:endParaRPr lang="hr-HR" sz="980"/>
           </a:p>
         </p:txBody>
       </p:sp>
@@ -3426,7 +2989,7 @@
         </p:nvSpPr>
         <p:spPr>
           <a:xfrm>
-            <a:off x="3517900" y="2019300"/>
+            <a:off x="3695700" y="2076450"/>
             <a:ext cx="228600" cy="203200"/>
           </a:xfrm>
           <a:prstGeom prst="rect">
@@ -3462,8 +3025,8 @@
         </p:nvSpPr>
         <p:spPr>
           <a:xfrm>
-            <a:off x="3733800" y="1854200"/>
-            <a:ext cx="1282700" cy="584200"/>
+            <a:off x="3949700" y="1854200"/>
+            <a:ext cx="1422400" cy="711200"/>
           </a:xfrm>
           <a:prstGeom prst="rect">
             <a:avLst/>
@@ -3484,8 +3047,8 @@
         </p:nvSpPr>
         <p:spPr>
           <a:xfrm>
-            <a:off x="3848100" y="1955800"/>
-            <a:ext cx="1079500" cy="177800"/>
+            <a:off x="4064000" y="1955800"/>
+            <a:ext cx="1193800" cy="190500"/>
           </a:xfrm>
           <a:prstGeom prst="rect">
             <a:avLst/>
@@ -3520,31 +3083,43 @@
         </p:nvSpPr>
         <p:spPr>
           <a:xfrm>
-            <a:off x="3848100" y="2190750"/>
-            <a:ext cx="1066800" cy="127000"/>
-          </a:xfrm>
-          <a:prstGeom prst="rect">
-            <a:avLst/>
-          </a:prstGeom>
-          <a:noFill/>
-          <a:ln>
-            <a:noFill/>
-          </a:ln>
-        </p:spPr>
-        <p:txBody>
-          <a:bodyPr wrap="square" lIns="0" tIns="0" rIns="0" bIns="0"/>
-          <a:lstStyle/>
-          <a:p>
-            <a:r>
-              <a:rPr lang="hr-HR" sz="1150">
+            <a:off x="4064000" y="2197100"/>
+            <a:ext cx="1193800" cy="304800"/>
+          </a:xfrm>
+          <a:prstGeom prst="rect">
+            <a:avLst/>
+          </a:prstGeom>
+          <a:noFill/>
+          <a:ln>
+            <a:noFill/>
+          </a:ln>
+        </p:spPr>
+        <p:txBody>
+          <a:bodyPr wrap="square" lIns="0" tIns="0" rIns="0" bIns="0"/>
+          <a:lstStyle/>
+          <a:p>
+            <a:r>
+              <a:rPr lang="hr-HR" sz="980">
                 <a:solidFill>
                   <a:srgbClr val="15171A"/>
                 </a:solidFill>
                 <a:latin typeface="Aptos"/>
               </a:rPr>
-              <a:t>fbank_kaldi + CMVN</a:t>
-            </a:r>
-            <a:endParaRPr lang="hr-HR" sz="1150"/>
+              <a:t>fbank_kaldi</a:t>
+            </a:r>
+            <a:endParaRPr lang="hr-HR" sz="980"/>
+          </a:p>
+          <a:p>
+            <a:r>
+              <a:rPr lang="hr-HR" sz="980">
+                <a:solidFill>
+                  <a:srgbClr val="15171A"/>
+                </a:solidFill>
+                <a:latin typeface="Aptos"/>
+              </a:rPr>
+              <a:t>+ CMVN</a:t>
+            </a:r>
+            <a:endParaRPr lang="hr-HR" sz="980"/>
           </a:p>
         </p:txBody>
       </p:sp>
@@ -3556,7 +3131,7 @@
         </p:nvSpPr>
         <p:spPr>
           <a:xfrm>
-            <a:off x="5092700" y="2019300"/>
+            <a:off x="5448300" y="2076450"/>
             <a:ext cx="228600" cy="203200"/>
           </a:xfrm>
           <a:prstGeom prst="rect">
@@ -3592,8 +3167,8 @@
         </p:nvSpPr>
         <p:spPr>
           <a:xfrm>
-            <a:off x="5308600" y="1854200"/>
-            <a:ext cx="1282700" cy="584200"/>
+            <a:off x="5702300" y="1854200"/>
+            <a:ext cx="1422400" cy="711200"/>
           </a:xfrm>
           <a:prstGeom prst="rect">
             <a:avLst/>
@@ -3614,8 +3189,8 @@
         </p:nvSpPr>
         <p:spPr>
           <a:xfrm>
-            <a:off x="5422900" y="1955800"/>
-            <a:ext cx="1079500" cy="177800"/>
+            <a:off x="5816600" y="1955800"/>
+            <a:ext cx="1193800" cy="190500"/>
           </a:xfrm>
           <a:prstGeom prst="rect">
             <a:avLst/>
@@ -3650,23 +3225,23 @@
         </p:nvSpPr>
         <p:spPr>
           <a:xfrm>
-            <a:off x="5422900" y="2190750"/>
-            <a:ext cx="1066800" cy="127000"/>
-          </a:xfrm>
-          <a:prstGeom prst="rect">
-            <a:avLst/>
-          </a:prstGeom>
-          <a:noFill/>
-          <a:ln>
-            <a:noFill/>
-          </a:ln>
-        </p:spPr>
-        <p:txBody>
-          <a:bodyPr wrap="square" lIns="0" tIns="0" rIns="0" bIns="0"/>
-          <a:lstStyle/>
-          <a:p>
-            <a:r>
-              <a:rPr lang="hr-HR" sz="1150">
+            <a:off x="5816600" y="2197100"/>
+            <a:ext cx="1193800" cy="304800"/>
+          </a:xfrm>
+          <a:prstGeom prst="rect">
+            <a:avLst/>
+          </a:prstGeom>
+          <a:noFill/>
+          <a:ln>
+            <a:noFill/>
+          </a:ln>
+        </p:spPr>
+        <p:txBody>
+          <a:bodyPr wrap="square" lIns="0" tIns="0" rIns="0" bIns="0"/>
+          <a:lstStyle/>
+          <a:p>
+            <a:r>
+              <a:rPr lang="hr-HR" sz="980">
                 <a:solidFill>
                   <a:srgbClr val="F8F3E8"/>
                 </a:solidFill>
@@ -3674,7 +3249,7 @@
               </a:rPr>
               <a:t>31 char, train-only</a:t>
             </a:r>
-            <a:endParaRPr lang="hr-HR" sz="1150"/>
+            <a:endParaRPr lang="hr-HR" sz="980"/>
           </a:p>
         </p:txBody>
       </p:sp>
@@ -3686,7 +3261,7 @@
         </p:nvSpPr>
         <p:spPr>
           <a:xfrm>
-            <a:off x="6667500" y="2019300"/>
+            <a:off x="7200900" y="2076450"/>
             <a:ext cx="228600" cy="203200"/>
           </a:xfrm>
           <a:prstGeom prst="rect">
@@ -3722,8 +3297,8 @@
         </p:nvSpPr>
         <p:spPr>
           <a:xfrm>
-            <a:off x="6883400" y="1854200"/>
-            <a:ext cx="1282700" cy="584200"/>
+            <a:off x="7454900" y="1854200"/>
+            <a:ext cx="1422400" cy="711200"/>
           </a:xfrm>
           <a:prstGeom prst="rect">
             <a:avLst/>
@@ -3744,8 +3319,8 @@
         </p:nvSpPr>
         <p:spPr>
           <a:xfrm>
-            <a:off x="6997700" y="1955800"/>
-            <a:ext cx="1079500" cy="177800"/>
+            <a:off x="7569200" y="1955800"/>
+            <a:ext cx="1193800" cy="190500"/>
           </a:xfrm>
           <a:prstGeom prst="rect">
             <a:avLst/>
@@ -3780,23 +3355,23 @@
         </p:nvSpPr>
         <p:spPr>
           <a:xfrm>
-            <a:off x="6997700" y="2190750"/>
-            <a:ext cx="1066800" cy="127000"/>
-          </a:xfrm>
-          <a:prstGeom prst="rect">
-            <a:avLst/>
-          </a:prstGeom>
-          <a:noFill/>
-          <a:ln>
-            <a:noFill/>
-          </a:ln>
-        </p:spPr>
-        <p:txBody>
-          <a:bodyPr wrap="square" lIns="0" tIns="0" rIns="0" bIns="0"/>
-          <a:lstStyle/>
-          <a:p>
-            <a:r>
-              <a:rPr lang="hr-HR" sz="1150">
+            <a:off x="7569200" y="2197100"/>
+            <a:ext cx="1193800" cy="304800"/>
+          </a:xfrm>
+          <a:prstGeom prst="rect">
+            <a:avLst/>
+          </a:prstGeom>
+          <a:noFill/>
+          <a:ln>
+            <a:noFill/>
+          </a:ln>
+        </p:spPr>
+        <p:txBody>
+          <a:bodyPr wrap="square" lIns="0" tIns="0" rIns="0" bIns="0"/>
+          <a:lstStyle/>
+          <a:p>
+            <a:r>
+              <a:rPr lang="hr-HR" sz="980">
                 <a:solidFill>
                   <a:srgbClr val="F8F3E8"/>
                 </a:solidFill>
@@ -3804,7 +3379,7 @@
               </a:rPr>
               <a:t>CTC trening</a:t>
             </a:r>
-            <a:endParaRPr lang="hr-HR" sz="1150"/>
+            <a:endParaRPr lang="hr-HR" sz="980"/>
           </a:p>
         </p:txBody>
       </p:sp>
@@ -3816,7 +3391,7 @@
         </p:nvSpPr>
         <p:spPr>
           <a:xfrm>
-            <a:off x="8242300" y="2019300"/>
+            <a:off x="8953500" y="2076450"/>
             <a:ext cx="228600" cy="203200"/>
           </a:xfrm>
           <a:prstGeom prst="rect">
@@ -3852,8 +3427,8 @@
         </p:nvSpPr>
         <p:spPr>
           <a:xfrm>
-            <a:off x="8458200" y="1854200"/>
-            <a:ext cx="1282700" cy="584200"/>
+            <a:off x="9207500" y="1854200"/>
+            <a:ext cx="1422400" cy="711200"/>
           </a:xfrm>
           <a:prstGeom prst="rect">
             <a:avLst/>
@@ -3874,8 +3449,8 @@
         </p:nvSpPr>
         <p:spPr>
           <a:xfrm>
-            <a:off x="8572500" y="1955800"/>
-            <a:ext cx="1079500" cy="177800"/>
+            <a:off x="9321800" y="1955800"/>
+            <a:ext cx="1193800" cy="190500"/>
           </a:xfrm>
           <a:prstGeom prst="rect">
             <a:avLst/>
@@ -3910,31 +3485,43 @@
         </p:nvSpPr>
         <p:spPr>
           <a:xfrm>
-            <a:off x="8572500" y="2190750"/>
-            <a:ext cx="1066800" cy="127000"/>
-          </a:xfrm>
-          <a:prstGeom prst="rect">
-            <a:avLst/>
-          </a:prstGeom>
-          <a:noFill/>
-          <a:ln>
-            <a:noFill/>
-          </a:ln>
-        </p:spPr>
-        <p:txBody>
-          <a:bodyPr wrap="square" lIns="0" tIns="0" rIns="0" bIns="0"/>
-          <a:lstStyle/>
-          <a:p>
-            <a:r>
-              <a:rPr lang="hr-HR" sz="1150">
+            <a:off x="9321800" y="2197100"/>
+            <a:ext cx="1193800" cy="304800"/>
+          </a:xfrm>
+          <a:prstGeom prst="rect">
+            <a:avLst/>
+          </a:prstGeom>
+          <a:noFill/>
+          <a:ln>
+            <a:noFill/>
+          </a:ln>
+        </p:spPr>
+        <p:txBody>
+          <a:bodyPr wrap="square" lIns="0" tIns="0" rIns="0" bIns="0"/>
+          <a:lstStyle/>
+          <a:p>
+            <a:r>
+              <a:rPr lang="hr-HR" sz="980">
                 <a:solidFill>
                   <a:srgbClr val="F8F3E8"/>
                 </a:solidFill>
                 <a:latin typeface="Aptos"/>
               </a:rPr>
-              <a:t>WER/CER po subsetu</a:t>
-            </a:r>
-            <a:endParaRPr lang="hr-HR" sz="1150"/>
+              <a:t>WER/CER</a:t>
+            </a:r>
+            <a:endParaRPr lang="hr-HR" sz="980"/>
+          </a:p>
+          <a:p>
+            <a:r>
+              <a:rPr lang="hr-HR" sz="980">
+                <a:solidFill>
+                  <a:srgbClr val="F8F3E8"/>
+                </a:solidFill>
+                <a:latin typeface="Aptos"/>
+              </a:rPr>
+              <a:t>po subsetu</a:t>
+            </a:r>
+            <a:endParaRPr lang="hr-HR" sz="980"/>
           </a:p>
         </p:txBody>
       </p:sp>
@@ -4194,8 +3781,8 @@
         </p:nvSpPr>
         <p:spPr>
           <a:xfrm>
-            <a:off x="584200" y="5080000"/>
-            <a:ext cx="8509000" cy="495300"/>
+            <a:off x="584200" y="5016500"/>
+            <a:ext cx="8509000" cy="596900"/>
           </a:xfrm>
           <a:prstGeom prst="rect">
             <a:avLst/>
@@ -4216,8 +3803,8 @@
         </p:nvSpPr>
         <p:spPr>
           <a:xfrm>
-            <a:off x="762000" y="5187950"/>
-            <a:ext cx="8128000" cy="266700"/>
+            <a:off x="762000" y="5130800"/>
+            <a:ext cx="8128000" cy="368300"/>
           </a:xfrm>
           <a:prstGeom prst="rect">
             <a:avLst/>
@@ -4238,45 +3825,9 @@
                 </a:solidFill>
                 <a:latin typeface="Aptos"/>
               </a:rPr>
-              <a:t>Programski tok: scripts/run_ds2_pipeline.py uzima VEPRAD manifest, generira PaddleSpeech podatke, trenira model, računa avg_1 checkpoint i evaluira VEPRAD val/test seen/unseen podskupove.</a:t>
+              <a:t>Isti preprocessing i isti split protokol koriste se za sve modele, pa razlike u WER/CER rezultatima dolaze iz arhitekture modela i dekodiranja, a ne iz promjene podataka.</a:t>
             </a:r>
             <a:endParaRPr lang="hr-HR" sz="1350"/>
-          </a:p>
-        </p:txBody>
-      </p:sp>
-      <p:sp>
-        <p:nvSpPr>
-          <p:cNvPr id="37" name="Footer"/>
-          <p:cNvSpPr txBox="1"/>
-          <p:nvPr/>
-        </p:nvSpPr>
-        <p:spPr>
-          <a:xfrm>
-            <a:off x="444500" y="6591300"/>
-            <a:ext cx="9207500" cy="152400"/>
-          </a:xfrm>
-          <a:prstGeom prst="rect">
-            <a:avLst/>
-          </a:prstGeom>
-          <a:noFill/>
-          <a:ln>
-            <a:noFill/>
-          </a:ln>
-        </p:spPr>
-        <p:txBody>
-          <a:bodyPr wrap="square" lIns="0" tIns="0" rIns="0" bIns="0"/>
-          <a:lstStyle/>
-          <a:p>
-            <a:r>
-              <a:rPr lang="hr-HR" sz="850">
-                <a:solidFill>
-                  <a:srgbClr val="6F6A5B"/>
-                </a:solidFill>
-                <a:latin typeface="Aptos"/>
-              </a:rPr>
-              <a:t>Pipeline datoteke: scripts/run_ds2_pipeline.py, scripts/create_cv_split.py, scripts/train_kenlm_lm.py.</a:t>
-            </a:r>
-            <a:endParaRPr lang="hr-HR" sz="850"/>
           </a:p>
         </p:txBody>
       </p:sp>
@@ -4313,139 +3864,9 @@
           <a:chExt cx="0" cy="0"/>
         </a:xfrm>
       </p:grpSpPr>
-      <p:sp>
-        <p:nvSpPr>
-          <p:cNvPr id="2" name="Kicker"/>
-          <p:cNvSpPr txBox="1"/>
-          <p:nvPr/>
-        </p:nvSpPr>
-        <p:spPr>
-          <a:xfrm>
-            <a:off x="444500" y="292100"/>
-            <a:ext cx="3683000" cy="203200"/>
-          </a:xfrm>
-          <a:prstGeom prst="rect">
-            <a:avLst/>
-          </a:prstGeom>
-          <a:noFill/>
-          <a:ln>
-            <a:noFill/>
-          </a:ln>
-        </p:spPr>
-        <p:txBody>
-          <a:bodyPr wrap="square" lIns="0" tIns="0" rIns="0" bIns="0"/>
-          <a:lstStyle/>
-          <a:p>
-            <a:r>
-              <a:rPr lang="hr-HR" sz="1500" b="1">
-                <a:solidFill>
-                  <a:srgbClr val="E24A2A"/>
-                </a:solidFill>
-                <a:latin typeface="Aptos"/>
-              </a:rPr>
-              <a:t>04 · DEEPSPEECH2</a:t>
-            </a:r>
-            <a:endParaRPr lang="hr-HR" sz="1500"/>
-          </a:p>
-        </p:txBody>
-      </p:sp>
-      <p:sp>
-        <p:nvSpPr>
-          <p:cNvPr id="3" name="Title"/>
-          <p:cNvSpPr txBox="1"/>
-          <p:nvPr/>
-        </p:nvSpPr>
-        <p:spPr>
-          <a:xfrm>
-            <a:off x="444500" y="520700"/>
-            <a:ext cx="7937500" cy="546100"/>
-          </a:xfrm>
-          <a:prstGeom prst="rect">
-            <a:avLst/>
-          </a:prstGeom>
-          <a:noFill/>
-          <a:ln>
-            <a:noFill/>
-          </a:ln>
-        </p:spPr>
-        <p:txBody>
-          <a:bodyPr wrap="square" lIns="0" tIns="0" rIns="0" bIns="0"/>
-          <a:lstStyle/>
-          <a:p>
-            <a:r>
-              <a:rPr lang="hr-HR" sz="2350" b="1">
-                <a:solidFill>
-                  <a:srgbClr val="15171A"/>
-                </a:solidFill>
-                <a:latin typeface="Aptos"/>
-              </a:rPr>
-              <a:t>DeepSpeech2 je akustički model koji smo trenirali na VEPRAD govoru.</a:t>
-            </a:r>
-            <a:endParaRPr lang="hr-HR" sz="2350"/>
-          </a:p>
-        </p:txBody>
-      </p:sp>
-      <p:sp>
-        <p:nvSpPr>
-          <p:cNvPr id="4" name="Support"/>
-          <p:cNvSpPr txBox="1"/>
-          <p:nvPr/>
-        </p:nvSpPr>
-        <p:spPr>
-          <a:xfrm>
-            <a:off x="444500" y="1130300"/>
-            <a:ext cx="7937500" cy="266700"/>
-          </a:xfrm>
-          <a:prstGeom prst="rect">
-            <a:avLst/>
-          </a:prstGeom>
-          <a:noFill/>
-          <a:ln>
-            <a:noFill/>
-          </a:ln>
-        </p:spPr>
-        <p:txBody>
-          <a:bodyPr wrap="square" lIns="0" tIns="0" rIns="0" bIns="0"/>
-          <a:lstStyle/>
-          <a:p>
-            <a:r>
-              <a:rPr lang="hr-HR" sz="1080">
-                <a:solidFill>
-                  <a:srgbClr val="6F6A5B"/>
-                </a:solidFill>
-                <a:latin typeface="Aptos"/>
-              </a:rPr>
-              <a:t>Slika prikazuje paper-style tok; desni stupac navodi što smo točno mogli reproducirati bez mijenjanja PaddleSpeech sourcea.</a:t>
-            </a:r>
-            <a:endParaRPr lang="hr-HR" sz="1080"/>
-          </a:p>
-        </p:txBody>
-      </p:sp>
-      <p:sp>
-        <p:nvSpPr>
-          <p:cNvPr id="5" name="Rule"/>
-          <p:cNvSpPr/>
-          <p:nvPr/>
-        </p:nvSpPr>
-        <p:spPr>
-          <a:xfrm>
-            <a:off x="444500" y="1447800"/>
-            <a:ext cx="736600" cy="44450"/>
-          </a:xfrm>
-          <a:prstGeom prst="rect">
-            <a:avLst/>
-          </a:prstGeom>
-          <a:solidFill>
-            <a:srgbClr val="E24A2A"/>
-          </a:solidFill>
-          <a:ln>
-            <a:noFill/>
-          </a:ln>
-        </p:spPr>
-      </p:sp>
       <p:pic>
         <p:nvPicPr>
-          <p:cNvPr id="6" name="DeepSpeech2 architecture"/>
+          <p:cNvPr id="2" name="DeepSpeech2 architecture"/>
           <p:cNvPicPr/>
           <p:nvPr/>
         </p:nvPicPr>
@@ -4457,324 +3878,14 @@
         </p:blipFill>
         <p:spPr>
           <a:xfrm>
-            <a:off x="342900" y="1511300"/>
-            <a:ext cx="7175500" cy="4032250"/>
+            <a:off x="0" y="0"/>
+            <a:ext cx="12192000" cy="6858000"/>
           </a:xfrm>
           <a:prstGeom prst="rect">
             <a:avLst/>
           </a:prstGeom>
         </p:spPr>
       </p:pic>
-      <p:sp>
-        <p:nvSpPr>
-          <p:cNvPr id="7" name="Rectangle"/>
-          <p:cNvSpPr/>
-          <p:nvPr/>
-        </p:nvSpPr>
-        <p:spPr>
-          <a:xfrm>
-            <a:off x="7823200" y="1536700"/>
-            <a:ext cx="3873500" cy="2832100"/>
-          </a:xfrm>
-          <a:prstGeom prst="rect">
-            <a:avLst/>
-          </a:prstGeom>
-          <a:solidFill>
-            <a:srgbClr val="15171A"/>
-          </a:solidFill>
-          <a:ln>
-            <a:noFill/>
-          </a:ln>
-        </p:spPr>
-      </p:sp>
-      <p:sp>
-        <p:nvSpPr>
-          <p:cNvPr id="8" name="Text"/>
-          <p:cNvSpPr txBox="1"/>
-          <p:nvPr/>
-        </p:nvSpPr>
-        <p:spPr>
-          <a:xfrm>
-            <a:off x="8001000" y="1689100"/>
-            <a:ext cx="3556000" cy="228600"/>
-          </a:xfrm>
-          <a:prstGeom prst="rect">
-            <a:avLst/>
-          </a:prstGeom>
-          <a:noFill/>
-          <a:ln>
-            <a:noFill/>
-          </a:ln>
-        </p:spPr>
-        <p:txBody>
-          <a:bodyPr wrap="square" lIns="0" tIns="0" rIns="0" bIns="0"/>
-          <a:lstStyle/>
-          <a:p>
-            <a:r>
-              <a:rPr lang="hr-HR" sz="1800" b="1">
-                <a:solidFill>
-                  <a:srgbClr val="F0B429"/>
-                </a:solidFill>
-                <a:latin typeface="Aptos"/>
-              </a:rPr>
-              <a:t>Što smo zadržali</a:t>
-            </a:r>
-            <a:endParaRPr lang="hr-HR" sz="1800"/>
-          </a:p>
-        </p:txBody>
-      </p:sp>
-      <p:sp>
-        <p:nvSpPr>
-          <p:cNvPr id="9" name="Text"/>
-          <p:cNvSpPr txBox="1"/>
-          <p:nvPr/>
-        </p:nvSpPr>
-        <p:spPr>
-          <a:xfrm>
-            <a:off x="8001000" y="2032000"/>
-            <a:ext cx="3441700" cy="1054100"/>
-          </a:xfrm>
-          <a:prstGeom prst="rect">
-            <a:avLst/>
-          </a:prstGeom>
-          <a:noFill/>
-          <a:ln>
-            <a:noFill/>
-          </a:ln>
-        </p:spPr>
-        <p:txBody>
-          <a:bodyPr wrap="square" lIns="0" tIns="0" rIns="0" bIns="0"/>
-          <a:lstStyle/>
-          <a:p>
-            <a:r>
-              <a:rPr lang="hr-HR" sz="1350">
-                <a:solidFill>
-                  <a:srgbClr val="F8F3E8"/>
-                </a:solidFill>
-                <a:latin typeface="Aptos"/>
-              </a:rPr>
-              <a:t>• konvolucijski front-end</a:t>
-            </a:r>
-            <a:endParaRPr lang="hr-HR" sz="1350"/>
-          </a:p>
-          <a:p>
-            <a:r>
-              <a:rPr lang="hr-HR" sz="1350">
-                <a:solidFill>
-                  <a:srgbClr val="F8F3E8"/>
-                </a:solidFill>
-                <a:latin typeface="Aptos"/>
-              </a:rPr>
-              <a:t>• bidirectional offline recurrent layers</a:t>
-            </a:r>
-            <a:endParaRPr lang="hr-HR" sz="1350"/>
-          </a:p>
-          <a:p>
-            <a:r>
-              <a:rPr lang="hr-HR" sz="1350">
-                <a:solidFill>
-                  <a:srgbClr val="F8F3E8"/>
-                </a:solidFill>
-                <a:latin typeface="Aptos"/>
-              </a:rPr>
-              <a:t>• character CTC targets</a:t>
-            </a:r>
-            <a:endParaRPr lang="hr-HR" sz="1350"/>
-          </a:p>
-          <a:p>
-            <a:r>
-              <a:rPr lang="hr-HR" sz="1350">
-                <a:solidFill>
-                  <a:srgbClr val="F8F3E8"/>
-                </a:solidFill>
-                <a:latin typeface="Aptos"/>
-              </a:rPr>
-              <a:t>• beam search decoding path</a:t>
-            </a:r>
-            <a:endParaRPr lang="hr-HR" sz="1350"/>
-          </a:p>
-          <a:p>
-            <a:r>
-              <a:rPr lang="hr-HR" sz="1350">
-                <a:solidFill>
-                  <a:srgbClr val="F8F3E8"/>
-                </a:solidFill>
-                <a:latin typeface="Aptos"/>
-              </a:rPr>
-              <a:t>• external word-level KenLM scorer</a:t>
-            </a:r>
-            <a:endParaRPr lang="hr-HR" sz="1350"/>
-          </a:p>
-        </p:txBody>
-      </p:sp>
-      <p:sp>
-        <p:nvSpPr>
-          <p:cNvPr id="10" name="Text"/>
-          <p:cNvSpPr txBox="1"/>
-          <p:nvPr/>
-        </p:nvSpPr>
-        <p:spPr>
-          <a:xfrm>
-            <a:off x="8001000" y="3302000"/>
-            <a:ext cx="3556000" cy="215900"/>
-          </a:xfrm>
-          <a:prstGeom prst="rect">
-            <a:avLst/>
-          </a:prstGeom>
-          <a:noFill/>
-          <a:ln>
-            <a:noFill/>
-          </a:ln>
-        </p:spPr>
-        <p:txBody>
-          <a:bodyPr wrap="square" lIns="0" tIns="0" rIns="0" bIns="0"/>
-          <a:lstStyle/>
-          <a:p>
-            <a:r>
-              <a:rPr lang="hr-HR" sz="1700" b="1">
-                <a:solidFill>
-                  <a:srgbClr val="F0B429"/>
-                </a:solidFill>
-                <a:latin typeface="Aptos"/>
-              </a:rPr>
-              <a:t>Razlike od paper konfiguracije</a:t>
-            </a:r>
-            <a:endParaRPr lang="hr-HR" sz="1700"/>
-          </a:p>
-        </p:txBody>
-      </p:sp>
-      <p:sp>
-        <p:nvSpPr>
-          <p:cNvPr id="11" name="Text"/>
-          <p:cNvSpPr txBox="1"/>
-          <p:nvPr/>
-        </p:nvSpPr>
-        <p:spPr>
-          <a:xfrm>
-            <a:off x="8001000" y="3606800"/>
-            <a:ext cx="3441700" cy="596900"/>
-          </a:xfrm>
-          <a:prstGeom prst="rect">
-            <a:avLst/>
-          </a:prstGeom>
-          <a:noFill/>
-          <a:ln>
-            <a:noFill/>
-          </a:ln>
-        </p:spPr>
-        <p:txBody>
-          <a:bodyPr wrap="square" lIns="0" tIns="0" rIns="0" bIns="0"/>
-          <a:lstStyle/>
-          <a:p>
-            <a:r>
-              <a:rPr lang="hr-HR" sz="1260">
-                <a:solidFill>
-                  <a:srgbClr val="F2DFC7"/>
-                </a:solidFill>
-                <a:latin typeface="Aptos"/>
-              </a:rPr>
-              <a:t>BatchNorm, exact spectrogram path, Nesterov optimizer and lookahead conv are not exposed cleanly in this PaddleSpeech DS2 path.</a:t>
-            </a:r>
-            <a:endParaRPr lang="hr-HR" sz="1260"/>
-          </a:p>
-        </p:txBody>
-      </p:sp>
-      <p:sp>
-        <p:nvSpPr>
-          <p:cNvPr id="12" name="Rectangle"/>
-          <p:cNvSpPr/>
-          <p:nvPr/>
-        </p:nvSpPr>
-        <p:spPr>
-          <a:xfrm>
-            <a:off x="7823200" y="4622800"/>
-            <a:ext cx="3873500" cy="609600"/>
-          </a:xfrm>
-          <a:prstGeom prst="rect">
-            <a:avLst/>
-          </a:prstGeom>
-          <a:solidFill>
-            <a:srgbClr val="F2DFC7"/>
-          </a:solidFill>
-          <a:ln w="12700">
-            <a:solidFill>
-              <a:srgbClr val="D6C8B5"/>
-            </a:solidFill>
-          </a:ln>
-        </p:spPr>
-      </p:sp>
-      <p:sp>
-        <p:nvSpPr>
-          <p:cNvPr id="13" name="Text"/>
-          <p:cNvSpPr txBox="1"/>
-          <p:nvPr/>
-        </p:nvSpPr>
-        <p:spPr>
-          <a:xfrm>
-            <a:off x="8001000" y="4762500"/>
-            <a:ext cx="3556000" cy="304800"/>
-          </a:xfrm>
-          <a:prstGeom prst="rect">
-            <a:avLst/>
-          </a:prstGeom>
-          <a:noFill/>
-          <a:ln>
-            <a:noFill/>
-          </a:ln>
-        </p:spPr>
-        <p:txBody>
-          <a:bodyPr wrap="square" lIns="0" tIns="0" rIns="0" bIns="0"/>
-          <a:lstStyle/>
-          <a:p>
-            <a:r>
-              <a:rPr lang="hr-HR" sz="1350" b="1">
-                <a:solidFill>
-                  <a:srgbClr val="15171A"/>
-                </a:solidFill>
-                <a:latin typeface="Aptos"/>
-              </a:rPr>
-              <a:t>Zaključak: VEPRAD run je paper-close approximation, ne bit-for-bit reprodukcija Deep Speech 2 rada.</a:t>
-            </a:r>
-            <a:endParaRPr lang="hr-HR" sz="1350"/>
-          </a:p>
-        </p:txBody>
-      </p:sp>
-      <p:sp>
-        <p:nvSpPr>
-          <p:cNvPr id="14" name="Footer"/>
-          <p:cNvSpPr txBox="1"/>
-          <p:nvPr/>
-        </p:nvSpPr>
-        <p:spPr>
-          <a:xfrm>
-            <a:off x="444500" y="6591300"/>
-            <a:ext cx="9207500" cy="152400"/>
-          </a:xfrm>
-          <a:prstGeom prst="rect">
-            <a:avLst/>
-          </a:prstGeom>
-          <a:noFill/>
-          <a:ln>
-            <a:noFill/>
-          </a:ln>
-        </p:spPr>
-        <p:txBody>
-          <a:bodyPr wrap="square" lIns="0" tIns="0" rIns="0" bIns="0"/>
-          <a:lstStyle/>
-          <a:p>
-            <a:r>
-              <a:rPr lang="hr-HR" sz="850">
-                <a:solidFill>
-                  <a:srgbClr val="6F6A5B"/>
-                </a:solidFill>
-                <a:latin typeface="Aptos"/>
-              </a:rPr>
-              <a:t>Architecture image: presentation/deepspeech2_architecture_generated_slide.png; exact configs: conf/deepspeech2_paper_*.yaml.</a:t>
-            </a:r>
-            <a:endParaRPr lang="hr-HR" sz="850"/>
-          </a:p>
-        </p:txBody>
-      </p:sp>
     </p:spTree>
   </p:cSld>
   <p:clrMapOvr>
@@ -4874,7 +3985,7 @@
                 </a:solidFill>
                 <a:latin typeface="Aptos"/>
               </a:rPr>
-              <a:t>Na istom VEPRAD splitu trenirali smo paper-small konfiguraciju i dvije dublje varijante.</a:t>
+              <a:t>Paper-small i dvije varijante na istom VEPRAD splitu.</a:t>
             </a:r>
             <a:endParaRPr lang="hr-HR" sz="2350"/>
           </a:p>
@@ -4910,7 +4021,7 @@
                 </a:solidFill>
                 <a:latin typeface="Aptos"/>
               </a:rPr>
-              <a:t>Cilj nije bio samo dobiti jedan score, nego vidjeti što se na VEPRAD-u mijenja s dubinom i tipom rekurentne ćelije.</a:t>
+              <a:t>Konfiguracije su paper-close unutar PaddleSpeech DS2 opcija, ali nisu doslovna reprodukcija Deep Speech 2 rada.</a:t>
             </a:r>
             <a:endParaRPr lang="hr-HR" sz="1080"/>
           </a:p>
@@ -4946,8 +4057,8 @@
         </p:nvSpPr>
         <p:spPr>
           <a:xfrm>
-            <a:off x="444500" y="1651000"/>
-            <a:ext cx="8572500" cy="1574800"/>
+            <a:off x="444500" y="1587500"/>
+            <a:ext cx="8032750" cy="1371600"/>
           </a:xfrm>
           <a:prstGeom prst="rect">
             <a:avLst/>
@@ -4970,8 +4081,8 @@
         </p:nvSpPr>
         <p:spPr>
           <a:xfrm>
-            <a:off x="444500" y="1651000"/>
-            <a:ext cx="8572500" cy="393700"/>
+            <a:off x="444500" y="1587500"/>
+            <a:ext cx="8032750" cy="342900"/>
           </a:xfrm>
           <a:prstGeom prst="rect">
             <a:avLst/>
@@ -4992,8 +4103,8 @@
         </p:nvSpPr>
         <p:spPr>
           <a:xfrm>
-            <a:off x="444500" y="2438400"/>
-            <a:ext cx="8572500" cy="393700"/>
+            <a:off x="444500" y="2273300"/>
+            <a:ext cx="8032750" cy="342900"/>
           </a:xfrm>
           <a:prstGeom prst="rect">
             <a:avLst/>
@@ -5014,23 +4125,23 @@
         </p:nvSpPr>
         <p:spPr>
           <a:xfrm>
-            <a:off x="495300" y="1708150"/>
-            <a:ext cx="1676400" cy="317500"/>
-          </a:xfrm>
-          <a:prstGeom prst="rect">
-            <a:avLst/>
-          </a:prstGeom>
-          <a:noFill/>
-          <a:ln>
-            <a:noFill/>
-          </a:ln>
-        </p:spPr>
-        <p:txBody>
-          <a:bodyPr wrap="square" lIns="0" tIns="0" rIns="0" bIns="0"/>
-          <a:lstStyle/>
-          <a:p>
-            <a:r>
-              <a:rPr lang="hr-HR" sz="1050" b="1">
+            <a:off x="495300" y="1644650"/>
+            <a:ext cx="1676400" cy="266700"/>
+          </a:xfrm>
+          <a:prstGeom prst="rect">
+            <a:avLst/>
+          </a:prstGeom>
+          <a:noFill/>
+          <a:ln>
+            <a:noFill/>
+          </a:ln>
+        </p:spPr>
+        <p:txBody>
+          <a:bodyPr wrap="square" lIns="0" tIns="0" rIns="0" bIns="0"/>
+          <a:lstStyle/>
+          <a:p>
+            <a:r>
+              <a:rPr lang="hr-HR" sz="1020" b="1">
                 <a:solidFill>
                   <a:srgbClr val="F8F3E8"/>
                 </a:solidFill>
@@ -5038,7 +4149,7 @@
               </a:rPr>
               <a:t>Run</a:t>
             </a:r>
-            <a:endParaRPr lang="hr-HR" sz="1050"/>
+            <a:endParaRPr lang="hr-HR" sz="1020"/>
           </a:p>
         </p:txBody>
       </p:sp>
@@ -5050,31 +4161,31 @@
         </p:nvSpPr>
         <p:spPr>
           <a:xfrm>
-            <a:off x="2273300" y="1708150"/>
-            <a:ext cx="1104900" cy="317500"/>
-          </a:xfrm>
-          <a:prstGeom prst="rect">
-            <a:avLst/>
-          </a:prstGeom>
-          <a:noFill/>
-          <a:ln>
-            <a:noFill/>
-          </a:ln>
-        </p:spPr>
-        <p:txBody>
-          <a:bodyPr wrap="square" lIns="0" tIns="0" rIns="0" bIns="0"/>
-          <a:lstStyle/>
-          <a:p>
-            <a:r>
-              <a:rPr lang="hr-HR" sz="1050" b="1">
+            <a:off x="2273300" y="1644650"/>
+            <a:ext cx="977900" cy="266700"/>
+          </a:xfrm>
+          <a:prstGeom prst="rect">
+            <a:avLst/>
+          </a:prstGeom>
+          <a:noFill/>
+          <a:ln>
+            <a:noFill/>
+          </a:ln>
+        </p:spPr>
+        <p:txBody>
+          <a:bodyPr wrap="square" lIns="0" tIns="0" rIns="0" bIns="0"/>
+          <a:lstStyle/>
+          <a:p>
+            <a:r>
+              <a:rPr lang="hr-HR" sz="1020" b="1">
                 <a:solidFill>
                   <a:srgbClr val="F8F3E8"/>
                 </a:solidFill>
                 <a:latin typeface="Aptos"/>
               </a:rPr>
-              <a:t>recurrent</a:t>
-            </a:r>
-            <a:endParaRPr lang="hr-HR" sz="1050"/>
+              <a:t>cell</a:t>
+            </a:r>
+            <a:endParaRPr lang="hr-HR" sz="1020"/>
           </a:p>
         </p:txBody>
       </p:sp>
@@ -5086,23 +4197,23 @@
         </p:nvSpPr>
         <p:spPr>
           <a:xfrm>
-            <a:off x="3479800" y="1708150"/>
-            <a:ext cx="977900" cy="317500"/>
-          </a:xfrm>
-          <a:prstGeom prst="rect">
-            <a:avLst/>
-          </a:prstGeom>
-          <a:noFill/>
-          <a:ln>
-            <a:noFill/>
-          </a:ln>
-        </p:spPr>
-        <p:txBody>
-          <a:bodyPr wrap="square" lIns="0" tIns="0" rIns="0" bIns="0"/>
-          <a:lstStyle/>
-          <a:p>
-            <a:r>
-              <a:rPr lang="hr-HR" sz="1050" b="1">
+            <a:off x="3352800" y="1644650"/>
+            <a:ext cx="850900" cy="266700"/>
+          </a:xfrm>
+          <a:prstGeom prst="rect">
+            <a:avLst/>
+          </a:prstGeom>
+          <a:noFill/>
+          <a:ln>
+            <a:noFill/>
+          </a:ln>
+        </p:spPr>
+        <p:txBody>
+          <a:bodyPr wrap="square" lIns="0" tIns="0" rIns="0" bIns="0"/>
+          <a:lstStyle/>
+          <a:p>
+            <a:r>
+              <a:rPr lang="hr-HR" sz="1020" b="1">
                 <a:solidFill>
                   <a:srgbClr val="F8F3E8"/>
                 </a:solidFill>
@@ -5110,7 +4221,7 @@
               </a:rPr>
               <a:t>layers</a:t>
             </a:r>
-            <a:endParaRPr lang="hr-HR" sz="1050"/>
+            <a:endParaRPr lang="hr-HR" sz="1020"/>
           </a:p>
         </p:txBody>
       </p:sp>
@@ -5122,23 +4233,23 @@
         </p:nvSpPr>
         <p:spPr>
           <a:xfrm>
-            <a:off x="4559300" y="1708150"/>
-            <a:ext cx="914400" cy="317500"/>
-          </a:xfrm>
-          <a:prstGeom prst="rect">
-            <a:avLst/>
-          </a:prstGeom>
-          <a:noFill/>
-          <a:ln>
-            <a:noFill/>
-          </a:ln>
-        </p:spPr>
-        <p:txBody>
-          <a:bodyPr wrap="square" lIns="0" tIns="0" rIns="0" bIns="0"/>
-          <a:lstStyle/>
-          <a:p>
-            <a:r>
-              <a:rPr lang="hr-HR" sz="1050" b="1">
+            <a:off x="4305300" y="1644650"/>
+            <a:ext cx="787400" cy="266700"/>
+          </a:xfrm>
+          <a:prstGeom prst="rect">
+            <a:avLst/>
+          </a:prstGeom>
+          <a:noFill/>
+          <a:ln>
+            <a:noFill/>
+          </a:ln>
+        </p:spPr>
+        <p:txBody>
+          <a:bodyPr wrap="square" lIns="0" tIns="0" rIns="0" bIns="0"/>
+          <a:lstStyle/>
+          <a:p>
+            <a:r>
+              <a:rPr lang="hr-HR" sz="1020" b="1">
                 <a:solidFill>
                   <a:srgbClr val="F8F3E8"/>
                 </a:solidFill>
@@ -5146,7 +4257,7 @@
               </a:rPr>
               <a:t>hidden</a:t>
             </a:r>
-            <a:endParaRPr lang="hr-HR" sz="1050"/>
+            <a:endParaRPr lang="hr-HR" sz="1020"/>
           </a:p>
         </p:txBody>
       </p:sp>
@@ -5158,23 +4269,23 @@
         </p:nvSpPr>
         <p:spPr>
           <a:xfrm>
-            <a:off x="5575300" y="1708150"/>
-            <a:ext cx="850900" cy="317500"/>
-          </a:xfrm>
-          <a:prstGeom prst="rect">
-            <a:avLst/>
-          </a:prstGeom>
-          <a:noFill/>
-          <a:ln>
-            <a:noFill/>
-          </a:ln>
-        </p:spPr>
-        <p:txBody>
-          <a:bodyPr wrap="square" lIns="0" tIns="0" rIns="0" bIns="0"/>
-          <a:lstStyle/>
-          <a:p>
-            <a:r>
-              <a:rPr lang="hr-HR" sz="1050" b="1">
+            <a:off x="5194300" y="1644650"/>
+            <a:ext cx="819150" cy="266700"/>
+          </a:xfrm>
+          <a:prstGeom prst="rect">
+            <a:avLst/>
+          </a:prstGeom>
+          <a:noFill/>
+          <a:ln>
+            <a:noFill/>
+          </a:ln>
+        </p:spPr>
+        <p:txBody>
+          <a:bodyPr wrap="square" lIns="0" tIns="0" rIns="0" bIns="0"/>
+          <a:lstStyle/>
+          <a:p>
+            <a:r>
+              <a:rPr lang="hr-HR" sz="1020" b="1">
                 <a:solidFill>
                   <a:srgbClr val="F8F3E8"/>
                 </a:solidFill>
@@ -5182,7 +4293,7 @@
               </a:rPr>
               <a:t>params</a:t>
             </a:r>
-            <a:endParaRPr lang="hr-HR" sz="1050"/>
+            <a:endParaRPr lang="hr-HR" sz="1020"/>
           </a:p>
         </p:txBody>
       </p:sp>
@@ -5194,23 +4305,23 @@
         </p:nvSpPr>
         <p:spPr>
           <a:xfrm>
-            <a:off x="6527800" y="1708150"/>
-            <a:ext cx="977900" cy="317500"/>
-          </a:xfrm>
-          <a:prstGeom prst="rect">
-            <a:avLst/>
-          </a:prstGeom>
-          <a:noFill/>
-          <a:ln>
-            <a:noFill/>
-          </a:ln>
-        </p:spPr>
-        <p:txBody>
-          <a:bodyPr wrap="square" lIns="0" tIns="0" rIns="0" bIns="0"/>
-          <a:lstStyle/>
-          <a:p>
-            <a:r>
-              <a:rPr lang="hr-HR" sz="1050" b="1">
+            <a:off x="6115050" y="1644650"/>
+            <a:ext cx="850900" cy="266700"/>
+          </a:xfrm>
+          <a:prstGeom prst="rect">
+            <a:avLst/>
+          </a:prstGeom>
+          <a:noFill/>
+          <a:ln>
+            <a:noFill/>
+          </a:ln>
+        </p:spPr>
+        <p:txBody>
+          <a:bodyPr wrap="square" lIns="0" tIns="0" rIns="0" bIns="0"/>
+          <a:lstStyle/>
+          <a:p>
+            <a:r>
+              <a:rPr lang="hr-HR" sz="1020" b="1">
                 <a:solidFill>
                   <a:srgbClr val="F8F3E8"/>
                 </a:solidFill>
@@ -5218,7 +4329,7 @@
               </a:rPr>
               <a:t>epochs</a:t>
             </a:r>
-            <a:endParaRPr lang="hr-HR" sz="1050"/>
+            <a:endParaRPr lang="hr-HR" sz="1020"/>
           </a:p>
         </p:txBody>
       </p:sp>
@@ -5230,31 +4341,31 @@
         </p:nvSpPr>
         <p:spPr>
           <a:xfrm>
-            <a:off x="7607300" y="1708150"/>
-            <a:ext cx="1358900" cy="317500"/>
-          </a:xfrm>
-          <a:prstGeom prst="rect">
-            <a:avLst/>
-          </a:prstGeom>
-          <a:noFill/>
-          <a:ln>
-            <a:noFill/>
-          </a:ln>
-        </p:spPr>
-        <p:txBody>
-          <a:bodyPr wrap="square" lIns="0" tIns="0" rIns="0" bIns="0"/>
-          <a:lstStyle/>
-          <a:p>
-            <a:r>
-              <a:rPr lang="hr-HR" sz="1050" b="1">
+            <a:off x="7067550" y="1644650"/>
+            <a:ext cx="1358900" cy="266700"/>
+          </a:xfrm>
+          <a:prstGeom prst="rect">
+            <a:avLst/>
+          </a:prstGeom>
+          <a:noFill/>
+          <a:ln>
+            <a:noFill/>
+          </a:ln>
+        </p:spPr>
+        <p:txBody>
+          <a:bodyPr wrap="square" lIns="0" tIns="0" rIns="0" bIns="0"/>
+          <a:lstStyle/>
+          <a:p>
+            <a:r>
+              <a:rPr lang="hr-HR" sz="1020" b="1">
                 <a:solidFill>
                   <a:srgbClr val="F8F3E8"/>
                 </a:solidFill>
                 <a:latin typeface="Aptos"/>
               </a:rPr>
-              <a:t>reason</a:t>
-            </a:r>
-            <a:endParaRPr lang="hr-HR" sz="1050"/>
+              <a:t>uloga</a:t>
+            </a:r>
+            <a:endParaRPr lang="hr-HR" sz="1020"/>
           </a:p>
         </p:txBody>
       </p:sp>
@@ -5266,23 +4377,23 @@
         </p:nvSpPr>
         <p:spPr>
           <a:xfrm>
-            <a:off x="495300" y="2095500"/>
-            <a:ext cx="1676400" cy="330200"/>
-          </a:xfrm>
-          <a:prstGeom prst="rect">
-            <a:avLst/>
-          </a:prstGeom>
-          <a:noFill/>
-          <a:ln>
-            <a:noFill/>
-          </a:ln>
-        </p:spPr>
-        <p:txBody>
-          <a:bodyPr wrap="square" lIns="0" tIns="0" rIns="0" bIns="0"/>
-          <a:lstStyle/>
-          <a:p>
-            <a:r>
-              <a:rPr lang="hr-HR" sz="1050" b="1">
+            <a:off x="495300" y="1981200"/>
+            <a:ext cx="1676400" cy="279400"/>
+          </a:xfrm>
+          <a:prstGeom prst="rect">
+            <a:avLst/>
+          </a:prstGeom>
+          <a:noFill/>
+          <a:ln>
+            <a:noFill/>
+          </a:ln>
+        </p:spPr>
+        <p:txBody>
+          <a:bodyPr wrap="square" lIns="0" tIns="0" rIns="0" bIns="0"/>
+          <a:lstStyle/>
+          <a:p>
+            <a:r>
+              <a:rPr lang="hr-HR" sz="1020" b="1">
                 <a:solidFill>
                   <a:srgbClr val="15171A"/>
                 </a:solidFill>
@@ -5290,7 +4401,7 @@
               </a:rPr>
               <a:t>paper_small_001</a:t>
             </a:r>
-            <a:endParaRPr lang="hr-HR" sz="1050"/>
+            <a:endParaRPr lang="hr-HR" sz="1020"/>
           </a:p>
         </p:txBody>
       </p:sp>
@@ -5302,23 +4413,23 @@
         </p:nvSpPr>
         <p:spPr>
           <a:xfrm>
-            <a:off x="2273300" y="2095500"/>
-            <a:ext cx="1104900" cy="330200"/>
-          </a:xfrm>
-          <a:prstGeom prst="rect">
-            <a:avLst/>
-          </a:prstGeom>
-          <a:noFill/>
-          <a:ln>
-            <a:noFill/>
-          </a:ln>
-        </p:spPr>
-        <p:txBody>
-          <a:bodyPr wrap="square" lIns="0" tIns="0" rIns="0" bIns="0"/>
-          <a:lstStyle/>
-          <a:p>
-            <a:r>
-              <a:rPr lang="hr-HR" sz="1050">
+            <a:off x="2273300" y="1981200"/>
+            <a:ext cx="977900" cy="279400"/>
+          </a:xfrm>
+          <a:prstGeom prst="rect">
+            <a:avLst/>
+          </a:prstGeom>
+          <a:noFill/>
+          <a:ln>
+            <a:noFill/>
+          </a:ln>
+        </p:spPr>
+        <p:txBody>
+          <a:bodyPr wrap="square" lIns="0" tIns="0" rIns="0" bIns="0"/>
+          <a:lstStyle/>
+          <a:p>
+            <a:r>
+              <a:rPr lang="hr-HR" sz="1020">
                 <a:solidFill>
                   <a:srgbClr val="20282C"/>
                 </a:solidFill>
@@ -5326,7 +4437,7 @@
               </a:rPr>
               <a:t>GRU</a:t>
             </a:r>
-            <a:endParaRPr lang="hr-HR" sz="1050"/>
+            <a:endParaRPr lang="hr-HR" sz="1020"/>
           </a:p>
         </p:txBody>
       </p:sp>
@@ -5338,23 +4449,23 @@
         </p:nvSpPr>
         <p:spPr>
           <a:xfrm>
-            <a:off x="3479800" y="2095500"/>
-            <a:ext cx="977900" cy="330200"/>
-          </a:xfrm>
-          <a:prstGeom prst="rect">
-            <a:avLst/>
-          </a:prstGeom>
-          <a:noFill/>
-          <a:ln>
-            <a:noFill/>
-          </a:ln>
-        </p:spPr>
-        <p:txBody>
-          <a:bodyPr wrap="square" lIns="0" tIns="0" rIns="0" bIns="0"/>
-          <a:lstStyle/>
-          <a:p>
-            <a:r>
-              <a:rPr lang="hr-HR" sz="1050">
+            <a:off x="3352800" y="1981200"/>
+            <a:ext cx="850900" cy="279400"/>
+          </a:xfrm>
+          <a:prstGeom prst="rect">
+            <a:avLst/>
+          </a:prstGeom>
+          <a:noFill/>
+          <a:ln>
+            <a:noFill/>
+          </a:ln>
+        </p:spPr>
+        <p:txBody>
+          <a:bodyPr wrap="square" lIns="0" tIns="0" rIns="0" bIns="0"/>
+          <a:lstStyle/>
+          <a:p>
+            <a:r>
+              <a:rPr lang="hr-HR" sz="1020">
                 <a:solidFill>
                   <a:srgbClr val="20282C"/>
                 </a:solidFill>
@@ -5362,7 +4473,7 @@
               </a:rPr>
               <a:t>5 biRNN</a:t>
             </a:r>
-            <a:endParaRPr lang="hr-HR" sz="1050"/>
+            <a:endParaRPr lang="hr-HR" sz="1020"/>
           </a:p>
         </p:txBody>
       </p:sp>
@@ -5374,23 +4485,23 @@
         </p:nvSpPr>
         <p:spPr>
           <a:xfrm>
-            <a:off x="4559300" y="2095500"/>
-            <a:ext cx="914400" cy="330200"/>
-          </a:xfrm>
-          <a:prstGeom prst="rect">
-            <a:avLst/>
-          </a:prstGeom>
-          <a:noFill/>
-          <a:ln>
-            <a:noFill/>
-          </a:ln>
-        </p:spPr>
-        <p:txBody>
-          <a:bodyPr wrap="square" lIns="0" tIns="0" rIns="0" bIns="0"/>
-          <a:lstStyle/>
-          <a:p>
-            <a:r>
-              <a:rPr lang="hr-HR" sz="1050">
+            <a:off x="4305300" y="1981200"/>
+            <a:ext cx="787400" cy="279400"/>
+          </a:xfrm>
+          <a:prstGeom prst="rect">
+            <a:avLst/>
+          </a:prstGeom>
+          <a:noFill/>
+          <a:ln>
+            <a:noFill/>
+          </a:ln>
+        </p:spPr>
+        <p:txBody>
+          <a:bodyPr wrap="square" lIns="0" tIns="0" rIns="0" bIns="0"/>
+          <a:lstStyle/>
+          <a:p>
+            <a:r>
+              <a:rPr lang="hr-HR" sz="1020">
                 <a:solidFill>
                   <a:srgbClr val="20282C"/>
                 </a:solidFill>
@@ -5398,7 +4509,7 @@
               </a:rPr>
               <a:t>650</a:t>
             </a:r>
-            <a:endParaRPr lang="hr-HR" sz="1050"/>
+            <a:endParaRPr lang="hr-HR" sz="1020"/>
           </a:p>
         </p:txBody>
       </p:sp>
@@ -5410,23 +4521,23 @@
         </p:nvSpPr>
         <p:spPr>
           <a:xfrm>
-            <a:off x="5575300" y="2095500"/>
-            <a:ext cx="850900" cy="330200"/>
-          </a:xfrm>
-          <a:prstGeom prst="rect">
-            <a:avLst/>
-          </a:prstGeom>
-          <a:noFill/>
-          <a:ln>
-            <a:noFill/>
-          </a:ln>
-        </p:spPr>
-        <p:txBody>
-          <a:bodyPr wrap="square" lIns="0" tIns="0" rIns="0" bIns="0"/>
-          <a:lstStyle/>
-          <a:p>
-            <a:r>
-              <a:rPr lang="hr-HR" sz="1050">
+            <a:off x="5194300" y="1981200"/>
+            <a:ext cx="819150" cy="279400"/>
+          </a:xfrm>
+          <a:prstGeom prst="rect">
+            <a:avLst/>
+          </a:prstGeom>
+          <a:noFill/>
+          <a:ln>
+            <a:noFill/>
+          </a:ln>
+        </p:spPr>
+        <p:txBody>
+          <a:bodyPr wrap="square" lIns="0" tIns="0" rIns="0" bIns="0"/>
+          <a:lstStyle/>
+          <a:p>
+            <a:r>
+              <a:rPr lang="hr-HR" sz="1020">
                 <a:solidFill>
                   <a:srgbClr val="20282C"/>
                 </a:solidFill>
@@ -5434,7 +4545,7 @@
               </a:rPr>
               <a:t>36.21M</a:t>
             </a:r>
-            <a:endParaRPr lang="hr-HR" sz="1050"/>
+            <a:endParaRPr lang="hr-HR" sz="1020"/>
           </a:p>
         </p:txBody>
       </p:sp>
@@ -5446,23 +4557,23 @@
         </p:nvSpPr>
         <p:spPr>
           <a:xfrm>
-            <a:off x="6527800" y="2095500"/>
-            <a:ext cx="977900" cy="330200"/>
-          </a:xfrm>
-          <a:prstGeom prst="rect">
-            <a:avLst/>
-          </a:prstGeom>
-          <a:noFill/>
-          <a:ln>
-            <a:noFill/>
-          </a:ln>
-        </p:spPr>
-        <p:txBody>
-          <a:bodyPr wrap="square" lIns="0" tIns="0" rIns="0" bIns="0"/>
-          <a:lstStyle/>
-          <a:p>
-            <a:r>
-              <a:rPr lang="hr-HR" sz="1050">
+            <a:off x="6115050" y="1981200"/>
+            <a:ext cx="850900" cy="279400"/>
+          </a:xfrm>
+          <a:prstGeom prst="rect">
+            <a:avLst/>
+          </a:prstGeom>
+          <a:noFill/>
+          <a:ln>
+            <a:noFill/>
+          </a:ln>
+        </p:spPr>
+        <p:txBody>
+          <a:bodyPr wrap="square" lIns="0" tIns="0" rIns="0" bIns="0"/>
+          <a:lstStyle/>
+          <a:p>
+            <a:r>
+              <a:rPr lang="hr-HR" sz="1020">
                 <a:solidFill>
                   <a:srgbClr val="20282C"/>
                 </a:solidFill>
@@ -5470,7 +4581,7 @@
               </a:rPr>
               <a:t>20</a:t>
             </a:r>
-            <a:endParaRPr lang="hr-HR" sz="1050"/>
+            <a:endParaRPr lang="hr-HR" sz="1020"/>
           </a:p>
         </p:txBody>
       </p:sp>
@@ -5482,23 +4593,23 @@
         </p:nvSpPr>
         <p:spPr>
           <a:xfrm>
-            <a:off x="7607300" y="2095500"/>
-            <a:ext cx="1358900" cy="330200"/>
-          </a:xfrm>
-          <a:prstGeom prst="rect">
-            <a:avLst/>
-          </a:prstGeom>
-          <a:noFill/>
-          <a:ln>
-            <a:noFill/>
-          </a:ln>
-        </p:spPr>
-        <p:txBody>
-          <a:bodyPr wrap="square" lIns="0" tIns="0" rIns="0" bIns="0"/>
-          <a:lstStyle/>
-          <a:p>
-            <a:r>
-              <a:rPr lang="hr-HR" sz="1050">
+            <a:off x="7067550" y="1981200"/>
+            <a:ext cx="1358900" cy="279400"/>
+          </a:xfrm>
+          <a:prstGeom prst="rect">
+            <a:avLst/>
+          </a:prstGeom>
+          <a:noFill/>
+          <a:ln>
+            <a:noFill/>
+          </a:ln>
+        </p:spPr>
+        <p:txBody>
+          <a:bodyPr wrap="square" lIns="0" tIns="0" rIns="0" bIns="0"/>
+          <a:lstStyle/>
+          <a:p>
+            <a:r>
+              <a:rPr lang="hr-HR" sz="1020">
                 <a:solidFill>
                   <a:srgbClr val="20282C"/>
                 </a:solidFill>
@@ -5506,19 +4617,7 @@
               </a:rPr>
               <a:t>najbliže small DS2</a:t>
             </a:r>
-            <a:endParaRPr lang="hr-HR" sz="1050"/>
-          </a:p>
-          <a:p>
-            <a:r>
-              <a:rPr lang="hr-HR" sz="1050">
-                <a:solidFill>
-                  <a:srgbClr val="20282C"/>
-                </a:solidFill>
-                <a:latin typeface="Aptos"/>
-              </a:rPr>
-              <a:t>bez source edita</a:t>
-            </a:r>
-            <a:endParaRPr lang="hr-HR" sz="1050"/>
+            <a:endParaRPr lang="hr-HR" sz="1020"/>
           </a:p>
         </p:txBody>
       </p:sp>
@@ -5530,23 +4629,23 @@
         </p:nvSpPr>
         <p:spPr>
           <a:xfrm>
-            <a:off x="495300" y="2489200"/>
-            <a:ext cx="1676400" cy="330200"/>
-          </a:xfrm>
-          <a:prstGeom prst="rect">
-            <a:avLst/>
-          </a:prstGeom>
-          <a:noFill/>
-          <a:ln>
-            <a:noFill/>
-          </a:ln>
-        </p:spPr>
-        <p:txBody>
-          <a:bodyPr wrap="square" lIns="0" tIns="0" rIns="0" bIns="0"/>
-          <a:lstStyle/>
-          <a:p>
-            <a:r>
-              <a:rPr lang="hr-HR" sz="1050" b="1">
+            <a:off x="495300" y="2324100"/>
+            <a:ext cx="1676400" cy="279400"/>
+          </a:xfrm>
+          <a:prstGeom prst="rect">
+            <a:avLst/>
+          </a:prstGeom>
+          <a:noFill/>
+          <a:ln>
+            <a:noFill/>
+          </a:ln>
+        </p:spPr>
+        <p:txBody>
+          <a:bodyPr wrap="square" lIns="0" tIns="0" rIns="0" bIns="0"/>
+          <a:lstStyle/>
+          <a:p>
+            <a:r>
+              <a:rPr lang="hr-HR" sz="1020" b="1">
                 <a:solidFill>
                   <a:srgbClr val="15171A"/>
                 </a:solidFill>
@@ -5554,7 +4653,7 @@
               </a:rPr>
               <a:t>paper_7gru_001</a:t>
             </a:r>
-            <a:endParaRPr lang="hr-HR" sz="1050"/>
+            <a:endParaRPr lang="hr-HR" sz="1020"/>
           </a:p>
         </p:txBody>
       </p:sp>
@@ -5566,23 +4665,23 @@
         </p:nvSpPr>
         <p:spPr>
           <a:xfrm>
-            <a:off x="2273300" y="2489200"/>
-            <a:ext cx="1104900" cy="330200"/>
-          </a:xfrm>
-          <a:prstGeom prst="rect">
-            <a:avLst/>
-          </a:prstGeom>
-          <a:noFill/>
-          <a:ln>
-            <a:noFill/>
-          </a:ln>
-        </p:spPr>
-        <p:txBody>
-          <a:bodyPr wrap="square" lIns="0" tIns="0" rIns="0" bIns="0"/>
-          <a:lstStyle/>
-          <a:p>
-            <a:r>
-              <a:rPr lang="hr-HR" sz="1050">
+            <a:off x="2273300" y="2324100"/>
+            <a:ext cx="977900" cy="279400"/>
+          </a:xfrm>
+          <a:prstGeom prst="rect">
+            <a:avLst/>
+          </a:prstGeom>
+          <a:noFill/>
+          <a:ln>
+            <a:noFill/>
+          </a:ln>
+        </p:spPr>
+        <p:txBody>
+          <a:bodyPr wrap="square" lIns="0" tIns="0" rIns="0" bIns="0"/>
+          <a:lstStyle/>
+          <a:p>
+            <a:r>
+              <a:rPr lang="hr-HR" sz="1020">
                 <a:solidFill>
                   <a:srgbClr val="20282C"/>
                 </a:solidFill>
@@ -5590,7 +4689,7 @@
               </a:rPr>
               <a:t>GRU</a:t>
             </a:r>
-            <a:endParaRPr lang="hr-HR" sz="1050"/>
+            <a:endParaRPr lang="hr-HR" sz="1020"/>
           </a:p>
         </p:txBody>
       </p:sp>
@@ -5602,23 +4701,23 @@
         </p:nvSpPr>
         <p:spPr>
           <a:xfrm>
-            <a:off x="3479800" y="2489200"/>
-            <a:ext cx="977900" cy="330200"/>
-          </a:xfrm>
-          <a:prstGeom prst="rect">
-            <a:avLst/>
-          </a:prstGeom>
-          <a:noFill/>
-          <a:ln>
-            <a:noFill/>
-          </a:ln>
-        </p:spPr>
-        <p:txBody>
-          <a:bodyPr wrap="square" lIns="0" tIns="0" rIns="0" bIns="0"/>
-          <a:lstStyle/>
-          <a:p>
-            <a:r>
-              <a:rPr lang="hr-HR" sz="1050">
+            <a:off x="3352800" y="2324100"/>
+            <a:ext cx="850900" cy="279400"/>
+          </a:xfrm>
+          <a:prstGeom prst="rect">
+            <a:avLst/>
+          </a:prstGeom>
+          <a:noFill/>
+          <a:ln>
+            <a:noFill/>
+          </a:ln>
+        </p:spPr>
+        <p:txBody>
+          <a:bodyPr wrap="square" lIns="0" tIns="0" rIns="0" bIns="0"/>
+          <a:lstStyle/>
+          <a:p>
+            <a:r>
+              <a:rPr lang="hr-HR" sz="1020">
                 <a:solidFill>
                   <a:srgbClr val="20282C"/>
                 </a:solidFill>
@@ -5626,7 +4725,7 @@
               </a:rPr>
               <a:t>7 biRNN</a:t>
             </a:r>
-            <a:endParaRPr lang="hr-HR" sz="1050"/>
+            <a:endParaRPr lang="hr-HR" sz="1020"/>
           </a:p>
         </p:txBody>
       </p:sp>
@@ -5638,23 +4737,23 @@
         </p:nvSpPr>
         <p:spPr>
           <a:xfrm>
-            <a:off x="4559300" y="2489200"/>
-            <a:ext cx="914400" cy="330200"/>
-          </a:xfrm>
-          <a:prstGeom prst="rect">
-            <a:avLst/>
-          </a:prstGeom>
-          <a:noFill/>
-          <a:ln>
-            <a:noFill/>
-          </a:ln>
-        </p:spPr>
-        <p:txBody>
-          <a:bodyPr wrap="square" lIns="0" tIns="0" rIns="0" bIns="0"/>
-          <a:lstStyle/>
-          <a:p>
-            <a:r>
-              <a:rPr lang="hr-HR" sz="1050">
+            <a:off x="4305300" y="2324100"/>
+            <a:ext cx="787400" cy="279400"/>
+          </a:xfrm>
+          <a:prstGeom prst="rect">
+            <a:avLst/>
+          </a:prstGeom>
+          <a:noFill/>
+          <a:ln>
+            <a:noFill/>
+          </a:ln>
+        </p:spPr>
+        <p:txBody>
+          <a:bodyPr wrap="square" lIns="0" tIns="0" rIns="0" bIns="0"/>
+          <a:lstStyle/>
+          <a:p>
+            <a:r>
+              <a:rPr lang="hr-HR" sz="1020">
                 <a:solidFill>
                   <a:srgbClr val="20282C"/>
                 </a:solidFill>
@@ -5662,7 +4761,7 @@
               </a:rPr>
               <a:t>650</a:t>
             </a:r>
-            <a:endParaRPr lang="hr-HR" sz="1050"/>
+            <a:endParaRPr lang="hr-HR" sz="1020"/>
           </a:p>
         </p:txBody>
       </p:sp>
@@ -5674,23 +4773,23 @@
         </p:nvSpPr>
         <p:spPr>
           <a:xfrm>
-            <a:off x="5575300" y="2489200"/>
-            <a:ext cx="850900" cy="330200"/>
-          </a:xfrm>
-          <a:prstGeom prst="rect">
-            <a:avLst/>
-          </a:prstGeom>
-          <a:noFill/>
-          <a:ln>
-            <a:noFill/>
-          </a:ln>
-        </p:spPr>
-        <p:txBody>
-          <a:bodyPr wrap="square" lIns="0" tIns="0" rIns="0" bIns="0"/>
-          <a:lstStyle/>
-          <a:p>
-            <a:r>
-              <a:rPr lang="hr-HR" sz="1050">
+            <a:off x="5194300" y="2324100"/>
+            <a:ext cx="819150" cy="279400"/>
+          </a:xfrm>
+          <a:prstGeom prst="rect">
+            <a:avLst/>
+          </a:prstGeom>
+          <a:noFill/>
+          <a:ln>
+            <a:noFill/>
+          </a:ln>
+        </p:spPr>
+        <p:txBody>
+          <a:bodyPr wrap="square" lIns="0" tIns="0" rIns="0" bIns="0"/>
+          <a:lstStyle/>
+          <a:p>
+            <a:r>
+              <a:rPr lang="hr-HR" sz="1020">
                 <a:solidFill>
                   <a:srgbClr val="20282C"/>
                 </a:solidFill>
@@ -5698,7 +4797,7 @@
               </a:rPr>
               <a:t>50.73M</a:t>
             </a:r>
-            <a:endParaRPr lang="hr-HR" sz="1050"/>
+            <a:endParaRPr lang="hr-HR" sz="1020"/>
           </a:p>
         </p:txBody>
       </p:sp>
@@ -5710,23 +4809,23 @@
         </p:nvSpPr>
         <p:spPr>
           <a:xfrm>
-            <a:off x="6527800" y="2489200"/>
-            <a:ext cx="977900" cy="330200"/>
-          </a:xfrm>
-          <a:prstGeom prst="rect">
-            <a:avLst/>
-          </a:prstGeom>
-          <a:noFill/>
-          <a:ln>
-            <a:noFill/>
-          </a:ln>
-        </p:spPr>
-        <p:txBody>
-          <a:bodyPr wrap="square" lIns="0" tIns="0" rIns="0" bIns="0"/>
-          <a:lstStyle/>
-          <a:p>
-            <a:r>
-              <a:rPr lang="hr-HR" sz="1050">
+            <a:off x="6115050" y="2324100"/>
+            <a:ext cx="850900" cy="279400"/>
+          </a:xfrm>
+          <a:prstGeom prst="rect">
+            <a:avLst/>
+          </a:prstGeom>
+          <a:noFill/>
+          <a:ln>
+            <a:noFill/>
+          </a:ln>
+        </p:spPr>
+        <p:txBody>
+          <a:bodyPr wrap="square" lIns="0" tIns="0" rIns="0" bIns="0"/>
+          <a:lstStyle/>
+          <a:p>
+            <a:r>
+              <a:rPr lang="hr-HR" sz="1020">
                 <a:solidFill>
                   <a:srgbClr val="20282C"/>
                 </a:solidFill>
@@ -5734,7 +4833,7 @@
               </a:rPr>
               <a:t>20</a:t>
             </a:r>
-            <a:endParaRPr lang="hr-HR" sz="1050"/>
+            <a:endParaRPr lang="hr-HR" sz="1020"/>
           </a:p>
         </p:txBody>
       </p:sp>
@@ -5746,43 +4845,31 @@
         </p:nvSpPr>
         <p:spPr>
           <a:xfrm>
-            <a:off x="7607300" y="2489200"/>
-            <a:ext cx="1358900" cy="330200"/>
-          </a:xfrm>
-          <a:prstGeom prst="rect">
-            <a:avLst/>
-          </a:prstGeom>
-          <a:noFill/>
-          <a:ln>
-            <a:noFill/>
-          </a:ln>
-        </p:spPr>
-        <p:txBody>
-          <a:bodyPr wrap="square" lIns="0" tIns="0" rIns="0" bIns="0"/>
-          <a:lstStyle/>
-          <a:p>
-            <a:r>
-              <a:rPr lang="hr-HR" sz="1050">
-                <a:solidFill>
-                  <a:srgbClr val="20282C"/>
-                </a:solidFill>
-                <a:latin typeface="Aptos"/>
-              </a:rPr>
-              <a:t>+2 sloja,</a:t>
-            </a:r>
-            <a:endParaRPr lang="hr-HR" sz="1050"/>
-          </a:p>
-          <a:p>
-            <a:r>
-              <a:rPr lang="hr-HR" sz="1050">
-                <a:solidFill>
-                  <a:srgbClr val="20282C"/>
-                </a:solidFill>
-                <a:latin typeface="Aptos"/>
-              </a:rPr>
-              <a:t>isti cell</a:t>
-            </a:r>
-            <a:endParaRPr lang="hr-HR" sz="1050"/>
+            <a:off x="7067550" y="2324100"/>
+            <a:ext cx="1358900" cy="279400"/>
+          </a:xfrm>
+          <a:prstGeom prst="rect">
+            <a:avLst/>
+          </a:prstGeom>
+          <a:noFill/>
+          <a:ln>
+            <a:noFill/>
+          </a:ln>
+        </p:spPr>
+        <p:txBody>
+          <a:bodyPr wrap="square" lIns="0" tIns="0" rIns="0" bIns="0"/>
+          <a:lstStyle/>
+          <a:p>
+            <a:r>
+              <a:rPr lang="hr-HR" sz="1020">
+                <a:solidFill>
+                  <a:srgbClr val="20282C"/>
+                </a:solidFill>
+                <a:latin typeface="Aptos"/>
+              </a:rPr>
+              <a:t>+2 sloja</a:t>
+            </a:r>
+            <a:endParaRPr lang="hr-HR" sz="1020"/>
           </a:p>
         </p:txBody>
       </p:sp>
@@ -5794,23 +4881,23 @@
         </p:nvSpPr>
         <p:spPr>
           <a:xfrm>
-            <a:off x="495300" y="2882900"/>
-            <a:ext cx="1676400" cy="330200"/>
-          </a:xfrm>
-          <a:prstGeom prst="rect">
-            <a:avLst/>
-          </a:prstGeom>
-          <a:noFill/>
-          <a:ln>
-            <a:noFill/>
-          </a:ln>
-        </p:spPr>
-        <p:txBody>
-          <a:bodyPr wrap="square" lIns="0" tIns="0" rIns="0" bIns="0"/>
-          <a:lstStyle/>
-          <a:p>
-            <a:r>
-              <a:rPr lang="hr-HR" sz="1050" b="1">
+            <a:off x="495300" y="2667000"/>
+            <a:ext cx="1676400" cy="279400"/>
+          </a:xfrm>
+          <a:prstGeom prst="rect">
+            <a:avLst/>
+          </a:prstGeom>
+          <a:noFill/>
+          <a:ln>
+            <a:noFill/>
+          </a:ln>
+        </p:spPr>
+        <p:txBody>
+          <a:bodyPr wrap="square" lIns="0" tIns="0" rIns="0" bIns="0"/>
+          <a:lstStyle/>
+          <a:p>
+            <a:r>
+              <a:rPr lang="hr-HR" sz="1020" b="1">
                 <a:solidFill>
                   <a:srgbClr val="15171A"/>
                 </a:solidFill>
@@ -5818,7 +4905,7 @@
               </a:rPr>
               <a:t>paper_7lstm_001</a:t>
             </a:r>
-            <a:endParaRPr lang="hr-HR" sz="1050"/>
+            <a:endParaRPr lang="hr-HR" sz="1020"/>
           </a:p>
         </p:txBody>
       </p:sp>
@@ -5830,23 +4917,23 @@
         </p:nvSpPr>
         <p:spPr>
           <a:xfrm>
-            <a:off x="2273300" y="2882900"/>
-            <a:ext cx="1104900" cy="330200"/>
-          </a:xfrm>
-          <a:prstGeom prst="rect">
-            <a:avLst/>
-          </a:prstGeom>
-          <a:noFill/>
-          <a:ln>
-            <a:noFill/>
-          </a:ln>
-        </p:spPr>
-        <p:txBody>
-          <a:bodyPr wrap="square" lIns="0" tIns="0" rIns="0" bIns="0"/>
-          <a:lstStyle/>
-          <a:p>
-            <a:r>
-              <a:rPr lang="hr-HR" sz="1050">
+            <a:off x="2273300" y="2667000"/>
+            <a:ext cx="977900" cy="279400"/>
+          </a:xfrm>
+          <a:prstGeom prst="rect">
+            <a:avLst/>
+          </a:prstGeom>
+          <a:noFill/>
+          <a:ln>
+            <a:noFill/>
+          </a:ln>
+        </p:spPr>
+        <p:txBody>
+          <a:bodyPr wrap="square" lIns="0" tIns="0" rIns="0" bIns="0"/>
+          <a:lstStyle/>
+          <a:p>
+            <a:r>
+              <a:rPr lang="hr-HR" sz="1020">
                 <a:solidFill>
                   <a:srgbClr val="20282C"/>
                 </a:solidFill>
@@ -5854,7 +4941,7 @@
               </a:rPr>
               <a:t>LSTM</a:t>
             </a:r>
-            <a:endParaRPr lang="hr-HR" sz="1050"/>
+            <a:endParaRPr lang="hr-HR" sz="1020"/>
           </a:p>
         </p:txBody>
       </p:sp>
@@ -5866,23 +4953,23 @@
         </p:nvSpPr>
         <p:spPr>
           <a:xfrm>
-            <a:off x="3479800" y="2882900"/>
-            <a:ext cx="977900" cy="330200"/>
-          </a:xfrm>
-          <a:prstGeom prst="rect">
-            <a:avLst/>
-          </a:prstGeom>
-          <a:noFill/>
-          <a:ln>
-            <a:noFill/>
-          </a:ln>
-        </p:spPr>
-        <p:txBody>
-          <a:bodyPr wrap="square" lIns="0" tIns="0" rIns="0" bIns="0"/>
-          <a:lstStyle/>
-          <a:p>
-            <a:r>
-              <a:rPr lang="hr-HR" sz="1050">
+            <a:off x="3352800" y="2667000"/>
+            <a:ext cx="850900" cy="279400"/>
+          </a:xfrm>
+          <a:prstGeom prst="rect">
+            <a:avLst/>
+          </a:prstGeom>
+          <a:noFill/>
+          <a:ln>
+            <a:noFill/>
+          </a:ln>
+        </p:spPr>
+        <p:txBody>
+          <a:bodyPr wrap="square" lIns="0" tIns="0" rIns="0" bIns="0"/>
+          <a:lstStyle/>
+          <a:p>
+            <a:r>
+              <a:rPr lang="hr-HR" sz="1020">
                 <a:solidFill>
                   <a:srgbClr val="20282C"/>
                 </a:solidFill>
@@ -5890,7 +4977,7 @@
               </a:rPr>
               <a:t>7 biRNN</a:t>
             </a:r>
-            <a:endParaRPr lang="hr-HR" sz="1050"/>
+            <a:endParaRPr lang="hr-HR" sz="1020"/>
           </a:p>
         </p:txBody>
       </p:sp>
@@ -5902,23 +4989,23 @@
         </p:nvSpPr>
         <p:spPr>
           <a:xfrm>
-            <a:off x="4559300" y="2882900"/>
-            <a:ext cx="914400" cy="330200"/>
-          </a:xfrm>
-          <a:prstGeom prst="rect">
-            <a:avLst/>
-          </a:prstGeom>
-          <a:noFill/>
-          <a:ln>
-            <a:noFill/>
-          </a:ln>
-        </p:spPr>
-        <p:txBody>
-          <a:bodyPr wrap="square" lIns="0" tIns="0" rIns="0" bIns="0"/>
-          <a:lstStyle/>
-          <a:p>
-            <a:r>
-              <a:rPr lang="hr-HR" sz="1050">
+            <a:off x="4305300" y="2667000"/>
+            <a:ext cx="787400" cy="279400"/>
+          </a:xfrm>
+          <a:prstGeom prst="rect">
+            <a:avLst/>
+          </a:prstGeom>
+          <a:noFill/>
+          <a:ln>
+            <a:noFill/>
+          </a:ln>
+        </p:spPr>
+        <p:txBody>
+          <a:bodyPr wrap="square" lIns="0" tIns="0" rIns="0" bIns="0"/>
+          <a:lstStyle/>
+          <a:p>
+            <a:r>
+              <a:rPr lang="hr-HR" sz="1020">
                 <a:solidFill>
                   <a:srgbClr val="20282C"/>
                 </a:solidFill>
@@ -5926,7 +5013,7 @@
               </a:rPr>
               <a:t>650</a:t>
             </a:r>
-            <a:endParaRPr lang="hr-HR" sz="1050"/>
+            <a:endParaRPr lang="hr-HR" sz="1020"/>
           </a:p>
         </p:txBody>
       </p:sp>
@@ -5938,23 +5025,23 @@
         </p:nvSpPr>
         <p:spPr>
           <a:xfrm>
-            <a:off x="5575300" y="2882900"/>
-            <a:ext cx="850900" cy="330200"/>
-          </a:xfrm>
-          <a:prstGeom prst="rect">
-            <a:avLst/>
-          </a:prstGeom>
-          <a:noFill/>
-          <a:ln>
-            <a:noFill/>
-          </a:ln>
-        </p:spPr>
-        <p:txBody>
-          <a:bodyPr wrap="square" lIns="0" tIns="0" rIns="0" bIns="0"/>
-          <a:lstStyle/>
-          <a:p>
-            <a:r>
-              <a:rPr lang="hr-HR" sz="1050">
+            <a:off x="5194300" y="2667000"/>
+            <a:ext cx="819150" cy="279400"/>
+          </a:xfrm>
+          <a:prstGeom prst="rect">
+            <a:avLst/>
+          </a:prstGeom>
+          <a:noFill/>
+          <a:ln>
+            <a:noFill/>
+          </a:ln>
+        </p:spPr>
+        <p:txBody>
+          <a:bodyPr wrap="square" lIns="0" tIns="0" rIns="0" bIns="0"/>
+          <a:lstStyle/>
+          <a:p>
+            <a:r>
+              <a:rPr lang="hr-HR" sz="1020">
                 <a:solidFill>
                   <a:srgbClr val="20282C"/>
                 </a:solidFill>
@@ -5962,7 +5049,7 @@
               </a:rPr>
               <a:t>67.61M</a:t>
             </a:r>
-            <a:endParaRPr lang="hr-HR" sz="1050"/>
+            <a:endParaRPr lang="hr-HR" sz="1020"/>
           </a:p>
         </p:txBody>
       </p:sp>
@@ -5974,23 +5061,23 @@
         </p:nvSpPr>
         <p:spPr>
           <a:xfrm>
-            <a:off x="6527800" y="2882900"/>
-            <a:ext cx="977900" cy="330200"/>
-          </a:xfrm>
-          <a:prstGeom prst="rect">
-            <a:avLst/>
-          </a:prstGeom>
-          <a:noFill/>
-          <a:ln>
-            <a:noFill/>
-          </a:ln>
-        </p:spPr>
-        <p:txBody>
-          <a:bodyPr wrap="square" lIns="0" tIns="0" rIns="0" bIns="0"/>
-          <a:lstStyle/>
-          <a:p>
-            <a:r>
-              <a:rPr lang="hr-HR" sz="1050">
+            <a:off x="6115050" y="2667000"/>
+            <a:ext cx="850900" cy="279400"/>
+          </a:xfrm>
+          <a:prstGeom prst="rect">
+            <a:avLst/>
+          </a:prstGeom>
+          <a:noFill/>
+          <a:ln>
+            <a:noFill/>
+          </a:ln>
+        </p:spPr>
+        <p:txBody>
+          <a:bodyPr wrap="square" lIns="0" tIns="0" rIns="0" bIns="0"/>
+          <a:lstStyle/>
+          <a:p>
+            <a:r>
+              <a:rPr lang="hr-HR" sz="1020">
                 <a:solidFill>
                   <a:srgbClr val="20282C"/>
                 </a:solidFill>
@@ -5998,7 +5085,7 @@
               </a:rPr>
               <a:t>20</a:t>
             </a:r>
-            <a:endParaRPr lang="hr-HR" sz="1050"/>
+            <a:endParaRPr lang="hr-HR" sz="1020"/>
           </a:p>
         </p:txBody>
       </p:sp>
@@ -6010,23 +5097,23 @@
         </p:nvSpPr>
         <p:spPr>
           <a:xfrm>
-            <a:off x="7607300" y="2882900"/>
-            <a:ext cx="1358900" cy="330200"/>
-          </a:xfrm>
-          <a:prstGeom prst="rect">
-            <a:avLst/>
-          </a:prstGeom>
-          <a:noFill/>
-          <a:ln>
-            <a:noFill/>
-          </a:ln>
-        </p:spPr>
-        <p:txBody>
-          <a:bodyPr wrap="square" lIns="0" tIns="0" rIns="0" bIns="0"/>
-          <a:lstStyle/>
-          <a:p>
-            <a:r>
-              <a:rPr lang="hr-HR" sz="1050">
+            <a:off x="7067550" y="2667000"/>
+            <a:ext cx="1358900" cy="279400"/>
+          </a:xfrm>
+          <a:prstGeom prst="rect">
+            <a:avLst/>
+          </a:prstGeom>
+          <a:noFill/>
+          <a:ln>
+            <a:noFill/>
+          </a:ln>
+        </p:spPr>
+        <p:txBody>
+          <a:bodyPr wrap="square" lIns="0" tIns="0" rIns="0" bIns="0"/>
+          <a:lstStyle/>
+          <a:p>
+            <a:r>
+              <a:rPr lang="hr-HR" sz="1020">
                 <a:solidFill>
                   <a:srgbClr val="20282C"/>
                 </a:solidFill>
@@ -6034,19 +5121,7 @@
               </a:rPr>
               <a:t>usporedba cella</a:t>
             </a:r>
-            <a:endParaRPr lang="hr-HR" sz="1050"/>
-          </a:p>
-          <a:p>
-            <a:r>
-              <a:rPr lang="hr-HR" sz="1050">
-                <a:solidFill>
-                  <a:srgbClr val="20282C"/>
-                </a:solidFill>
-                <a:latin typeface="Aptos"/>
-              </a:rPr>
-              <a:t>s istom dubinom</a:t>
-            </a:r>
-            <a:endParaRPr lang="hr-HR" sz="1050"/>
+            <a:endParaRPr lang="hr-HR" sz="1020"/>
           </a:p>
         </p:txBody>
       </p:sp>
@@ -6058,7 +5133,7 @@
         </p:nvSpPr>
         <p:spPr>
           <a:xfrm>
-            <a:off x="444500" y="3556000"/>
+            <a:off x="444500" y="3143250"/>
             <a:ext cx="2857500" cy="190500"/>
           </a:xfrm>
           <a:prstGeom prst="rect">
@@ -6080,7 +5155,7 @@
                 </a:solidFill>
                 <a:latin typeface="Aptos"/>
               </a:rPr>
-              <a:t>Zajedničko u treningu</a:t>
+              <a:t>Što smo zadržali</a:t>
             </a:r>
             <a:endParaRPr lang="hr-HR" sz="1800"/>
           </a:p>
@@ -6094,7 +5169,7 @@
         </p:nvSpPr>
         <p:spPr>
           <a:xfrm>
-            <a:off x="444500" y="3797300"/>
+            <a:off x="444500" y="3384550"/>
             <a:ext cx="571500" cy="38100"/>
           </a:xfrm>
           <a:prstGeom prst="rect">
@@ -6116,79 +5191,79 @@
         </p:nvSpPr>
         <p:spPr>
           <a:xfrm>
-            <a:off x="444500" y="3949700"/>
-            <a:ext cx="3937000" cy="1257300"/>
-          </a:xfrm>
-          <a:prstGeom prst="rect">
-            <a:avLst/>
-          </a:prstGeom>
-          <a:noFill/>
-          <a:ln>
-            <a:noFill/>
-          </a:ln>
-        </p:spPr>
-        <p:txBody>
-          <a:bodyPr wrap="square" lIns="0" tIns="0" rIns="0" bIns="0"/>
-          <a:lstStyle/>
-          <a:p>
-            <a:r>
-              <a:rPr lang="hr-HR" sz="1350">
-                <a:solidFill>
-                  <a:srgbClr val="20282C"/>
-                </a:solidFill>
-                <a:latin typeface="Aptos"/>
-              </a:rPr>
-              <a:t>• 2 convolution layers, no FC layers</a:t>
-            </a:r>
-            <a:endParaRPr lang="hr-HR" sz="1350"/>
-          </a:p>
-          <a:p>
-            <a:r>
-              <a:rPr lang="hr-HR" sz="1350">
-                <a:solidFill>
-                  <a:srgbClr val="20282C"/>
-                </a:solidFill>
-                <a:latin typeface="Aptos"/>
-              </a:rPr>
-              <a:t>• fbank_kaldi 161 + CMVN, no augmentation</a:t>
-            </a:r>
-            <a:endParaRPr lang="hr-HR" sz="1350"/>
-          </a:p>
-          <a:p>
-            <a:r>
-              <a:rPr lang="hr-HR" sz="1350">
-                <a:solidFill>
-                  <a:srgbClr val="20282C"/>
-                </a:solidFill>
-                <a:latin typeface="Aptos"/>
-              </a:rPr>
-              <a:t>• batch size 32, 8 workers</a:t>
-            </a:r>
-            <a:endParaRPr lang="hr-HR" sz="1350"/>
-          </a:p>
-          <a:p>
-            <a:r>
-              <a:rPr lang="hr-HR" sz="1350">
-                <a:solidFill>
-                  <a:srgbClr val="20282C"/>
-                </a:solidFill>
-                <a:latin typeface="Aptos"/>
-              </a:rPr>
-              <a:t>• lr 5e-4, exponential decay 0.93, grad clip 5.0</a:t>
-            </a:r>
-            <a:endParaRPr lang="hr-HR" sz="1350"/>
-          </a:p>
-          <a:p>
-            <a:r>
-              <a:rPr lang="hr-HR" sz="1350">
-                <a:solidFill>
-                  <a:srgbClr val="20282C"/>
-                </a:solidFill>
-                <a:latin typeface="Aptos"/>
-              </a:rPr>
-              <a:t>• avg_1 checkpoint used for final eval</a:t>
-            </a:r>
-            <a:endParaRPr lang="hr-HR" sz="1350"/>
+            <a:off x="444500" y="3524250"/>
+            <a:ext cx="3111500" cy="1143000"/>
+          </a:xfrm>
+          <a:prstGeom prst="rect">
+            <a:avLst/>
+          </a:prstGeom>
+          <a:noFill/>
+          <a:ln>
+            <a:noFill/>
+          </a:ln>
+        </p:spPr>
+        <p:txBody>
+          <a:bodyPr wrap="square" lIns="0" tIns="0" rIns="0" bIns="0"/>
+          <a:lstStyle/>
+          <a:p>
+            <a:r>
+              <a:rPr lang="hr-HR" sz="1300">
+                <a:solidFill>
+                  <a:srgbClr val="20282C"/>
+                </a:solidFill>
+                <a:latin typeface="Aptos"/>
+              </a:rPr>
+              <a:t>• konvolucijski front-end</a:t>
+            </a:r>
+            <a:endParaRPr lang="hr-HR" sz="1300"/>
+          </a:p>
+          <a:p>
+            <a:r>
+              <a:rPr lang="hr-HR" sz="1300">
+                <a:solidFill>
+                  <a:srgbClr val="20282C"/>
+                </a:solidFill>
+                <a:latin typeface="Aptos"/>
+              </a:rPr>
+              <a:t>• bidirectional offline recurrent layers</a:t>
+            </a:r>
+            <a:endParaRPr lang="hr-HR" sz="1300"/>
+          </a:p>
+          <a:p>
+            <a:r>
+              <a:rPr lang="hr-HR" sz="1300">
+                <a:solidFill>
+                  <a:srgbClr val="20282C"/>
+                </a:solidFill>
+                <a:latin typeface="Aptos"/>
+              </a:rPr>
+              <a:t>• character CTC targets</a:t>
+            </a:r>
+            <a:endParaRPr lang="hr-HR" sz="1300"/>
+          </a:p>
+          <a:p>
+            <a:r>
+              <a:rPr lang="hr-HR" sz="1300">
+                <a:solidFill>
+                  <a:srgbClr val="20282C"/>
+                </a:solidFill>
+                <a:latin typeface="Aptos"/>
+              </a:rPr>
+              <a:t>• beam-search decoding path</a:t>
+            </a:r>
+            <a:endParaRPr lang="hr-HR" sz="1300"/>
+          </a:p>
+          <a:p>
+            <a:r>
+              <a:rPr lang="hr-HR" sz="1300">
+                <a:solidFill>
+                  <a:srgbClr val="20282C"/>
+                </a:solidFill>
+                <a:latin typeface="Aptos"/>
+              </a:rPr>
+              <a:t>• external word-level KenLM scorer</a:t>
+            </a:r>
+            <a:endParaRPr lang="hr-HR" sz="1300"/>
           </a:p>
         </p:txBody>
       </p:sp>
@@ -6200,8 +5275,8 @@
         </p:nvSpPr>
         <p:spPr>
           <a:xfrm>
-            <a:off x="4953000" y="3556000"/>
-            <a:ext cx="2857500" cy="190500"/>
+            <a:off x="3873500" y="3143250"/>
+            <a:ext cx="2984500" cy="190500"/>
           </a:xfrm>
           <a:prstGeom prst="rect">
             <a:avLst/>
@@ -6222,7 +5297,7 @@
                 </a:solidFill>
                 <a:latin typeface="Aptos"/>
               </a:rPr>
-              <a:t>Zašto ovako</a:t>
+              <a:t>Zajednički trening</a:t>
             </a:r>
             <a:endParaRPr lang="hr-HR" sz="1800"/>
           </a:p>
@@ -6236,7 +5311,7 @@
         </p:nvSpPr>
         <p:spPr>
           <a:xfrm>
-            <a:off x="4953000" y="3797300"/>
+            <a:off x="3873500" y="3384550"/>
             <a:ext cx="571500" cy="38100"/>
           </a:xfrm>
           <a:prstGeom prst="rect">
@@ -6258,56 +5333,222 @@
         </p:nvSpPr>
         <p:spPr>
           <a:xfrm>
-            <a:off x="4953000" y="3949700"/>
-            <a:ext cx="4127500" cy="1257300"/>
-          </a:xfrm>
-          <a:prstGeom prst="rect">
-            <a:avLst/>
-          </a:prstGeom>
-          <a:noFill/>
-          <a:ln>
-            <a:noFill/>
-          </a:ln>
-        </p:spPr>
-        <p:txBody>
-          <a:bodyPr wrap="square" lIns="0" tIns="0" rIns="0" bIns="0"/>
-          <a:lstStyle/>
-          <a:p>
-            <a:r>
-              <a:rPr lang="hr-HR" sz="1350">
-                <a:solidFill>
-                  <a:srgbClr val="20282C"/>
-                </a:solidFill>
-                <a:latin typeface="Aptos"/>
-              </a:rPr>
-              <a:t>Paper-small run drži hidden size 650 i GRU kao najbližu izvedivu VEPRAD varijantu unutar PaddleSpeecha.</a:t>
-            </a:r>
-            <a:endParaRPr lang="hr-HR" sz="1350"/>
-          </a:p>
-          <a:p>
-            <a:r>
-              <a:rPr lang="hr-HR" sz="1350">
-                <a:solidFill>
-                  <a:srgbClr val="6F6A5B"/>
-                </a:solidFill>
-                <a:latin typeface="Aptos"/>
-              </a:rPr>
-              <a:t>Dublji GRU testira samu dubinu. LSTM testira je li druga recurrent cell bolja na istom VEPRAD splitu i decoding protokolu.</a:t>
-            </a:r>
-            <a:endParaRPr lang="hr-HR" sz="1350"/>
-          </a:p>
-        </p:txBody>
-      </p:sp>
-      <p:sp>
-        <p:nvSpPr>
-          <p:cNvPr id="43" name="Rectangle"/>
+            <a:off x="3873500" y="3524250"/>
+            <a:ext cx="3175000" cy="1143000"/>
+          </a:xfrm>
+          <a:prstGeom prst="rect">
+            <a:avLst/>
+          </a:prstGeom>
+          <a:noFill/>
+          <a:ln>
+            <a:noFill/>
+          </a:ln>
+        </p:spPr>
+        <p:txBody>
+          <a:bodyPr wrap="square" lIns="0" tIns="0" rIns="0" bIns="0"/>
+          <a:lstStyle/>
+          <a:p>
+            <a:r>
+              <a:rPr lang="hr-HR" sz="1300">
+                <a:solidFill>
+                  <a:srgbClr val="20282C"/>
+                </a:solidFill>
+                <a:latin typeface="Aptos"/>
+              </a:rPr>
+              <a:t>• fbank_kaldi 161 + CMVN</a:t>
+            </a:r>
+            <a:endParaRPr lang="hr-HR" sz="1300"/>
+          </a:p>
+          <a:p>
+            <a:r>
+              <a:rPr lang="hr-HR" sz="1300">
+                <a:solidFill>
+                  <a:srgbClr val="20282C"/>
+                </a:solidFill>
+                <a:latin typeface="Aptos"/>
+              </a:rPr>
+              <a:t>• no data augmentation</a:t>
+            </a:r>
+            <a:endParaRPr lang="hr-HR" sz="1300"/>
+          </a:p>
+          <a:p>
+            <a:r>
+              <a:rPr lang="hr-HR" sz="1300">
+                <a:solidFill>
+                  <a:srgbClr val="20282C"/>
+                </a:solidFill>
+                <a:latin typeface="Aptos"/>
+              </a:rPr>
+              <a:t>• batch size 32, 8 workers</a:t>
+            </a:r>
+            <a:endParaRPr lang="hr-HR" sz="1300"/>
+          </a:p>
+          <a:p>
+            <a:r>
+              <a:rPr lang="hr-HR" sz="1300">
+                <a:solidFill>
+                  <a:srgbClr val="20282C"/>
+                </a:solidFill>
+                <a:latin typeface="Aptos"/>
+              </a:rPr>
+              <a:t>• lr 5e-4, decay 0.93, grad clip 5.0</a:t>
+            </a:r>
+            <a:endParaRPr lang="hr-HR" sz="1300"/>
+          </a:p>
+          <a:p>
+            <a:r>
+              <a:rPr lang="hr-HR" sz="1300">
+                <a:solidFill>
+                  <a:srgbClr val="20282C"/>
+                </a:solidFill>
+                <a:latin typeface="Aptos"/>
+              </a:rPr>
+              <a:t>• avg_1 checkpoint for final eval</a:t>
+            </a:r>
+            <a:endParaRPr lang="hr-HR" sz="1300"/>
+          </a:p>
+        </p:txBody>
+      </p:sp>
+      <p:sp>
+        <p:nvSpPr>
+          <p:cNvPr id="43" name="Text"/>
+          <p:cNvSpPr txBox="1"/>
+          <p:nvPr/>
+        </p:nvSpPr>
+        <p:spPr>
+          <a:xfrm>
+            <a:off x="7048500" y="3143250"/>
+            <a:ext cx="3937000" cy="342900"/>
+          </a:xfrm>
+          <a:prstGeom prst="rect">
+            <a:avLst/>
+          </a:prstGeom>
+          <a:noFill/>
+          <a:ln>
+            <a:noFill/>
+          </a:ln>
+        </p:spPr>
+        <p:txBody>
+          <a:bodyPr wrap="square" lIns="0" tIns="0" rIns="0" bIns="0"/>
+          <a:lstStyle/>
+          <a:p>
+            <a:r>
+              <a:rPr lang="hr-HR" sz="1700" b="1">
+                <a:solidFill>
+                  <a:srgbClr val="15171A"/>
+                </a:solidFill>
+                <a:latin typeface="Aptos"/>
+              </a:rPr>
+              <a:t>Razlike od paper konfiguracije</a:t>
+            </a:r>
+            <a:endParaRPr lang="hr-HR" sz="1700"/>
+          </a:p>
+        </p:txBody>
+      </p:sp>
+      <p:sp>
+        <p:nvSpPr>
+          <p:cNvPr id="44" name="Rule"/>
           <p:cNvSpPr/>
           <p:nvPr/>
         </p:nvSpPr>
         <p:spPr>
           <a:xfrm>
-            <a:off x="444500" y="5588000"/>
-            <a:ext cx="8699500" cy="495300"/>
+            <a:off x="7048500" y="3511550"/>
+            <a:ext cx="571500" cy="38100"/>
+          </a:xfrm>
+          <a:prstGeom prst="rect">
+            <a:avLst/>
+          </a:prstGeom>
+          <a:solidFill>
+            <a:srgbClr val="E24A2A"/>
+          </a:solidFill>
+          <a:ln>
+            <a:noFill/>
+          </a:ln>
+        </p:spPr>
+      </p:sp>
+      <p:sp>
+        <p:nvSpPr>
+          <p:cNvPr id="45" name="Text"/>
+          <p:cNvSpPr txBox="1"/>
+          <p:nvPr/>
+        </p:nvSpPr>
+        <p:spPr>
+          <a:xfrm>
+            <a:off x="7048500" y="3670300"/>
+            <a:ext cx="4064000" cy="1143000"/>
+          </a:xfrm>
+          <a:prstGeom prst="rect">
+            <a:avLst/>
+          </a:prstGeom>
+          <a:noFill/>
+          <a:ln>
+            <a:noFill/>
+          </a:ln>
+        </p:spPr>
+        <p:txBody>
+          <a:bodyPr wrap="square" lIns="0" tIns="0" rIns="0" bIns="0"/>
+          <a:lstStyle/>
+          <a:p>
+            <a:r>
+              <a:rPr lang="hr-HR" sz="1240">
+                <a:solidFill>
+                  <a:srgbClr val="20282C"/>
+                </a:solidFill>
+                <a:latin typeface="Aptos"/>
+              </a:rPr>
+              <a:t>• BatchNorm nije izravno izložen u ovom DS2 pathu</a:t>
+            </a:r>
+            <a:endParaRPr lang="hr-HR" sz="1240"/>
+          </a:p>
+          <a:p>
+            <a:r>
+              <a:rPr lang="hr-HR" sz="1240">
+                <a:solidFill>
+                  <a:srgbClr val="20282C"/>
+                </a:solidFill>
+                <a:latin typeface="Aptos"/>
+              </a:rPr>
+              <a:t>• exact log-spectrogram setup zamijenjen je fbank_kaldi značajkama</a:t>
+            </a:r>
+            <a:endParaRPr lang="hr-HR" sz="1240"/>
+          </a:p>
+          <a:p>
+            <a:r>
+              <a:rPr lang="hr-HR" sz="1240">
+                <a:solidFill>
+                  <a:srgbClr val="20282C"/>
+                </a:solidFill>
+                <a:latin typeface="Aptos"/>
+              </a:rPr>
+              <a:t>• trainer koristi Adam + LR decay, ne Nesterov momentum</a:t>
+            </a:r>
+            <a:endParaRPr lang="hr-HR" sz="1240"/>
+          </a:p>
+          <a:p>
+            <a:r>
+              <a:rPr lang="hr-HR" sz="1240">
+                <a:solidFill>
+                  <a:srgbClr val="20282C"/>
+                </a:solidFill>
+                <a:latin typeface="Aptos"/>
+              </a:rPr>
+              <a:t>• lookahead convolution nije uključena bez source edita</a:t>
+            </a:r>
+            <a:endParaRPr lang="hr-HR" sz="1240"/>
+          </a:p>
+        </p:txBody>
+      </p:sp>
+      <p:sp>
+        <p:nvSpPr>
+          <p:cNvPr id="46" name="Rectangle"/>
+          <p:cNvSpPr/>
+          <p:nvPr/>
+        </p:nvSpPr>
+        <p:spPr>
+          <a:xfrm>
+            <a:off x="444500" y="5397500"/>
+            <a:ext cx="8699500" cy="571500"/>
           </a:xfrm>
           <a:prstGeom prst="rect">
             <a:avLst/>
@@ -6324,14 +5565,14 @@
       </p:sp>
       <p:sp>
         <p:nvSpPr>
-          <p:cNvPr id="44" name="Text"/>
-          <p:cNvSpPr txBox="1"/>
-          <p:nvPr/>
-        </p:nvSpPr>
-        <p:spPr>
-          <a:xfrm>
-            <a:off x="609600" y="5702300"/>
-            <a:ext cx="8382000" cy="228600"/>
+          <p:cNvPr id="47" name="Text"/>
+          <p:cNvSpPr txBox="1"/>
+          <p:nvPr/>
+        </p:nvSpPr>
+        <p:spPr>
+          <a:xfrm>
+            <a:off x="609600" y="5524500"/>
+            <a:ext cx="8382000" cy="266700"/>
           </a:xfrm>
           <a:prstGeom prst="rect">
             <a:avLst/>
@@ -6352,45 +5593,9 @@
                 </a:solidFill>
                 <a:latin typeface="Aptos"/>
               </a:rPr>
-              <a:t>Optimizer napomena: za razliku od DS2 papera, ovaj PaddleSpeech trainer koristi Adam + LR decay; to eksplicitno navodimo kao razliku od paper reprodukcije.</a:t>
+              <a:t>Zaključak: najbliži paper-small run koristi 5 bidirectional GRU slojeva s hidden size 650; dublji GRU i LSTM služe kao kontrolirane varijante na istom VEPRAD splitu.</a:t>
             </a:r>
             <a:endParaRPr lang="hr-HR" sz="1300"/>
-          </a:p>
-        </p:txBody>
-      </p:sp>
-      <p:sp>
-        <p:nvSpPr>
-          <p:cNvPr id="45" name="Footer"/>
-          <p:cNvSpPr txBox="1"/>
-          <p:nvPr/>
-        </p:nvSpPr>
-        <p:spPr>
-          <a:xfrm>
-            <a:off x="444500" y="6591300"/>
-            <a:ext cx="9207500" cy="152400"/>
-          </a:xfrm>
-          <a:prstGeom prst="rect">
-            <a:avLst/>
-          </a:prstGeom>
-          <a:noFill/>
-          <a:ln>
-            <a:noFill/>
-          </a:ln>
-        </p:spPr>
-        <p:txBody>
-          <a:bodyPr wrap="square" lIns="0" tIns="0" rIns="0" bIns="0"/>
-          <a:lstStyle/>
-          <a:p>
-            <a:r>
-              <a:rPr lang="hr-HR" sz="850">
-                <a:solidFill>
-                  <a:srgbClr val="6F6A5B"/>
-                </a:solidFill>
-                <a:latin typeface="Aptos"/>
-              </a:rPr>
-              <a:t>Konfiguracije: conf/deepspeech2_paper_small.yaml, conf/deepspeech2_paper_7gru.yaml, conf/deepspeech2_paper_7lstm.yaml.</a:t>
-            </a:r>
-            <a:endParaRPr lang="hr-HR" sz="850"/>
           </a:p>
         </p:txBody>
       </p:sp>
@@ -6953,7 +6158,7 @@
                 </a:solidFill>
                 <a:latin typeface="Aptos"/>
               </a:rPr>
-              <a:t>Najbolji VEPRAD decoder</a:t>
+              <a:t>WER: beam1 → KenLM</a:t>
             </a:r>
             <a:endParaRPr lang="hr-HR" sz="1800"/>
           </a:p>
@@ -6990,7 +6195,7 @@
         <p:spPr>
           <a:xfrm>
             <a:off x="444500" y="3886200"/>
-            <a:ext cx="7747000" cy="1473200"/>
+            <a:ext cx="4445000" cy="1574800"/>
           </a:xfrm>
           <a:prstGeom prst="rect">
             <a:avLst/>
@@ -7014,7 +6219,7 @@
         <p:spPr>
           <a:xfrm>
             <a:off x="444500" y="3886200"/>
-            <a:ext cx="7747000" cy="368300"/>
+            <a:ext cx="4445000" cy="393700"/>
           </a:xfrm>
           <a:prstGeom prst="rect">
             <a:avLst/>
@@ -7035,8 +6240,8 @@
         </p:nvSpPr>
         <p:spPr>
           <a:xfrm>
-            <a:off x="444500" y="4622800"/>
-            <a:ext cx="7747000" cy="368300"/>
+            <a:off x="444500" y="4673600"/>
+            <a:ext cx="4445000" cy="393700"/>
           </a:xfrm>
           <a:prstGeom prst="rect">
             <a:avLst/>
@@ -7058,30 +6263,30 @@
         <p:spPr>
           <a:xfrm>
             <a:off x="495300" y="3943350"/>
-            <a:ext cx="1739900" cy="292100"/>
-          </a:xfrm>
-          <a:prstGeom prst="rect">
-            <a:avLst/>
-          </a:prstGeom>
-          <a:noFill/>
-          <a:ln>
-            <a:noFill/>
-          </a:ln>
-        </p:spPr>
-        <p:txBody>
-          <a:bodyPr wrap="square" lIns="0" tIns="0" rIns="0" bIns="0"/>
-          <a:lstStyle/>
-          <a:p>
-            <a:r>
-              <a:rPr lang="hr-HR" sz="1030" b="1">
+            <a:ext cx="1104900" cy="317500"/>
+          </a:xfrm>
+          <a:prstGeom prst="rect">
+            <a:avLst/>
+          </a:prstGeom>
+          <a:noFill/>
+          <a:ln>
+            <a:noFill/>
+          </a:ln>
+        </p:spPr>
+        <p:txBody>
+          <a:bodyPr wrap="square" lIns="0" tIns="0" rIns="0" bIns="0"/>
+          <a:lstStyle/>
+          <a:p>
+            <a:r>
+              <a:rPr lang="hr-HR" sz="950" b="1">
                 <a:solidFill>
                   <a:srgbClr val="F8F3E8"/>
                 </a:solidFill>
                 <a:latin typeface="Aptos"/>
               </a:rPr>
-              <a:t>Model</a:t>
-            </a:r>
-            <a:endParaRPr lang="hr-HR" sz="1030"/>
+              <a:t>Validation</a:t>
+            </a:r>
+            <a:endParaRPr lang="hr-HR" sz="950"/>
           </a:p>
         </p:txBody>
       </p:sp>
@@ -7093,31 +6298,31 @@
         </p:nvSpPr>
         <p:spPr>
           <a:xfrm>
-            <a:off x="2336800" y="3943350"/>
-            <a:ext cx="1485900" cy="292100"/>
-          </a:xfrm>
-          <a:prstGeom prst="rect">
-            <a:avLst/>
-          </a:prstGeom>
-          <a:noFill/>
-          <a:ln>
-            <a:noFill/>
-          </a:ln>
-        </p:spPr>
-        <p:txBody>
-          <a:bodyPr wrap="square" lIns="0" tIns="0" rIns="0" bIns="0"/>
-          <a:lstStyle/>
-          <a:p>
-            <a:r>
-              <a:rPr lang="hr-HR" sz="1030" b="1">
+            <a:off x="1701800" y="3943350"/>
+            <a:ext cx="977900" cy="317500"/>
+          </a:xfrm>
+          <a:prstGeom prst="rect">
+            <a:avLst/>
+          </a:prstGeom>
+          <a:noFill/>
+          <a:ln>
+            <a:noFill/>
+          </a:ln>
+        </p:spPr>
+        <p:txBody>
+          <a:bodyPr wrap="square" lIns="0" tIns="0" rIns="0" bIns="0"/>
+          <a:lstStyle/>
+          <a:p>
+            <a:r>
+              <a:rPr lang="hr-HR" sz="950" b="1">
                 <a:solidFill>
                   <a:srgbClr val="F8F3E8"/>
                 </a:solidFill>
                 <a:latin typeface="Aptos"/>
               </a:rPr>
-              <a:t>best decoder</a:t>
-            </a:r>
-            <a:endParaRPr lang="hr-HR" sz="1030"/>
+              <a:t>all</a:t>
+            </a:r>
+            <a:endParaRPr lang="hr-HR" sz="950"/>
           </a:p>
         </p:txBody>
       </p:sp>
@@ -7129,31 +6334,31 @@
         </p:nvSpPr>
         <p:spPr>
           <a:xfrm>
-            <a:off x="3924300" y="3943350"/>
-            <a:ext cx="977900" cy="292100"/>
-          </a:xfrm>
-          <a:prstGeom prst="rect">
-            <a:avLst/>
-          </a:prstGeom>
-          <a:noFill/>
-          <a:ln>
-            <a:noFill/>
-          </a:ln>
-        </p:spPr>
-        <p:txBody>
-          <a:bodyPr wrap="square" lIns="0" tIns="0" rIns="0" bIns="0"/>
-          <a:lstStyle/>
-          <a:p>
-            <a:r>
-              <a:rPr lang="hr-HR" sz="1030" b="1">
+            <a:off x="2781300" y="3943350"/>
+            <a:ext cx="977900" cy="317500"/>
+          </a:xfrm>
+          <a:prstGeom prst="rect">
+            <a:avLst/>
+          </a:prstGeom>
+          <a:noFill/>
+          <a:ln>
+            <a:noFill/>
+          </a:ln>
+        </p:spPr>
+        <p:txBody>
+          <a:bodyPr wrap="square" lIns="0" tIns="0" rIns="0" bIns="0"/>
+          <a:lstStyle/>
+          <a:p>
+            <a:r>
+              <a:rPr lang="hr-HR" sz="950" b="1">
                 <a:solidFill>
                   <a:srgbClr val="F8F3E8"/>
                 </a:solidFill>
                 <a:latin typeface="Aptos"/>
               </a:rPr>
-              <a:t>val WER</a:t>
-            </a:r>
-            <a:endParaRPr lang="hr-HR" sz="1030"/>
+              <a:t>seen</a:t>
+            </a:r>
+            <a:endParaRPr lang="hr-HR" sz="950"/>
           </a:p>
         </p:txBody>
       </p:sp>
@@ -7165,95 +6370,775 @@
         </p:nvSpPr>
         <p:spPr>
           <a:xfrm>
-            <a:off x="5003800" y="3943350"/>
-            <a:ext cx="977900" cy="292100"/>
-          </a:xfrm>
-          <a:prstGeom prst="rect">
-            <a:avLst/>
-          </a:prstGeom>
-          <a:noFill/>
-          <a:ln>
-            <a:noFill/>
-          </a:ln>
-        </p:spPr>
-        <p:txBody>
-          <a:bodyPr wrap="square" lIns="0" tIns="0" rIns="0" bIns="0"/>
-          <a:lstStyle/>
-          <a:p>
-            <a:r>
-              <a:rPr lang="hr-HR" sz="1030" b="1">
+            <a:off x="3860800" y="3943350"/>
+            <a:ext cx="977900" cy="317500"/>
+          </a:xfrm>
+          <a:prstGeom prst="rect">
+            <a:avLst/>
+          </a:prstGeom>
+          <a:noFill/>
+          <a:ln>
+            <a:noFill/>
+          </a:ln>
+        </p:spPr>
+        <p:txBody>
+          <a:bodyPr wrap="square" lIns="0" tIns="0" rIns="0" bIns="0"/>
+          <a:lstStyle/>
+          <a:p>
+            <a:r>
+              <a:rPr lang="hr-HR" sz="950" b="1">
                 <a:solidFill>
                   <a:srgbClr val="F8F3E8"/>
                 </a:solidFill>
                 <a:latin typeface="Aptos"/>
               </a:rPr>
-              <a:t>test WER</a:t>
-            </a:r>
-            <a:endParaRPr lang="hr-HR" sz="1030"/>
-          </a:p>
-        </p:txBody>
-      </p:sp>
-      <p:sp>
-        <p:nvSpPr>
-          <p:cNvPr id="24" name="Header"/>
-          <p:cNvSpPr txBox="1"/>
-          <p:nvPr/>
-        </p:nvSpPr>
-        <p:spPr>
-          <a:xfrm>
-            <a:off x="6083300" y="3943350"/>
-            <a:ext cx="977900" cy="292100"/>
-          </a:xfrm>
-          <a:prstGeom prst="rect">
-            <a:avLst/>
-          </a:prstGeom>
-          <a:noFill/>
-          <a:ln>
-            <a:noFill/>
-          </a:ln>
-        </p:spPr>
-        <p:txBody>
-          <a:bodyPr wrap="square" lIns="0" tIns="0" rIns="0" bIns="0"/>
-          <a:lstStyle/>
-          <a:p>
-            <a:r>
-              <a:rPr lang="hr-HR" sz="1030" b="1">
+              <a:t>unseen</a:t>
+            </a:r>
+            <a:endParaRPr lang="hr-HR" sz="950"/>
+          </a:p>
+        </p:txBody>
+      </p:sp>
+      <p:sp>
+        <p:nvSpPr>
+          <p:cNvPr id="24" name="Cell"/>
+          <p:cNvSpPr txBox="1"/>
+          <p:nvPr/>
+        </p:nvSpPr>
+        <p:spPr>
+          <a:xfrm>
+            <a:off x="495300" y="4330700"/>
+            <a:ext cx="1104900" cy="330200"/>
+          </a:xfrm>
+          <a:prstGeom prst="rect">
+            <a:avLst/>
+          </a:prstGeom>
+          <a:noFill/>
+          <a:ln>
+            <a:noFill/>
+          </a:ln>
+        </p:spPr>
+        <p:txBody>
+          <a:bodyPr wrap="square" lIns="0" tIns="0" rIns="0" bIns="0"/>
+          <a:lstStyle/>
+          <a:p>
+            <a:r>
+              <a:rPr lang="hr-HR" sz="950" b="1">
+                <a:solidFill>
+                  <a:srgbClr val="15171A"/>
+                </a:solidFill>
+                <a:latin typeface="Aptos"/>
+              </a:rPr>
+              <a:t>paper-small</a:t>
+            </a:r>
+            <a:endParaRPr lang="hr-HR" sz="950"/>
+          </a:p>
+        </p:txBody>
+      </p:sp>
+      <p:sp>
+        <p:nvSpPr>
+          <p:cNvPr id="25" name="Cell"/>
+          <p:cNvSpPr txBox="1"/>
+          <p:nvPr/>
+        </p:nvSpPr>
+        <p:spPr>
+          <a:xfrm>
+            <a:off x="1701800" y="4330700"/>
+            <a:ext cx="977900" cy="330200"/>
+          </a:xfrm>
+          <a:prstGeom prst="rect">
+            <a:avLst/>
+          </a:prstGeom>
+          <a:noFill/>
+          <a:ln>
+            <a:noFill/>
+          </a:ln>
+        </p:spPr>
+        <p:txBody>
+          <a:bodyPr wrap="square" lIns="0" tIns="0" rIns="0" bIns="0"/>
+          <a:lstStyle/>
+          <a:p>
+            <a:r>
+              <a:rPr lang="hr-HR" sz="950">
+                <a:solidFill>
+                  <a:srgbClr val="20282C"/>
+                </a:solidFill>
+                <a:latin typeface="Aptos"/>
+              </a:rPr>
+              <a:t>0.421→0.088</a:t>
+            </a:r>
+            <a:endParaRPr lang="hr-HR" sz="950"/>
+          </a:p>
+          <a:p>
+            <a:r>
+              <a:rPr lang="hr-HR" sz="950">
+                <a:solidFill>
+                  <a:srgbClr val="20282C"/>
+                </a:solidFill>
+                <a:latin typeface="Aptos"/>
+              </a:rPr>
+              <a:t>-79%</a:t>
+            </a:r>
+            <a:endParaRPr lang="hr-HR" sz="950"/>
+          </a:p>
+        </p:txBody>
+      </p:sp>
+      <p:sp>
+        <p:nvSpPr>
+          <p:cNvPr id="26" name="Cell"/>
+          <p:cNvSpPr txBox="1"/>
+          <p:nvPr/>
+        </p:nvSpPr>
+        <p:spPr>
+          <a:xfrm>
+            <a:off x="2781300" y="4330700"/>
+            <a:ext cx="977900" cy="330200"/>
+          </a:xfrm>
+          <a:prstGeom prst="rect">
+            <a:avLst/>
+          </a:prstGeom>
+          <a:noFill/>
+          <a:ln>
+            <a:noFill/>
+          </a:ln>
+        </p:spPr>
+        <p:txBody>
+          <a:bodyPr wrap="square" lIns="0" tIns="0" rIns="0" bIns="0"/>
+          <a:lstStyle/>
+          <a:p>
+            <a:r>
+              <a:rPr lang="hr-HR" sz="950">
+                <a:solidFill>
+                  <a:srgbClr val="20282C"/>
+                </a:solidFill>
+                <a:latin typeface="Aptos"/>
+              </a:rPr>
+              <a:t>0.345→0.074</a:t>
+            </a:r>
+            <a:endParaRPr lang="hr-HR" sz="950"/>
+          </a:p>
+          <a:p>
+            <a:r>
+              <a:rPr lang="hr-HR" sz="950">
+                <a:solidFill>
+                  <a:srgbClr val="20282C"/>
+                </a:solidFill>
+                <a:latin typeface="Aptos"/>
+              </a:rPr>
+              <a:t>-79%</a:t>
+            </a:r>
+            <a:endParaRPr lang="hr-HR" sz="950"/>
+          </a:p>
+        </p:txBody>
+      </p:sp>
+      <p:sp>
+        <p:nvSpPr>
+          <p:cNvPr id="27" name="Cell"/>
+          <p:cNvSpPr txBox="1"/>
+          <p:nvPr/>
+        </p:nvSpPr>
+        <p:spPr>
+          <a:xfrm>
+            <a:off x="3860800" y="4330700"/>
+            <a:ext cx="977900" cy="330200"/>
+          </a:xfrm>
+          <a:prstGeom prst="rect">
+            <a:avLst/>
+          </a:prstGeom>
+          <a:noFill/>
+          <a:ln>
+            <a:noFill/>
+          </a:ln>
+        </p:spPr>
+        <p:txBody>
+          <a:bodyPr wrap="square" lIns="0" tIns="0" rIns="0" bIns="0"/>
+          <a:lstStyle/>
+          <a:p>
+            <a:r>
+              <a:rPr lang="hr-HR" sz="950">
+                <a:solidFill>
+                  <a:srgbClr val="20282C"/>
+                </a:solidFill>
+                <a:latin typeface="Aptos"/>
+              </a:rPr>
+              <a:t>0.451→0.094</a:t>
+            </a:r>
+            <a:endParaRPr lang="hr-HR" sz="950"/>
+          </a:p>
+          <a:p>
+            <a:r>
+              <a:rPr lang="hr-HR" sz="950">
+                <a:solidFill>
+                  <a:srgbClr val="20282C"/>
+                </a:solidFill>
+                <a:latin typeface="Aptos"/>
+              </a:rPr>
+              <a:t>-79%</a:t>
+            </a:r>
+            <a:endParaRPr lang="hr-HR" sz="950"/>
+          </a:p>
+        </p:txBody>
+      </p:sp>
+      <p:sp>
+        <p:nvSpPr>
+          <p:cNvPr id="28" name="Cell"/>
+          <p:cNvSpPr txBox="1"/>
+          <p:nvPr/>
+        </p:nvSpPr>
+        <p:spPr>
+          <a:xfrm>
+            <a:off x="495300" y="4724400"/>
+            <a:ext cx="1104900" cy="330200"/>
+          </a:xfrm>
+          <a:prstGeom prst="rect">
+            <a:avLst/>
+          </a:prstGeom>
+          <a:noFill/>
+          <a:ln>
+            <a:noFill/>
+          </a:ln>
+        </p:spPr>
+        <p:txBody>
+          <a:bodyPr wrap="square" lIns="0" tIns="0" rIns="0" bIns="0"/>
+          <a:lstStyle/>
+          <a:p>
+            <a:r>
+              <a:rPr lang="hr-HR" sz="950" b="1">
+                <a:solidFill>
+                  <a:srgbClr val="15171A"/>
+                </a:solidFill>
+                <a:latin typeface="Aptos"/>
+              </a:rPr>
+              <a:t>7GRU</a:t>
+            </a:r>
+            <a:endParaRPr lang="hr-HR" sz="950"/>
+          </a:p>
+        </p:txBody>
+      </p:sp>
+      <p:sp>
+        <p:nvSpPr>
+          <p:cNvPr id="29" name="Cell"/>
+          <p:cNvSpPr txBox="1"/>
+          <p:nvPr/>
+        </p:nvSpPr>
+        <p:spPr>
+          <a:xfrm>
+            <a:off x="1701800" y="4724400"/>
+            <a:ext cx="977900" cy="330200"/>
+          </a:xfrm>
+          <a:prstGeom prst="rect">
+            <a:avLst/>
+          </a:prstGeom>
+          <a:noFill/>
+          <a:ln>
+            <a:noFill/>
+          </a:ln>
+        </p:spPr>
+        <p:txBody>
+          <a:bodyPr wrap="square" lIns="0" tIns="0" rIns="0" bIns="0"/>
+          <a:lstStyle/>
+          <a:p>
+            <a:r>
+              <a:rPr lang="hr-HR" sz="950">
+                <a:solidFill>
+                  <a:srgbClr val="20282C"/>
+                </a:solidFill>
+                <a:latin typeface="Aptos"/>
+              </a:rPr>
+              <a:t>0.400→0.094</a:t>
+            </a:r>
+            <a:endParaRPr lang="hr-HR" sz="950"/>
+          </a:p>
+          <a:p>
+            <a:r>
+              <a:rPr lang="hr-HR" sz="950">
+                <a:solidFill>
+                  <a:srgbClr val="20282C"/>
+                </a:solidFill>
+                <a:latin typeface="Aptos"/>
+              </a:rPr>
+              <a:t>-77%</a:t>
+            </a:r>
+            <a:endParaRPr lang="hr-HR" sz="950"/>
+          </a:p>
+        </p:txBody>
+      </p:sp>
+      <p:sp>
+        <p:nvSpPr>
+          <p:cNvPr id="30" name="Cell"/>
+          <p:cNvSpPr txBox="1"/>
+          <p:nvPr/>
+        </p:nvSpPr>
+        <p:spPr>
+          <a:xfrm>
+            <a:off x="2781300" y="4724400"/>
+            <a:ext cx="977900" cy="330200"/>
+          </a:xfrm>
+          <a:prstGeom prst="rect">
+            <a:avLst/>
+          </a:prstGeom>
+          <a:noFill/>
+          <a:ln>
+            <a:noFill/>
+          </a:ln>
+        </p:spPr>
+        <p:txBody>
+          <a:bodyPr wrap="square" lIns="0" tIns="0" rIns="0" bIns="0"/>
+          <a:lstStyle/>
+          <a:p>
+            <a:r>
+              <a:rPr lang="hr-HR" sz="950">
+                <a:solidFill>
+                  <a:srgbClr val="20282C"/>
+                </a:solidFill>
+                <a:latin typeface="Aptos"/>
+              </a:rPr>
+              <a:t>0.328→0.077</a:t>
+            </a:r>
+            <a:endParaRPr lang="hr-HR" sz="950"/>
+          </a:p>
+          <a:p>
+            <a:r>
+              <a:rPr lang="hr-HR" sz="950">
+                <a:solidFill>
+                  <a:srgbClr val="20282C"/>
+                </a:solidFill>
+                <a:latin typeface="Aptos"/>
+              </a:rPr>
+              <a:t>-77%</a:t>
+            </a:r>
+            <a:endParaRPr lang="hr-HR" sz="950"/>
+          </a:p>
+        </p:txBody>
+      </p:sp>
+      <p:sp>
+        <p:nvSpPr>
+          <p:cNvPr id="31" name="Cell"/>
+          <p:cNvSpPr txBox="1"/>
+          <p:nvPr/>
+        </p:nvSpPr>
+        <p:spPr>
+          <a:xfrm>
+            <a:off x="3860800" y="4724400"/>
+            <a:ext cx="977900" cy="330200"/>
+          </a:xfrm>
+          <a:prstGeom prst="rect">
+            <a:avLst/>
+          </a:prstGeom>
+          <a:noFill/>
+          <a:ln>
+            <a:noFill/>
+          </a:ln>
+        </p:spPr>
+        <p:txBody>
+          <a:bodyPr wrap="square" lIns="0" tIns="0" rIns="0" bIns="0"/>
+          <a:lstStyle/>
+          <a:p>
+            <a:r>
+              <a:rPr lang="hr-HR" sz="950">
+                <a:solidFill>
+                  <a:srgbClr val="20282C"/>
+                </a:solidFill>
+                <a:latin typeface="Aptos"/>
+              </a:rPr>
+              <a:t>0.429→0.101</a:t>
+            </a:r>
+            <a:endParaRPr lang="hr-HR" sz="950"/>
+          </a:p>
+          <a:p>
+            <a:r>
+              <a:rPr lang="hr-HR" sz="950">
+                <a:solidFill>
+                  <a:srgbClr val="20282C"/>
+                </a:solidFill>
+                <a:latin typeface="Aptos"/>
+              </a:rPr>
+              <a:t>-77%</a:t>
+            </a:r>
+            <a:endParaRPr lang="hr-HR" sz="950"/>
+          </a:p>
+        </p:txBody>
+      </p:sp>
+      <p:sp>
+        <p:nvSpPr>
+          <p:cNvPr id="32" name="Cell"/>
+          <p:cNvSpPr txBox="1"/>
+          <p:nvPr/>
+        </p:nvSpPr>
+        <p:spPr>
+          <a:xfrm>
+            <a:off x="495300" y="5118100"/>
+            <a:ext cx="1104900" cy="330200"/>
+          </a:xfrm>
+          <a:prstGeom prst="rect">
+            <a:avLst/>
+          </a:prstGeom>
+          <a:noFill/>
+          <a:ln>
+            <a:noFill/>
+          </a:ln>
+        </p:spPr>
+        <p:txBody>
+          <a:bodyPr wrap="square" lIns="0" tIns="0" rIns="0" bIns="0"/>
+          <a:lstStyle/>
+          <a:p>
+            <a:r>
+              <a:rPr lang="hr-HR" sz="950" b="1">
+                <a:solidFill>
+                  <a:srgbClr val="15171A"/>
+                </a:solidFill>
+                <a:latin typeface="Aptos"/>
+              </a:rPr>
+              <a:t>7LSTM</a:t>
+            </a:r>
+            <a:endParaRPr lang="hr-HR" sz="950"/>
+          </a:p>
+        </p:txBody>
+      </p:sp>
+      <p:sp>
+        <p:nvSpPr>
+          <p:cNvPr id="33" name="Cell"/>
+          <p:cNvSpPr txBox="1"/>
+          <p:nvPr/>
+        </p:nvSpPr>
+        <p:spPr>
+          <a:xfrm>
+            <a:off x="1701800" y="5118100"/>
+            <a:ext cx="977900" cy="330200"/>
+          </a:xfrm>
+          <a:prstGeom prst="rect">
+            <a:avLst/>
+          </a:prstGeom>
+          <a:noFill/>
+          <a:ln>
+            <a:noFill/>
+          </a:ln>
+        </p:spPr>
+        <p:txBody>
+          <a:bodyPr wrap="square" lIns="0" tIns="0" rIns="0" bIns="0"/>
+          <a:lstStyle/>
+          <a:p>
+            <a:r>
+              <a:rPr lang="hr-HR" sz="950">
+                <a:solidFill>
+                  <a:srgbClr val="20282C"/>
+                </a:solidFill>
+                <a:latin typeface="Aptos"/>
+              </a:rPr>
+              <a:t>0.515→0.123</a:t>
+            </a:r>
+            <a:endParaRPr lang="hr-HR" sz="950"/>
+          </a:p>
+          <a:p>
+            <a:r>
+              <a:rPr lang="hr-HR" sz="950">
+                <a:solidFill>
+                  <a:srgbClr val="20282C"/>
+                </a:solidFill>
+                <a:latin typeface="Aptos"/>
+              </a:rPr>
+              <a:t>-76%</a:t>
+            </a:r>
+            <a:endParaRPr lang="hr-HR" sz="950"/>
+          </a:p>
+        </p:txBody>
+      </p:sp>
+      <p:sp>
+        <p:nvSpPr>
+          <p:cNvPr id="34" name="Cell"/>
+          <p:cNvSpPr txBox="1"/>
+          <p:nvPr/>
+        </p:nvSpPr>
+        <p:spPr>
+          <a:xfrm>
+            <a:off x="2781300" y="5118100"/>
+            <a:ext cx="977900" cy="330200"/>
+          </a:xfrm>
+          <a:prstGeom prst="rect">
+            <a:avLst/>
+          </a:prstGeom>
+          <a:noFill/>
+          <a:ln>
+            <a:noFill/>
+          </a:ln>
+        </p:spPr>
+        <p:txBody>
+          <a:bodyPr wrap="square" lIns="0" tIns="0" rIns="0" bIns="0"/>
+          <a:lstStyle/>
+          <a:p>
+            <a:r>
+              <a:rPr lang="hr-HR" sz="950">
+                <a:solidFill>
+                  <a:srgbClr val="20282C"/>
+                </a:solidFill>
+                <a:latin typeface="Aptos"/>
+              </a:rPr>
+              <a:t>0.430→0.090</a:t>
+            </a:r>
+            <a:endParaRPr lang="hr-HR" sz="950"/>
+          </a:p>
+          <a:p>
+            <a:r>
+              <a:rPr lang="hr-HR" sz="950">
+                <a:solidFill>
+                  <a:srgbClr val="20282C"/>
+                </a:solidFill>
+                <a:latin typeface="Aptos"/>
+              </a:rPr>
+              <a:t>-79%</a:t>
+            </a:r>
+            <a:endParaRPr lang="hr-HR" sz="950"/>
+          </a:p>
+        </p:txBody>
+      </p:sp>
+      <p:sp>
+        <p:nvSpPr>
+          <p:cNvPr id="35" name="Cell"/>
+          <p:cNvSpPr txBox="1"/>
+          <p:nvPr/>
+        </p:nvSpPr>
+        <p:spPr>
+          <a:xfrm>
+            <a:off x="3860800" y="5118100"/>
+            <a:ext cx="977900" cy="330200"/>
+          </a:xfrm>
+          <a:prstGeom prst="rect">
+            <a:avLst/>
+          </a:prstGeom>
+          <a:noFill/>
+          <a:ln>
+            <a:noFill/>
+          </a:ln>
+        </p:spPr>
+        <p:txBody>
+          <a:bodyPr wrap="square" lIns="0" tIns="0" rIns="0" bIns="0"/>
+          <a:lstStyle/>
+          <a:p>
+            <a:r>
+              <a:rPr lang="hr-HR" sz="950">
+                <a:solidFill>
+                  <a:srgbClr val="20282C"/>
+                </a:solidFill>
+                <a:latin typeface="Aptos"/>
+              </a:rPr>
+              <a:t>0.549→0.137</a:t>
+            </a:r>
+            <a:endParaRPr lang="hr-HR" sz="950"/>
+          </a:p>
+          <a:p>
+            <a:r>
+              <a:rPr lang="hr-HR" sz="950">
+                <a:solidFill>
+                  <a:srgbClr val="20282C"/>
+                </a:solidFill>
+                <a:latin typeface="Aptos"/>
+              </a:rPr>
+              <a:t>-75%</a:t>
+            </a:r>
+            <a:endParaRPr lang="hr-HR" sz="950"/>
+          </a:p>
+        </p:txBody>
+      </p:sp>
+      <p:sp>
+        <p:nvSpPr>
+          <p:cNvPr id="36" name="Table background"/>
+          <p:cNvSpPr/>
+          <p:nvPr/>
+        </p:nvSpPr>
+        <p:spPr>
+          <a:xfrm>
+            <a:off x="5207000" y="3886200"/>
+            <a:ext cx="4445000" cy="1574800"/>
+          </a:xfrm>
+          <a:prstGeom prst="rect">
+            <a:avLst/>
+          </a:prstGeom>
+          <a:solidFill>
+            <a:srgbClr val="F8F3E8"/>
+          </a:solidFill>
+          <a:ln w="12700">
+            <a:solidFill>
+              <a:srgbClr val="D6C8B5"/>
+            </a:solidFill>
+          </a:ln>
+        </p:spPr>
+      </p:sp>
+      <p:sp>
+        <p:nvSpPr>
+          <p:cNvPr id="37" name="Table header"/>
+          <p:cNvSpPr/>
+          <p:nvPr/>
+        </p:nvSpPr>
+        <p:spPr>
+          <a:xfrm>
+            <a:off x="5207000" y="3886200"/>
+            <a:ext cx="4445000" cy="393700"/>
+          </a:xfrm>
+          <a:prstGeom prst="rect">
+            <a:avLst/>
+          </a:prstGeom>
+          <a:solidFill>
+            <a:srgbClr val="2C8C99"/>
+          </a:solidFill>
+          <a:ln>
+            <a:noFill/>
+          </a:ln>
+        </p:spPr>
+      </p:sp>
+      <p:sp>
+        <p:nvSpPr>
+          <p:cNvPr id="38" name="Table stripe"/>
+          <p:cNvSpPr/>
+          <p:nvPr/>
+        </p:nvSpPr>
+        <p:spPr>
+          <a:xfrm>
+            <a:off x="5207000" y="4673600"/>
+            <a:ext cx="4445000" cy="393700"/>
+          </a:xfrm>
+          <a:prstGeom prst="rect">
+            <a:avLst/>
+          </a:prstGeom>
+          <a:solidFill>
+            <a:srgbClr val="F2DFC7"/>
+          </a:solidFill>
+          <a:ln>
+            <a:noFill/>
+          </a:ln>
+        </p:spPr>
+      </p:sp>
+      <p:sp>
+        <p:nvSpPr>
+          <p:cNvPr id="39" name="Header"/>
+          <p:cNvSpPr txBox="1"/>
+          <p:nvPr/>
+        </p:nvSpPr>
+        <p:spPr>
+          <a:xfrm>
+            <a:off x="5257800" y="3943350"/>
+            <a:ext cx="1104900" cy="317500"/>
+          </a:xfrm>
+          <a:prstGeom prst="rect">
+            <a:avLst/>
+          </a:prstGeom>
+          <a:noFill/>
+          <a:ln>
+            <a:noFill/>
+          </a:ln>
+        </p:spPr>
+        <p:txBody>
+          <a:bodyPr wrap="square" lIns="0" tIns="0" rIns="0" bIns="0"/>
+          <a:lstStyle/>
+          <a:p>
+            <a:r>
+              <a:rPr lang="hr-HR" sz="950" b="1">
                 <a:solidFill>
                   <a:srgbClr val="F8F3E8"/>
                 </a:solidFill>
                 <a:latin typeface="Aptos"/>
               </a:rPr>
+              <a:t>Frozen test</a:t>
+            </a:r>
+            <a:endParaRPr lang="hr-HR" sz="950"/>
+          </a:p>
+        </p:txBody>
+      </p:sp>
+      <p:sp>
+        <p:nvSpPr>
+          <p:cNvPr id="40" name="Header"/>
+          <p:cNvSpPr txBox="1"/>
+          <p:nvPr/>
+        </p:nvSpPr>
+        <p:spPr>
+          <a:xfrm>
+            <a:off x="6464300" y="3943350"/>
+            <a:ext cx="977900" cy="317500"/>
+          </a:xfrm>
+          <a:prstGeom prst="rect">
+            <a:avLst/>
+          </a:prstGeom>
+          <a:noFill/>
+          <a:ln>
+            <a:noFill/>
+          </a:ln>
+        </p:spPr>
+        <p:txBody>
+          <a:bodyPr wrap="square" lIns="0" tIns="0" rIns="0" bIns="0"/>
+          <a:lstStyle/>
+          <a:p>
+            <a:r>
+              <a:rPr lang="hr-HR" sz="950" b="1">
+                <a:solidFill>
+                  <a:srgbClr val="F8F3E8"/>
+                </a:solidFill>
+                <a:latin typeface="Aptos"/>
+              </a:rPr>
+              <a:t>all</a:t>
+            </a:r>
+            <a:endParaRPr lang="hr-HR" sz="950"/>
+          </a:p>
+        </p:txBody>
+      </p:sp>
+      <p:sp>
+        <p:nvSpPr>
+          <p:cNvPr id="41" name="Header"/>
+          <p:cNvSpPr txBox="1"/>
+          <p:nvPr/>
+        </p:nvSpPr>
+        <p:spPr>
+          <a:xfrm>
+            <a:off x="7543800" y="3943350"/>
+            <a:ext cx="977900" cy="317500"/>
+          </a:xfrm>
+          <a:prstGeom prst="rect">
+            <a:avLst/>
+          </a:prstGeom>
+          <a:noFill/>
+          <a:ln>
+            <a:noFill/>
+          </a:ln>
+        </p:spPr>
+        <p:txBody>
+          <a:bodyPr wrap="square" lIns="0" tIns="0" rIns="0" bIns="0"/>
+          <a:lstStyle/>
+          <a:p>
+            <a:r>
+              <a:rPr lang="hr-HR" sz="950" b="1">
+                <a:solidFill>
+                  <a:srgbClr val="F8F3E8"/>
+                </a:solidFill>
+                <a:latin typeface="Aptos"/>
+              </a:rPr>
               <a:t>seen</a:t>
             </a:r>
-            <a:endParaRPr lang="hr-HR" sz="1030"/>
-          </a:p>
-        </p:txBody>
-      </p:sp>
-      <p:sp>
-        <p:nvSpPr>
-          <p:cNvPr id="25" name="Header"/>
-          <p:cNvSpPr txBox="1"/>
-          <p:nvPr/>
-        </p:nvSpPr>
-        <p:spPr>
-          <a:xfrm>
-            <a:off x="7162800" y="3943350"/>
-            <a:ext cx="977900" cy="292100"/>
-          </a:xfrm>
-          <a:prstGeom prst="rect">
-            <a:avLst/>
-          </a:prstGeom>
-          <a:noFill/>
-          <a:ln>
-            <a:noFill/>
-          </a:ln>
-        </p:spPr>
-        <p:txBody>
-          <a:bodyPr wrap="square" lIns="0" tIns="0" rIns="0" bIns="0"/>
-          <a:lstStyle/>
-          <a:p>
-            <a:r>
-              <a:rPr lang="hr-HR" sz="1030" b="1">
+            <a:endParaRPr lang="hr-HR" sz="950"/>
+          </a:p>
+        </p:txBody>
+      </p:sp>
+      <p:sp>
+        <p:nvSpPr>
+          <p:cNvPr id="42" name="Header"/>
+          <p:cNvSpPr txBox="1"/>
+          <p:nvPr/>
+        </p:nvSpPr>
+        <p:spPr>
+          <a:xfrm>
+            <a:off x="8623300" y="3943350"/>
+            <a:ext cx="977900" cy="317500"/>
+          </a:xfrm>
+          <a:prstGeom prst="rect">
+            <a:avLst/>
+          </a:prstGeom>
+          <a:noFill/>
+          <a:ln>
+            <a:noFill/>
+          </a:ln>
+        </p:spPr>
+        <p:txBody>
+          <a:bodyPr wrap="square" lIns="0" tIns="0" rIns="0" bIns="0"/>
+          <a:lstStyle/>
+          <a:p>
+            <a:r>
+              <a:rPr lang="hr-HR" sz="950" b="1">
                 <a:solidFill>
                   <a:srgbClr val="F8F3E8"/>
                 </a:solidFill>
@@ -7261,704 +7146,560 @@
               </a:rPr>
               <a:t>unseen</a:t>
             </a:r>
-            <a:endParaRPr lang="hr-HR" sz="1030"/>
-          </a:p>
-        </p:txBody>
-      </p:sp>
-      <p:sp>
-        <p:nvSpPr>
-          <p:cNvPr id="26" name="Cell"/>
-          <p:cNvSpPr txBox="1"/>
-          <p:nvPr/>
-        </p:nvSpPr>
-        <p:spPr>
-          <a:xfrm>
-            <a:off x="495300" y="4305300"/>
-            <a:ext cx="1739900" cy="304800"/>
-          </a:xfrm>
-          <a:prstGeom prst="rect">
-            <a:avLst/>
-          </a:prstGeom>
-          <a:noFill/>
-          <a:ln>
-            <a:noFill/>
-          </a:ln>
-        </p:spPr>
-        <p:txBody>
-          <a:bodyPr wrap="square" lIns="0" tIns="0" rIns="0" bIns="0"/>
-          <a:lstStyle/>
-          <a:p>
-            <a:r>
-              <a:rPr lang="hr-HR" sz="1030" b="1">
+            <a:endParaRPr lang="hr-HR" sz="950"/>
+          </a:p>
+        </p:txBody>
+      </p:sp>
+      <p:sp>
+        <p:nvSpPr>
+          <p:cNvPr id="43" name="Cell"/>
+          <p:cNvSpPr txBox="1"/>
+          <p:nvPr/>
+        </p:nvSpPr>
+        <p:spPr>
+          <a:xfrm>
+            <a:off x="5257800" y="4330700"/>
+            <a:ext cx="1104900" cy="330200"/>
+          </a:xfrm>
+          <a:prstGeom prst="rect">
+            <a:avLst/>
+          </a:prstGeom>
+          <a:noFill/>
+          <a:ln>
+            <a:noFill/>
+          </a:ln>
+        </p:spPr>
+        <p:txBody>
+          <a:bodyPr wrap="square" lIns="0" tIns="0" rIns="0" bIns="0"/>
+          <a:lstStyle/>
+          <a:p>
+            <a:r>
+              <a:rPr lang="hr-HR" sz="950" b="1">
                 <a:solidFill>
                   <a:srgbClr val="15171A"/>
                 </a:solidFill>
                 <a:latin typeface="Aptos"/>
               </a:rPr>
-              <a:t>paper-small GRU</a:t>
-            </a:r>
-            <a:endParaRPr lang="hr-HR" sz="1030"/>
-          </a:p>
-        </p:txBody>
-      </p:sp>
-      <p:sp>
-        <p:nvSpPr>
-          <p:cNvPr id="27" name="Cell"/>
-          <p:cNvSpPr txBox="1"/>
-          <p:nvPr/>
-        </p:nvSpPr>
-        <p:spPr>
-          <a:xfrm>
-            <a:off x="2336800" y="4305300"/>
-            <a:ext cx="1485900" cy="304800"/>
-          </a:xfrm>
-          <a:prstGeom prst="rect">
-            <a:avLst/>
-          </a:prstGeom>
-          <a:noFill/>
-          <a:ln>
-            <a:noFill/>
-          </a:ln>
-        </p:spPr>
-        <p:txBody>
-          <a:bodyPr wrap="square" lIns="0" tIns="0" rIns="0" bIns="0"/>
-          <a:lstStyle/>
-          <a:p>
-            <a:r>
-              <a:rPr lang="hr-HR" sz="1030">
-                <a:solidFill>
-                  <a:srgbClr val="20282C"/>
-                </a:solidFill>
-                <a:latin typeface="Aptos"/>
-              </a:rPr>
-              <a:t>beam 40</a:t>
-            </a:r>
-            <a:endParaRPr lang="hr-HR" sz="1030"/>
-          </a:p>
-          <a:p>
-            <a:r>
-              <a:rPr lang="hr-HR" sz="1030">
-                <a:solidFill>
-                  <a:srgbClr val="20282C"/>
-                </a:solidFill>
-                <a:latin typeface="Aptos"/>
-              </a:rPr>
-              <a:t>a=2.5 b=0.3</a:t>
-            </a:r>
-            <a:endParaRPr lang="hr-HR" sz="1030"/>
-          </a:p>
-        </p:txBody>
-      </p:sp>
-      <p:sp>
-        <p:nvSpPr>
-          <p:cNvPr id="28" name="Cell"/>
-          <p:cNvSpPr txBox="1"/>
-          <p:nvPr/>
-        </p:nvSpPr>
-        <p:spPr>
-          <a:xfrm>
-            <a:off x="3924300" y="4305300"/>
-            <a:ext cx="977900" cy="304800"/>
-          </a:xfrm>
-          <a:prstGeom prst="rect">
-            <a:avLst/>
-          </a:prstGeom>
-          <a:noFill/>
-          <a:ln>
-            <a:noFill/>
-          </a:ln>
-        </p:spPr>
-        <p:txBody>
-          <a:bodyPr wrap="square" lIns="0" tIns="0" rIns="0" bIns="0"/>
-          <a:lstStyle/>
-          <a:p>
-            <a:r>
-              <a:rPr lang="hr-HR" sz="1030">
-                <a:solidFill>
-                  <a:srgbClr val="20282C"/>
-                </a:solidFill>
-                <a:latin typeface="Aptos"/>
-              </a:rPr>
-              <a:t>0.088</a:t>
-            </a:r>
-            <a:endParaRPr lang="hr-HR" sz="1030"/>
-          </a:p>
-        </p:txBody>
-      </p:sp>
-      <p:sp>
-        <p:nvSpPr>
-          <p:cNvPr id="29" name="Cell"/>
-          <p:cNvSpPr txBox="1"/>
-          <p:nvPr/>
-        </p:nvSpPr>
-        <p:spPr>
-          <a:xfrm>
-            <a:off x="5003800" y="4305300"/>
-            <a:ext cx="977900" cy="304800"/>
-          </a:xfrm>
-          <a:prstGeom prst="rect">
-            <a:avLst/>
-          </a:prstGeom>
-          <a:noFill/>
-          <a:ln>
-            <a:noFill/>
-          </a:ln>
-        </p:spPr>
-        <p:txBody>
-          <a:bodyPr wrap="square" lIns="0" tIns="0" rIns="0" bIns="0"/>
-          <a:lstStyle/>
-          <a:p>
-            <a:r>
-              <a:rPr lang="hr-HR" sz="1030">
-                <a:solidFill>
-                  <a:srgbClr val="20282C"/>
-                </a:solidFill>
-                <a:latin typeface="Aptos"/>
-              </a:rPr>
-              <a:t>0.118</a:t>
-            </a:r>
-            <a:endParaRPr lang="hr-HR" sz="1030"/>
-          </a:p>
-        </p:txBody>
-      </p:sp>
-      <p:sp>
-        <p:nvSpPr>
-          <p:cNvPr id="30" name="Cell"/>
-          <p:cNvSpPr txBox="1"/>
-          <p:nvPr/>
-        </p:nvSpPr>
-        <p:spPr>
-          <a:xfrm>
-            <a:off x="6083300" y="4305300"/>
-            <a:ext cx="977900" cy="304800"/>
-          </a:xfrm>
-          <a:prstGeom prst="rect">
-            <a:avLst/>
-          </a:prstGeom>
-          <a:noFill/>
-          <a:ln>
-            <a:noFill/>
-          </a:ln>
-        </p:spPr>
-        <p:txBody>
-          <a:bodyPr wrap="square" lIns="0" tIns="0" rIns="0" bIns="0"/>
-          <a:lstStyle/>
-          <a:p>
-            <a:r>
-              <a:rPr lang="hr-HR" sz="1030">
-                <a:solidFill>
-                  <a:srgbClr val="20282C"/>
-                </a:solidFill>
-                <a:latin typeface="Aptos"/>
-              </a:rPr>
-              <a:t>0.075</a:t>
-            </a:r>
-            <a:endParaRPr lang="hr-HR" sz="1030"/>
-          </a:p>
-        </p:txBody>
-      </p:sp>
-      <p:sp>
-        <p:nvSpPr>
-          <p:cNvPr id="31" name="Cell"/>
-          <p:cNvSpPr txBox="1"/>
-          <p:nvPr/>
-        </p:nvSpPr>
-        <p:spPr>
-          <a:xfrm>
-            <a:off x="7162800" y="4305300"/>
-            <a:ext cx="977900" cy="304800"/>
-          </a:xfrm>
-          <a:prstGeom prst="rect">
-            <a:avLst/>
-          </a:prstGeom>
-          <a:noFill/>
-          <a:ln>
-            <a:noFill/>
-          </a:ln>
-        </p:spPr>
-        <p:txBody>
-          <a:bodyPr wrap="square" lIns="0" tIns="0" rIns="0" bIns="0"/>
-          <a:lstStyle/>
-          <a:p>
-            <a:r>
-              <a:rPr lang="hr-HR" sz="1030">
-                <a:solidFill>
-                  <a:srgbClr val="20282C"/>
-                </a:solidFill>
-                <a:latin typeface="Aptos"/>
-              </a:rPr>
-              <a:t>0.160</a:t>
-            </a:r>
-            <a:endParaRPr lang="hr-HR" sz="1030"/>
-          </a:p>
-        </p:txBody>
-      </p:sp>
-      <p:sp>
-        <p:nvSpPr>
-          <p:cNvPr id="32" name="Cell"/>
-          <p:cNvSpPr txBox="1"/>
-          <p:nvPr/>
-        </p:nvSpPr>
-        <p:spPr>
-          <a:xfrm>
-            <a:off x="495300" y="4673600"/>
-            <a:ext cx="1739900" cy="304800"/>
-          </a:xfrm>
-          <a:prstGeom prst="rect">
-            <a:avLst/>
-          </a:prstGeom>
-          <a:noFill/>
-          <a:ln>
-            <a:noFill/>
-          </a:ln>
-        </p:spPr>
-        <p:txBody>
-          <a:bodyPr wrap="square" lIns="0" tIns="0" rIns="0" bIns="0"/>
-          <a:lstStyle/>
-          <a:p>
-            <a:r>
-              <a:rPr lang="hr-HR" sz="1030" b="1">
+              <a:t>paper-small</a:t>
+            </a:r>
+            <a:endParaRPr lang="hr-HR" sz="950"/>
+          </a:p>
+        </p:txBody>
+      </p:sp>
+      <p:sp>
+        <p:nvSpPr>
+          <p:cNvPr id="44" name="Cell"/>
+          <p:cNvSpPr txBox="1"/>
+          <p:nvPr/>
+        </p:nvSpPr>
+        <p:spPr>
+          <a:xfrm>
+            <a:off x="6464300" y="4330700"/>
+            <a:ext cx="977900" cy="330200"/>
+          </a:xfrm>
+          <a:prstGeom prst="rect">
+            <a:avLst/>
+          </a:prstGeom>
+          <a:noFill/>
+          <a:ln>
+            <a:noFill/>
+          </a:ln>
+        </p:spPr>
+        <p:txBody>
+          <a:bodyPr wrap="square" lIns="0" tIns="0" rIns="0" bIns="0"/>
+          <a:lstStyle/>
+          <a:p>
+            <a:r>
+              <a:rPr lang="hr-HR" sz="950">
+                <a:solidFill>
+                  <a:srgbClr val="20282C"/>
+                </a:solidFill>
+                <a:latin typeface="Aptos"/>
+              </a:rPr>
+              <a:t>0.453→0.118</a:t>
+            </a:r>
+            <a:endParaRPr lang="hr-HR" sz="950"/>
+          </a:p>
+          <a:p>
+            <a:r>
+              <a:rPr lang="hr-HR" sz="950">
+                <a:solidFill>
+                  <a:srgbClr val="20282C"/>
+                </a:solidFill>
+                <a:latin typeface="Aptos"/>
+              </a:rPr>
+              <a:t>-74%</a:t>
+            </a:r>
+            <a:endParaRPr lang="hr-HR" sz="950"/>
+          </a:p>
+        </p:txBody>
+      </p:sp>
+      <p:sp>
+        <p:nvSpPr>
+          <p:cNvPr id="45" name="Cell"/>
+          <p:cNvSpPr txBox="1"/>
+          <p:nvPr/>
+        </p:nvSpPr>
+        <p:spPr>
+          <a:xfrm>
+            <a:off x="7543800" y="4330700"/>
+            <a:ext cx="977900" cy="330200"/>
+          </a:xfrm>
+          <a:prstGeom prst="rect">
+            <a:avLst/>
+          </a:prstGeom>
+          <a:noFill/>
+          <a:ln>
+            <a:noFill/>
+          </a:ln>
+        </p:spPr>
+        <p:txBody>
+          <a:bodyPr wrap="square" lIns="0" tIns="0" rIns="0" bIns="0"/>
+          <a:lstStyle/>
+          <a:p>
+            <a:r>
+              <a:rPr lang="hr-HR" sz="950">
+                <a:solidFill>
+                  <a:srgbClr val="20282C"/>
+                </a:solidFill>
+                <a:latin typeface="Aptos"/>
+              </a:rPr>
+              <a:t>0.350→0.075</a:t>
+            </a:r>
+            <a:endParaRPr lang="hr-HR" sz="950"/>
+          </a:p>
+          <a:p>
+            <a:r>
+              <a:rPr lang="hr-HR" sz="950">
+                <a:solidFill>
+                  <a:srgbClr val="20282C"/>
+                </a:solidFill>
+                <a:latin typeface="Aptos"/>
+              </a:rPr>
+              <a:t>-78%</a:t>
+            </a:r>
+            <a:endParaRPr lang="hr-HR" sz="950"/>
+          </a:p>
+        </p:txBody>
+      </p:sp>
+      <p:sp>
+        <p:nvSpPr>
+          <p:cNvPr id="46" name="Cell"/>
+          <p:cNvSpPr txBox="1"/>
+          <p:nvPr/>
+        </p:nvSpPr>
+        <p:spPr>
+          <a:xfrm>
+            <a:off x="8623300" y="4330700"/>
+            <a:ext cx="977900" cy="330200"/>
+          </a:xfrm>
+          <a:prstGeom prst="rect">
+            <a:avLst/>
+          </a:prstGeom>
+          <a:noFill/>
+          <a:ln>
+            <a:noFill/>
+          </a:ln>
+        </p:spPr>
+        <p:txBody>
+          <a:bodyPr wrap="square" lIns="0" tIns="0" rIns="0" bIns="0"/>
+          <a:lstStyle/>
+          <a:p>
+            <a:r>
+              <a:rPr lang="hr-HR" sz="950">
+                <a:solidFill>
+                  <a:srgbClr val="20282C"/>
+                </a:solidFill>
+                <a:latin typeface="Aptos"/>
+              </a:rPr>
+              <a:t>0.554→0.160</a:t>
+            </a:r>
+            <a:endParaRPr lang="hr-HR" sz="950"/>
+          </a:p>
+          <a:p>
+            <a:r>
+              <a:rPr lang="hr-HR" sz="950">
+                <a:solidFill>
+                  <a:srgbClr val="20282C"/>
+                </a:solidFill>
+                <a:latin typeface="Aptos"/>
+              </a:rPr>
+              <a:t>-71%</a:t>
+            </a:r>
+            <a:endParaRPr lang="hr-HR" sz="950"/>
+          </a:p>
+        </p:txBody>
+      </p:sp>
+      <p:sp>
+        <p:nvSpPr>
+          <p:cNvPr id="47" name="Cell"/>
+          <p:cNvSpPr txBox="1"/>
+          <p:nvPr/>
+        </p:nvSpPr>
+        <p:spPr>
+          <a:xfrm>
+            <a:off x="5257800" y="4724400"/>
+            <a:ext cx="1104900" cy="330200"/>
+          </a:xfrm>
+          <a:prstGeom prst="rect">
+            <a:avLst/>
+          </a:prstGeom>
+          <a:noFill/>
+          <a:ln>
+            <a:noFill/>
+          </a:ln>
+        </p:spPr>
+        <p:txBody>
+          <a:bodyPr wrap="square" lIns="0" tIns="0" rIns="0" bIns="0"/>
+          <a:lstStyle/>
+          <a:p>
+            <a:r>
+              <a:rPr lang="hr-HR" sz="950" b="1">
                 <a:solidFill>
                   <a:srgbClr val="15171A"/>
                 </a:solidFill>
                 <a:latin typeface="Aptos"/>
               </a:rPr>
-              <a:t>7-layer GRU</a:t>
-            </a:r>
-            <a:endParaRPr lang="hr-HR" sz="1030"/>
-          </a:p>
-        </p:txBody>
-      </p:sp>
-      <p:sp>
-        <p:nvSpPr>
-          <p:cNvPr id="33" name="Cell"/>
-          <p:cNvSpPr txBox="1"/>
-          <p:nvPr/>
-        </p:nvSpPr>
-        <p:spPr>
-          <a:xfrm>
-            <a:off x="2336800" y="4673600"/>
-            <a:ext cx="1485900" cy="304800"/>
-          </a:xfrm>
-          <a:prstGeom prst="rect">
-            <a:avLst/>
-          </a:prstGeom>
-          <a:noFill/>
-          <a:ln>
-            <a:noFill/>
-          </a:ln>
-        </p:spPr>
-        <p:txBody>
-          <a:bodyPr wrap="square" lIns="0" tIns="0" rIns="0" bIns="0"/>
-          <a:lstStyle/>
-          <a:p>
-            <a:r>
-              <a:rPr lang="hr-HR" sz="1030">
-                <a:solidFill>
-                  <a:srgbClr val="20282C"/>
-                </a:solidFill>
-                <a:latin typeface="Aptos"/>
-              </a:rPr>
-              <a:t>beam 40</a:t>
-            </a:r>
-            <a:endParaRPr lang="hr-HR" sz="1030"/>
-          </a:p>
-          <a:p>
-            <a:r>
-              <a:rPr lang="hr-HR" sz="1030">
-                <a:solidFill>
-                  <a:srgbClr val="20282C"/>
-                </a:solidFill>
-                <a:latin typeface="Aptos"/>
-              </a:rPr>
-              <a:t>a=2.5 b=0.3</a:t>
-            </a:r>
-            <a:endParaRPr lang="hr-HR" sz="1030"/>
-          </a:p>
-        </p:txBody>
-      </p:sp>
-      <p:sp>
-        <p:nvSpPr>
-          <p:cNvPr id="34" name="Cell"/>
-          <p:cNvSpPr txBox="1"/>
-          <p:nvPr/>
-        </p:nvSpPr>
-        <p:spPr>
-          <a:xfrm>
-            <a:off x="3924300" y="4673600"/>
-            <a:ext cx="977900" cy="304800"/>
-          </a:xfrm>
-          <a:prstGeom prst="rect">
-            <a:avLst/>
-          </a:prstGeom>
-          <a:noFill/>
-          <a:ln>
-            <a:noFill/>
-          </a:ln>
-        </p:spPr>
-        <p:txBody>
-          <a:bodyPr wrap="square" lIns="0" tIns="0" rIns="0" bIns="0"/>
-          <a:lstStyle/>
-          <a:p>
-            <a:r>
-              <a:rPr lang="hr-HR" sz="1030">
-                <a:solidFill>
-                  <a:srgbClr val="20282C"/>
-                </a:solidFill>
-                <a:latin typeface="Aptos"/>
-              </a:rPr>
-              <a:t>0.094</a:t>
-            </a:r>
-            <a:endParaRPr lang="hr-HR" sz="1030"/>
-          </a:p>
-        </p:txBody>
-      </p:sp>
-      <p:sp>
-        <p:nvSpPr>
-          <p:cNvPr id="35" name="Cell"/>
-          <p:cNvSpPr txBox="1"/>
-          <p:nvPr/>
-        </p:nvSpPr>
-        <p:spPr>
-          <a:xfrm>
-            <a:off x="5003800" y="4673600"/>
-            <a:ext cx="977900" cy="304800"/>
-          </a:xfrm>
-          <a:prstGeom prst="rect">
-            <a:avLst/>
-          </a:prstGeom>
-          <a:noFill/>
-          <a:ln>
-            <a:noFill/>
-          </a:ln>
-        </p:spPr>
-        <p:txBody>
-          <a:bodyPr wrap="square" lIns="0" tIns="0" rIns="0" bIns="0"/>
-          <a:lstStyle/>
-          <a:p>
-            <a:r>
-              <a:rPr lang="hr-HR" sz="1030">
-                <a:solidFill>
-                  <a:srgbClr val="20282C"/>
-                </a:solidFill>
-                <a:latin typeface="Aptos"/>
-              </a:rPr>
-              <a:t>0.127</a:t>
-            </a:r>
-            <a:endParaRPr lang="hr-HR" sz="1030"/>
-          </a:p>
-        </p:txBody>
-      </p:sp>
-      <p:sp>
-        <p:nvSpPr>
-          <p:cNvPr id="36" name="Cell"/>
-          <p:cNvSpPr txBox="1"/>
-          <p:nvPr/>
-        </p:nvSpPr>
-        <p:spPr>
-          <a:xfrm>
-            <a:off x="6083300" y="4673600"/>
-            <a:ext cx="977900" cy="304800"/>
-          </a:xfrm>
-          <a:prstGeom prst="rect">
-            <a:avLst/>
-          </a:prstGeom>
-          <a:noFill/>
-          <a:ln>
-            <a:noFill/>
-          </a:ln>
-        </p:spPr>
-        <p:txBody>
-          <a:bodyPr wrap="square" lIns="0" tIns="0" rIns="0" bIns="0"/>
-          <a:lstStyle/>
-          <a:p>
-            <a:r>
-              <a:rPr lang="hr-HR" sz="1030">
-                <a:solidFill>
-                  <a:srgbClr val="20282C"/>
-                </a:solidFill>
-                <a:latin typeface="Aptos"/>
-              </a:rPr>
-              <a:t>0.083</a:t>
-            </a:r>
-            <a:endParaRPr lang="hr-HR" sz="1030"/>
-          </a:p>
-        </p:txBody>
-      </p:sp>
-      <p:sp>
-        <p:nvSpPr>
-          <p:cNvPr id="37" name="Cell"/>
-          <p:cNvSpPr txBox="1"/>
-          <p:nvPr/>
-        </p:nvSpPr>
-        <p:spPr>
-          <a:xfrm>
-            <a:off x="7162800" y="4673600"/>
-            <a:ext cx="977900" cy="304800"/>
-          </a:xfrm>
-          <a:prstGeom prst="rect">
-            <a:avLst/>
-          </a:prstGeom>
-          <a:noFill/>
-          <a:ln>
-            <a:noFill/>
-          </a:ln>
-        </p:spPr>
-        <p:txBody>
-          <a:bodyPr wrap="square" lIns="0" tIns="0" rIns="0" bIns="0"/>
-          <a:lstStyle/>
-          <a:p>
-            <a:r>
-              <a:rPr lang="hr-HR" sz="1030">
-                <a:solidFill>
-                  <a:srgbClr val="20282C"/>
-                </a:solidFill>
-                <a:latin typeface="Aptos"/>
-              </a:rPr>
-              <a:t>0.171</a:t>
-            </a:r>
-            <a:endParaRPr lang="hr-HR" sz="1030"/>
-          </a:p>
-        </p:txBody>
-      </p:sp>
-      <p:sp>
-        <p:nvSpPr>
-          <p:cNvPr id="38" name="Cell"/>
-          <p:cNvSpPr txBox="1"/>
-          <p:nvPr/>
-        </p:nvSpPr>
-        <p:spPr>
-          <a:xfrm>
-            <a:off x="495300" y="5041900"/>
-            <a:ext cx="1739900" cy="304800"/>
-          </a:xfrm>
-          <a:prstGeom prst="rect">
-            <a:avLst/>
-          </a:prstGeom>
-          <a:noFill/>
-          <a:ln>
-            <a:noFill/>
-          </a:ln>
-        </p:spPr>
-        <p:txBody>
-          <a:bodyPr wrap="square" lIns="0" tIns="0" rIns="0" bIns="0"/>
-          <a:lstStyle/>
-          <a:p>
-            <a:r>
-              <a:rPr lang="hr-HR" sz="1030" b="1">
+              <a:t>7GRU</a:t>
+            </a:r>
+            <a:endParaRPr lang="hr-HR" sz="950"/>
+          </a:p>
+        </p:txBody>
+      </p:sp>
+      <p:sp>
+        <p:nvSpPr>
+          <p:cNvPr id="48" name="Cell"/>
+          <p:cNvSpPr txBox="1"/>
+          <p:nvPr/>
+        </p:nvSpPr>
+        <p:spPr>
+          <a:xfrm>
+            <a:off x="6464300" y="4724400"/>
+            <a:ext cx="977900" cy="330200"/>
+          </a:xfrm>
+          <a:prstGeom prst="rect">
+            <a:avLst/>
+          </a:prstGeom>
+          <a:noFill/>
+          <a:ln>
+            <a:noFill/>
+          </a:ln>
+        </p:spPr>
+        <p:txBody>
+          <a:bodyPr wrap="square" lIns="0" tIns="0" rIns="0" bIns="0"/>
+          <a:lstStyle/>
+          <a:p>
+            <a:r>
+              <a:rPr lang="hr-HR" sz="950">
+                <a:solidFill>
+                  <a:srgbClr val="20282C"/>
+                </a:solidFill>
+                <a:latin typeface="Aptos"/>
+              </a:rPr>
+              <a:t>0.429→0.127</a:t>
+            </a:r>
+            <a:endParaRPr lang="hr-HR" sz="950"/>
+          </a:p>
+          <a:p>
+            <a:r>
+              <a:rPr lang="hr-HR" sz="950">
+                <a:solidFill>
+                  <a:srgbClr val="20282C"/>
+                </a:solidFill>
+                <a:latin typeface="Aptos"/>
+              </a:rPr>
+              <a:t>-70%</a:t>
+            </a:r>
+            <a:endParaRPr lang="hr-HR" sz="950"/>
+          </a:p>
+        </p:txBody>
+      </p:sp>
+      <p:sp>
+        <p:nvSpPr>
+          <p:cNvPr id="49" name="Cell"/>
+          <p:cNvSpPr txBox="1"/>
+          <p:nvPr/>
+        </p:nvSpPr>
+        <p:spPr>
+          <a:xfrm>
+            <a:off x="7543800" y="4724400"/>
+            <a:ext cx="977900" cy="330200"/>
+          </a:xfrm>
+          <a:prstGeom prst="rect">
+            <a:avLst/>
+          </a:prstGeom>
+          <a:noFill/>
+          <a:ln>
+            <a:noFill/>
+          </a:ln>
+        </p:spPr>
+        <p:txBody>
+          <a:bodyPr wrap="square" lIns="0" tIns="0" rIns="0" bIns="0"/>
+          <a:lstStyle/>
+          <a:p>
+            <a:r>
+              <a:rPr lang="hr-HR" sz="950">
+                <a:solidFill>
+                  <a:srgbClr val="20282C"/>
+                </a:solidFill>
+                <a:latin typeface="Aptos"/>
+              </a:rPr>
+              <a:t>0.324→0.083</a:t>
+            </a:r>
+            <a:endParaRPr lang="hr-HR" sz="950"/>
+          </a:p>
+          <a:p>
+            <a:r>
+              <a:rPr lang="hr-HR" sz="950">
+                <a:solidFill>
+                  <a:srgbClr val="20282C"/>
+                </a:solidFill>
+                <a:latin typeface="Aptos"/>
+              </a:rPr>
+              <a:t>-75%</a:t>
+            </a:r>
+            <a:endParaRPr lang="hr-HR" sz="950"/>
+          </a:p>
+        </p:txBody>
+      </p:sp>
+      <p:sp>
+        <p:nvSpPr>
+          <p:cNvPr id="50" name="Cell"/>
+          <p:cNvSpPr txBox="1"/>
+          <p:nvPr/>
+        </p:nvSpPr>
+        <p:spPr>
+          <a:xfrm>
+            <a:off x="8623300" y="4724400"/>
+            <a:ext cx="977900" cy="330200"/>
+          </a:xfrm>
+          <a:prstGeom prst="rect">
+            <a:avLst/>
+          </a:prstGeom>
+          <a:noFill/>
+          <a:ln>
+            <a:noFill/>
+          </a:ln>
+        </p:spPr>
+        <p:txBody>
+          <a:bodyPr wrap="square" lIns="0" tIns="0" rIns="0" bIns="0"/>
+          <a:lstStyle/>
+          <a:p>
+            <a:r>
+              <a:rPr lang="hr-HR" sz="950">
+                <a:solidFill>
+                  <a:srgbClr val="20282C"/>
+                </a:solidFill>
+                <a:latin typeface="Aptos"/>
+              </a:rPr>
+              <a:t>0.532→0.171</a:t>
+            </a:r>
+            <a:endParaRPr lang="hr-HR" sz="950"/>
+          </a:p>
+          <a:p>
+            <a:r>
+              <a:rPr lang="hr-HR" sz="950">
+                <a:solidFill>
+                  <a:srgbClr val="20282C"/>
+                </a:solidFill>
+                <a:latin typeface="Aptos"/>
+              </a:rPr>
+              <a:t>-68%</a:t>
+            </a:r>
+            <a:endParaRPr lang="hr-HR" sz="950"/>
+          </a:p>
+        </p:txBody>
+      </p:sp>
+      <p:sp>
+        <p:nvSpPr>
+          <p:cNvPr id="51" name="Cell"/>
+          <p:cNvSpPr txBox="1"/>
+          <p:nvPr/>
+        </p:nvSpPr>
+        <p:spPr>
+          <a:xfrm>
+            <a:off x="5257800" y="5118100"/>
+            <a:ext cx="1104900" cy="330200"/>
+          </a:xfrm>
+          <a:prstGeom prst="rect">
+            <a:avLst/>
+          </a:prstGeom>
+          <a:noFill/>
+          <a:ln>
+            <a:noFill/>
+          </a:ln>
+        </p:spPr>
+        <p:txBody>
+          <a:bodyPr wrap="square" lIns="0" tIns="0" rIns="0" bIns="0"/>
+          <a:lstStyle/>
+          <a:p>
+            <a:r>
+              <a:rPr lang="hr-HR" sz="950" b="1">
                 <a:solidFill>
                   <a:srgbClr val="15171A"/>
                 </a:solidFill>
                 <a:latin typeface="Aptos"/>
               </a:rPr>
-              <a:t>7-layer LSTM</a:t>
-            </a:r>
-            <a:endParaRPr lang="hr-HR" sz="1030"/>
-          </a:p>
-        </p:txBody>
-      </p:sp>
-      <p:sp>
-        <p:nvSpPr>
-          <p:cNvPr id="39" name="Cell"/>
-          <p:cNvSpPr txBox="1"/>
-          <p:nvPr/>
-        </p:nvSpPr>
-        <p:spPr>
-          <a:xfrm>
-            <a:off x="2336800" y="5041900"/>
-            <a:ext cx="1485900" cy="304800"/>
-          </a:xfrm>
-          <a:prstGeom prst="rect">
-            <a:avLst/>
-          </a:prstGeom>
-          <a:noFill/>
-          <a:ln>
-            <a:noFill/>
-          </a:ln>
-        </p:spPr>
-        <p:txBody>
-          <a:bodyPr wrap="square" lIns="0" tIns="0" rIns="0" bIns="0"/>
-          <a:lstStyle/>
-          <a:p>
-            <a:r>
-              <a:rPr lang="hr-HR" sz="1030">
-                <a:solidFill>
-                  <a:srgbClr val="20282C"/>
-                </a:solidFill>
-                <a:latin typeface="Aptos"/>
-              </a:rPr>
-              <a:t>beam 40</a:t>
-            </a:r>
-            <a:endParaRPr lang="hr-HR" sz="1030"/>
-          </a:p>
-          <a:p>
-            <a:r>
-              <a:rPr lang="hr-HR" sz="1030">
-                <a:solidFill>
-                  <a:srgbClr val="20282C"/>
-                </a:solidFill>
-                <a:latin typeface="Aptos"/>
-              </a:rPr>
-              <a:t>a=2.5 b=0.3</a:t>
-            </a:r>
-            <a:endParaRPr lang="hr-HR" sz="1030"/>
-          </a:p>
-        </p:txBody>
-      </p:sp>
-      <p:sp>
-        <p:nvSpPr>
-          <p:cNvPr id="40" name="Cell"/>
-          <p:cNvSpPr txBox="1"/>
-          <p:nvPr/>
-        </p:nvSpPr>
-        <p:spPr>
-          <a:xfrm>
-            <a:off x="3924300" y="5041900"/>
-            <a:ext cx="977900" cy="304800"/>
-          </a:xfrm>
-          <a:prstGeom prst="rect">
-            <a:avLst/>
-          </a:prstGeom>
-          <a:noFill/>
-          <a:ln>
-            <a:noFill/>
-          </a:ln>
-        </p:spPr>
-        <p:txBody>
-          <a:bodyPr wrap="square" lIns="0" tIns="0" rIns="0" bIns="0"/>
-          <a:lstStyle/>
-          <a:p>
-            <a:r>
-              <a:rPr lang="hr-HR" sz="1030">
-                <a:solidFill>
-                  <a:srgbClr val="20282C"/>
-                </a:solidFill>
-                <a:latin typeface="Aptos"/>
-              </a:rPr>
-              <a:t>0.123</a:t>
-            </a:r>
-            <a:endParaRPr lang="hr-HR" sz="1030"/>
-          </a:p>
-        </p:txBody>
-      </p:sp>
-      <p:sp>
-        <p:nvSpPr>
-          <p:cNvPr id="41" name="Cell"/>
-          <p:cNvSpPr txBox="1"/>
-          <p:nvPr/>
-        </p:nvSpPr>
-        <p:spPr>
-          <a:xfrm>
-            <a:off x="5003800" y="5041900"/>
-            <a:ext cx="977900" cy="304800"/>
-          </a:xfrm>
-          <a:prstGeom prst="rect">
-            <a:avLst/>
-          </a:prstGeom>
-          <a:noFill/>
-          <a:ln>
-            <a:noFill/>
-          </a:ln>
-        </p:spPr>
-        <p:txBody>
-          <a:bodyPr wrap="square" lIns="0" tIns="0" rIns="0" bIns="0"/>
-          <a:lstStyle/>
-          <a:p>
-            <a:r>
-              <a:rPr lang="hr-HR" sz="1030">
-                <a:solidFill>
-                  <a:srgbClr val="20282C"/>
-                </a:solidFill>
-                <a:latin typeface="Aptos"/>
-              </a:rPr>
-              <a:t>0.151</a:t>
-            </a:r>
-            <a:endParaRPr lang="hr-HR" sz="1030"/>
-          </a:p>
-        </p:txBody>
-      </p:sp>
-      <p:sp>
-        <p:nvSpPr>
-          <p:cNvPr id="42" name="Cell"/>
-          <p:cNvSpPr txBox="1"/>
-          <p:nvPr/>
-        </p:nvSpPr>
-        <p:spPr>
-          <a:xfrm>
-            <a:off x="6083300" y="5041900"/>
-            <a:ext cx="977900" cy="304800"/>
-          </a:xfrm>
-          <a:prstGeom prst="rect">
-            <a:avLst/>
-          </a:prstGeom>
-          <a:noFill/>
-          <a:ln>
-            <a:noFill/>
-          </a:ln>
-        </p:spPr>
-        <p:txBody>
-          <a:bodyPr wrap="square" lIns="0" tIns="0" rIns="0" bIns="0"/>
-          <a:lstStyle/>
-          <a:p>
-            <a:r>
-              <a:rPr lang="hr-HR" sz="1030">
-                <a:solidFill>
-                  <a:srgbClr val="20282C"/>
-                </a:solidFill>
-                <a:latin typeface="Aptos"/>
-              </a:rPr>
-              <a:t>0.095</a:t>
-            </a:r>
-            <a:endParaRPr lang="hr-HR" sz="1030"/>
-          </a:p>
-        </p:txBody>
-      </p:sp>
-      <p:sp>
-        <p:nvSpPr>
-          <p:cNvPr id="43" name="Cell"/>
-          <p:cNvSpPr txBox="1"/>
-          <p:nvPr/>
-        </p:nvSpPr>
-        <p:spPr>
-          <a:xfrm>
-            <a:off x="7162800" y="5041900"/>
-            <a:ext cx="977900" cy="304800"/>
-          </a:xfrm>
-          <a:prstGeom prst="rect">
-            <a:avLst/>
-          </a:prstGeom>
-          <a:noFill/>
-          <a:ln>
-            <a:noFill/>
-          </a:ln>
-        </p:spPr>
-        <p:txBody>
-          <a:bodyPr wrap="square" lIns="0" tIns="0" rIns="0" bIns="0"/>
-          <a:lstStyle/>
-          <a:p>
-            <a:r>
-              <a:rPr lang="hr-HR" sz="1030">
-                <a:solidFill>
-                  <a:srgbClr val="20282C"/>
-                </a:solidFill>
-                <a:latin typeface="Aptos"/>
-              </a:rPr>
-              <a:t>0.206</a:t>
-            </a:r>
-            <a:endParaRPr lang="hr-HR" sz="1030"/>
-          </a:p>
-        </p:txBody>
-      </p:sp>
-      <p:sp>
-        <p:nvSpPr>
-          <p:cNvPr id="44" name="Rectangle"/>
+              <a:t>7LSTM</a:t>
+            </a:r>
+            <a:endParaRPr lang="hr-HR" sz="950"/>
+          </a:p>
+        </p:txBody>
+      </p:sp>
+      <p:sp>
+        <p:nvSpPr>
+          <p:cNvPr id="52" name="Cell"/>
+          <p:cNvSpPr txBox="1"/>
+          <p:nvPr/>
+        </p:nvSpPr>
+        <p:spPr>
+          <a:xfrm>
+            <a:off x="6464300" y="5118100"/>
+            <a:ext cx="977900" cy="330200"/>
+          </a:xfrm>
+          <a:prstGeom prst="rect">
+            <a:avLst/>
+          </a:prstGeom>
+          <a:noFill/>
+          <a:ln>
+            <a:noFill/>
+          </a:ln>
+        </p:spPr>
+        <p:txBody>
+          <a:bodyPr wrap="square" lIns="0" tIns="0" rIns="0" bIns="0"/>
+          <a:lstStyle/>
+          <a:p>
+            <a:r>
+              <a:rPr lang="hr-HR" sz="950">
+                <a:solidFill>
+                  <a:srgbClr val="20282C"/>
+                </a:solidFill>
+                <a:latin typeface="Aptos"/>
+              </a:rPr>
+              <a:t>0.535→0.151</a:t>
+            </a:r>
+            <a:endParaRPr lang="hr-HR" sz="950"/>
+          </a:p>
+          <a:p>
+            <a:r>
+              <a:rPr lang="hr-HR" sz="950">
+                <a:solidFill>
+                  <a:srgbClr val="20282C"/>
+                </a:solidFill>
+                <a:latin typeface="Aptos"/>
+              </a:rPr>
+              <a:t>-72%</a:t>
+            </a:r>
+            <a:endParaRPr lang="hr-HR" sz="950"/>
+          </a:p>
+        </p:txBody>
+      </p:sp>
+      <p:sp>
+        <p:nvSpPr>
+          <p:cNvPr id="53" name="Cell"/>
+          <p:cNvSpPr txBox="1"/>
+          <p:nvPr/>
+        </p:nvSpPr>
+        <p:spPr>
+          <a:xfrm>
+            <a:off x="7543800" y="5118100"/>
+            <a:ext cx="977900" cy="330200"/>
+          </a:xfrm>
+          <a:prstGeom prst="rect">
+            <a:avLst/>
+          </a:prstGeom>
+          <a:noFill/>
+          <a:ln>
+            <a:noFill/>
+          </a:ln>
+        </p:spPr>
+        <p:txBody>
+          <a:bodyPr wrap="square" lIns="0" tIns="0" rIns="0" bIns="0"/>
+          <a:lstStyle/>
+          <a:p>
+            <a:r>
+              <a:rPr lang="hr-HR" sz="950">
+                <a:solidFill>
+                  <a:srgbClr val="20282C"/>
+                </a:solidFill>
+                <a:latin typeface="Aptos"/>
+              </a:rPr>
+              <a:t>0.440→0.095</a:t>
+            </a:r>
+            <a:endParaRPr lang="hr-HR" sz="950"/>
+          </a:p>
+          <a:p>
+            <a:r>
+              <a:rPr lang="hr-HR" sz="950">
+                <a:solidFill>
+                  <a:srgbClr val="20282C"/>
+                </a:solidFill>
+                <a:latin typeface="Aptos"/>
+              </a:rPr>
+              <a:t>-78%</a:t>
+            </a:r>
+            <a:endParaRPr lang="hr-HR" sz="950"/>
+          </a:p>
+        </p:txBody>
+      </p:sp>
+      <p:sp>
+        <p:nvSpPr>
+          <p:cNvPr id="54" name="Cell"/>
+          <p:cNvSpPr txBox="1"/>
+          <p:nvPr/>
+        </p:nvSpPr>
+        <p:spPr>
+          <a:xfrm>
+            <a:off x="8623300" y="5118100"/>
+            <a:ext cx="977900" cy="330200"/>
+          </a:xfrm>
+          <a:prstGeom prst="rect">
+            <a:avLst/>
+          </a:prstGeom>
+          <a:noFill/>
+          <a:ln>
+            <a:noFill/>
+          </a:ln>
+        </p:spPr>
+        <p:txBody>
+          <a:bodyPr wrap="square" lIns="0" tIns="0" rIns="0" bIns="0"/>
+          <a:lstStyle/>
+          <a:p>
+            <a:r>
+              <a:rPr lang="hr-HR" sz="950">
+                <a:solidFill>
+                  <a:srgbClr val="20282C"/>
+                </a:solidFill>
+                <a:latin typeface="Aptos"/>
+              </a:rPr>
+              <a:t>0.629→0.206</a:t>
+            </a:r>
+            <a:endParaRPr lang="hr-HR" sz="950"/>
+          </a:p>
+          <a:p>
+            <a:r>
+              <a:rPr lang="hr-HR" sz="950">
+                <a:solidFill>
+                  <a:srgbClr val="20282C"/>
+                </a:solidFill>
+                <a:latin typeface="Aptos"/>
+              </a:rPr>
+              <a:t>-67%</a:t>
+            </a:r>
+            <a:endParaRPr lang="hr-HR" sz="950"/>
+          </a:p>
+        </p:txBody>
+      </p:sp>
+      <p:sp>
+        <p:nvSpPr>
+          <p:cNvPr id="55" name="Rectangle"/>
           <p:cNvSpPr/>
           <p:nvPr/>
         </p:nvSpPr>
         <p:spPr>
           <a:xfrm>
-            <a:off x="444500" y="5359400"/>
-            <a:ext cx="7747000" cy="368300"/>
+            <a:off x="444500" y="5651500"/>
+            <a:ext cx="9207500" cy="368300"/>
           </a:xfrm>
           <a:prstGeom prst="rect">
             <a:avLst/>
@@ -7975,14 +7716,14 @@
       </p:sp>
       <p:sp>
         <p:nvSpPr>
-          <p:cNvPr id="45" name="Text"/>
-          <p:cNvSpPr txBox="1"/>
-          <p:nvPr/>
-        </p:nvSpPr>
-        <p:spPr>
-          <a:xfrm>
-            <a:off x="596900" y="5448300"/>
-            <a:ext cx="7429500" cy="152400"/>
+          <p:cNvPr id="56" name="Text"/>
+          <p:cNvSpPr txBox="1"/>
+          <p:nvPr/>
+        </p:nvSpPr>
+        <p:spPr>
+          <a:xfrm>
+            <a:off x="596900" y="5740400"/>
+            <a:ext cx="8826500" cy="152400"/>
           </a:xfrm>
           <a:prstGeom prst="rect">
             <a:avLst/>
@@ -8003,45 +7744,9 @@
                 </a:solidFill>
                 <a:latin typeface="Aptos"/>
               </a:rPr>
-              <a:t>U sva tri modela isti decoder pobjeđuje na validation setu: beam 40, alpha 2.5, beta 0.3.</a:t>
+              <a:t>Sve KenLM vrijednosti koriste najbolji validation-selected decoder: beam 40, alpha 2.5, beta 0.3.</a:t>
             </a:r>
             <a:endParaRPr lang="hr-HR" sz="1220"/>
-          </a:p>
-        </p:txBody>
-      </p:sp>
-      <p:sp>
-        <p:nvSpPr>
-          <p:cNvPr id="46" name="Footer"/>
-          <p:cNvSpPr txBox="1"/>
-          <p:nvPr/>
-        </p:nvSpPr>
-        <p:spPr>
-          <a:xfrm>
-            <a:off x="444500" y="6591300"/>
-            <a:ext cx="9207500" cy="152400"/>
-          </a:xfrm>
-          <a:prstGeom prst="rect">
-            <a:avLst/>
-          </a:prstGeom>
-          <a:noFill/>
-          <a:ln>
-            <a:noFill/>
-          </a:ln>
-        </p:spPr>
-        <p:txBody>
-          <a:bodyPr wrap="square" lIns="0" tIns="0" rIns="0" bIns="0"/>
-          <a:lstStyle/>
-          <a:p>
-            <a:r>
-              <a:rPr lang="hr-HR" sz="850">
-                <a:solidFill>
-                  <a:srgbClr val="6F6A5B"/>
-                </a:solidFill>
-                <a:latin typeface="Aptos"/>
-              </a:rPr>
-              <a:t>Machine-readable sweep: results/kenlm_sweep_all_models/metrics.json.</a:t>
-            </a:r>
-            <a:endParaRPr lang="hr-HR" sz="850"/>
           </a:p>
         </p:txBody>
       </p:sp>
@@ -9910,39 +9615,246 @@
           </a:p>
         </p:txBody>
       </p:sp>
-      <p:sp>
-        <p:nvSpPr>
-          <p:cNvPr id="55" name="Footer"/>
-          <p:cNvSpPr txBox="1"/>
-          <p:nvPr/>
-        </p:nvSpPr>
-        <p:spPr>
-          <a:xfrm>
-            <a:off x="444500" y="6591300"/>
-            <a:ext cx="9207500" cy="152400"/>
-          </a:xfrm>
-          <a:prstGeom prst="rect">
-            <a:avLst/>
-          </a:prstGeom>
-          <a:noFill/>
-          <a:ln>
-            <a:noFill/>
-          </a:ln>
-        </p:spPr>
-        <p:txBody>
-          <a:bodyPr wrap="square" lIns="0" tIns="0" rIns="0" bIns="0"/>
-          <a:lstStyle/>
-          <a:p>
-            <a:r>
-              <a:rPr lang="hr-HR" sz="850">
-                <a:solidFill>
-                  <a:srgbClr val="6F6A5B"/>
-                </a:solidFill>
-                <a:latin typeface="Aptos"/>
-              </a:rPr>
-              <a:t>Tracked results: results/kenlm_sweep_all_models/metrics.json and per-run summary.md files.</a:t>
-            </a:r>
-            <a:endParaRPr lang="hr-HR" sz="850"/>
+    </p:spTree>
+  </p:cSld>
+  <p:clrMapOvr>
+    <a:masterClrMapping/>
+  </p:clrMapOvr>
+</p:sld>
+</file>
+
+<file path=ppt/slides/slide8.xml><?xml version="1.0" encoding="utf-8"?>
+<p:sld xmlns:a="http://schemas.openxmlformats.org/drawingml/2006/main" xmlns:r="http://schemas.openxmlformats.org/officeDocument/2006/relationships" xmlns:p="http://schemas.openxmlformats.org/presentationml/2006/main">
+  <p:cSld>
+    <p:bg>
+      <p:bgPr>
+        <a:solidFill>
+          <a:srgbClr val="F8F3E8"/>
+        </a:solidFill>
+        <a:effectLst/>
+      </p:bgPr>
+    </p:bg>
+    <p:spTree>
+      <p:nvGrpSpPr>
+        <p:cNvPr id="1" name=""/>
+        <p:cNvGrpSpPr/>
+        <p:nvPr/>
+      </p:nvGrpSpPr>
+      <p:grpSpPr>
+        <a:xfrm>
+          <a:off x="0" y="0"/>
+          <a:ext cx="0" cy="0"/>
+          <a:chOff x="0" y="0"/>
+          <a:chExt cx="0" cy="0"/>
+        </a:xfrm>
+      </p:grpSpPr>
+      <p:sp>
+        <p:nvSpPr>
+          <p:cNvPr id="2" name="Rectangle"/>
+          <p:cNvSpPr/>
+          <p:nvPr/>
+        </p:nvSpPr>
+        <p:spPr>
+          <a:xfrm>
+            <a:off x="0" y="0"/>
+            <a:ext cx="3206750" cy="6858000"/>
+          </a:xfrm>
+          <a:prstGeom prst="rect">
+            <a:avLst/>
+          </a:prstGeom>
+          <a:solidFill>
+            <a:srgbClr val="15171A"/>
+          </a:solidFill>
+          <a:ln>
+            <a:noFill/>
+          </a:ln>
+        </p:spPr>
+      </p:sp>
+      <p:sp>
+        <p:nvSpPr>
+          <p:cNvPr id="3" name="Rectangle"/>
+          <p:cNvSpPr/>
+          <p:nvPr/>
+        </p:nvSpPr>
+        <p:spPr>
+          <a:xfrm>
+            <a:off x="3206750" y="0"/>
+            <a:ext cx="177800" cy="6858000"/>
+          </a:xfrm>
+          <a:prstGeom prst="rect">
+            <a:avLst/>
+          </a:prstGeom>
+          <a:solidFill>
+            <a:srgbClr val="E24A2A"/>
+          </a:solidFill>
+          <a:ln>
+            <a:noFill/>
+          </a:ln>
+        </p:spPr>
+      </p:sp>
+      <p:sp>
+        <p:nvSpPr>
+          <p:cNvPr id="4" name="Text"/>
+          <p:cNvSpPr txBox="1"/>
+          <p:nvPr/>
+        </p:nvSpPr>
+        <p:spPr>
+          <a:xfrm>
+            <a:off x="419100" y="520700"/>
+            <a:ext cx="2032000" cy="241300"/>
+          </a:xfrm>
+          <a:prstGeom prst="rect">
+            <a:avLst/>
+          </a:prstGeom>
+          <a:noFill/>
+          <a:ln>
+            <a:noFill/>
+          </a:ln>
+        </p:spPr>
+        <p:txBody>
+          <a:bodyPr wrap="square" lIns="0" tIns="0" rIns="0" bIns="0"/>
+          <a:lstStyle/>
+          <a:p>
+            <a:r>
+              <a:rPr lang="hr-HR" sz="2200" b="1">
+                <a:solidFill>
+                  <a:srgbClr val="F0B429"/>
+                </a:solidFill>
+                <a:latin typeface="Aptos"/>
+              </a:rPr>
+              <a:t>ROGJ 2025/26</a:t>
+            </a:r>
+            <a:endParaRPr lang="hr-HR" sz="2200"/>
+          </a:p>
+        </p:txBody>
+      </p:sp>
+      <p:sp>
+        <p:nvSpPr>
+          <p:cNvPr id="5" name="Text"/>
+          <p:cNvSpPr txBox="1"/>
+          <p:nvPr/>
+        </p:nvSpPr>
+        <p:spPr>
+          <a:xfrm>
+            <a:off x="419100" y="952500"/>
+            <a:ext cx="2095500" cy="368300"/>
+          </a:xfrm>
+          <a:prstGeom prst="rect">
+            <a:avLst/>
+          </a:prstGeom>
+          <a:noFill/>
+          <a:ln>
+            <a:noFill/>
+          </a:ln>
+        </p:spPr>
+        <p:txBody>
+          <a:bodyPr wrap="square" lIns="0" tIns="0" rIns="0" bIns="0"/>
+          <a:lstStyle/>
+          <a:p>
+            <a:r>
+              <a:rPr lang="hr-HR" sz="3800" b="1">
+                <a:solidFill>
+                  <a:srgbClr val="F8F3E8"/>
+                </a:solidFill>
+                <a:latin typeface="Aptos"/>
+              </a:rPr>
+              <a:t>Tema 12</a:t>
+            </a:r>
+            <a:endParaRPr lang="hr-HR" sz="3800"/>
+          </a:p>
+        </p:txBody>
+      </p:sp>
+      <p:sp>
+        <p:nvSpPr>
+          <p:cNvPr id="6" name="Text"/>
+          <p:cNvSpPr txBox="1"/>
+          <p:nvPr/>
+        </p:nvSpPr>
+        <p:spPr>
+          <a:xfrm>
+            <a:off x="3873500" y="2095500"/>
+            <a:ext cx="5715000" cy="571500"/>
+          </a:xfrm>
+          <a:prstGeom prst="rect">
+            <a:avLst/>
+          </a:prstGeom>
+          <a:noFill/>
+          <a:ln>
+            <a:noFill/>
+          </a:ln>
+        </p:spPr>
+        <p:txBody>
+          <a:bodyPr wrap="square" lIns="0" tIns="0" rIns="0" bIns="0"/>
+          <a:lstStyle/>
+          <a:p>
+            <a:r>
+              <a:rPr lang="hr-HR" sz="5800" b="1">
+                <a:solidFill>
+                  <a:srgbClr val="15171A"/>
+                </a:solidFill>
+                <a:latin typeface="Aptos"/>
+              </a:rPr>
+              <a:t>THE END</a:t>
+            </a:r>
+            <a:endParaRPr lang="hr-HR" sz="5800"/>
+          </a:p>
+        </p:txBody>
+      </p:sp>
+      <p:sp>
+        <p:nvSpPr>
+          <p:cNvPr id="7" name="Rule"/>
+          <p:cNvSpPr/>
+          <p:nvPr/>
+        </p:nvSpPr>
+        <p:spPr>
+          <a:xfrm>
+            <a:off x="3911600" y="2832100"/>
+            <a:ext cx="2667000" cy="57150"/>
+          </a:xfrm>
+          <a:prstGeom prst="rect">
+            <a:avLst/>
+          </a:prstGeom>
+          <a:solidFill>
+            <a:srgbClr val="E24A2A"/>
+          </a:solidFill>
+          <a:ln>
+            <a:noFill/>
+          </a:ln>
+        </p:spPr>
+      </p:sp>
+      <p:sp>
+        <p:nvSpPr>
+          <p:cNvPr id="8" name="Text"/>
+          <p:cNvSpPr txBox="1"/>
+          <p:nvPr/>
+        </p:nvSpPr>
+        <p:spPr>
+          <a:xfrm>
+            <a:off x="3911600" y="3302000"/>
+            <a:ext cx="5715000" cy="330200"/>
+          </a:xfrm>
+          <a:prstGeom prst="rect">
+            <a:avLst/>
+          </a:prstGeom>
+          <a:noFill/>
+          <a:ln>
+            <a:noFill/>
+          </a:ln>
+        </p:spPr>
+        <p:txBody>
+          <a:bodyPr wrap="square" lIns="0" tIns="0" rIns="0" bIns="0"/>
+          <a:lstStyle/>
+          <a:p>
+            <a:r>
+              <a:rPr lang="hr-HR" sz="2500">
+                <a:solidFill>
+                  <a:srgbClr val="20282C"/>
+                </a:solidFill>
+                <a:latin typeface="Aptos"/>
+              </a:rPr>
+              <a:t>Hvala na pažnji.</a:t>
+            </a:r>
+            <a:endParaRPr lang="hr-HR" sz="2500"/>
           </a:p>
         </p:txBody>
       </p:sp>

--- a/presentation/ROGJ_Deepspeech2_topic_presentation.pptx
+++ b/presentation/ROGJ_Deepspeech2_topic_presentation.pptx
@@ -13,6 +13,7 @@
     <p:sldId id="261" r:id="rId7"/>
     <p:sldId id="262" r:id="rId8"/>
     <p:sldId id="263" r:id="rId9"/>
+    <p:sldId id="264" r:id="rId10"/>
   </p:sldIdLst>
   <p:sldSz cx="12192000" cy="6858000" type="wide"/>
   <p:notesSz cx="6858000" cy="9144000"/>
@@ -9624,6 +9625,2393 @@
 </file>
 
 <file path=ppt/slides/slide8.xml><?xml version="1.0" encoding="utf-8"?>
+<p:sld xmlns:a="http://schemas.openxmlformats.org/drawingml/2006/main" xmlns:r="http://schemas.openxmlformats.org/officeDocument/2006/relationships" xmlns:p="http://schemas.openxmlformats.org/presentationml/2006/main">
+  <p:cSld>
+    <p:bg>
+      <p:bgPr>
+        <a:solidFill>
+          <a:srgbClr val="F8F3E8"/>
+        </a:solidFill>
+        <a:effectLst/>
+      </p:bgPr>
+    </p:bg>
+    <p:spTree>
+      <p:nvGrpSpPr>
+        <p:cNvPr id="1" name=""/>
+        <p:cNvGrpSpPr/>
+        <p:nvPr/>
+      </p:nvGrpSpPr>
+      <p:grpSpPr>
+        <a:xfrm>
+          <a:off x="0" y="0"/>
+          <a:ext cx="0" cy="0"/>
+          <a:chOff x="0" y="0"/>
+          <a:chExt cx="0" cy="0"/>
+        </a:xfrm>
+      </p:grpSpPr>
+      <p:sp>
+        <p:nvSpPr>
+          <p:cNvPr id="2" name="Kicker"/>
+          <p:cNvSpPr txBox="1"/>
+          <p:nvPr/>
+        </p:nvSpPr>
+        <p:spPr>
+          <a:xfrm>
+            <a:off x="444500" y="292100"/>
+            <a:ext cx="3683000" cy="203200"/>
+          </a:xfrm>
+          <a:prstGeom prst="rect">
+            <a:avLst/>
+          </a:prstGeom>
+          <a:noFill/>
+          <a:ln>
+            <a:noFill/>
+          </a:ln>
+        </p:spPr>
+        <p:txBody>
+          <a:bodyPr wrap="square" lIns="0" tIns="0" rIns="0" bIns="0"/>
+          <a:lstStyle/>
+          <a:p>
+            <a:r>
+              <a:rPr lang="hr-HR" sz="1500" b="1">
+                <a:solidFill>
+                  <a:srgbClr val="E24A2A"/>
+                </a:solidFill>
+                <a:latin typeface="Aptos"/>
+              </a:rPr>
+              <a:t>08 · ČISTA HF REPRODUKCIJA</a:t>
+            </a:r>
+            <a:endParaRPr lang="hr-HR" sz="1500"/>
+          </a:p>
+        </p:txBody>
+      </p:sp>
+      <p:sp>
+        <p:nvSpPr>
+          <p:cNvPr id="3" name="Title"/>
+          <p:cNvSpPr txBox="1"/>
+          <p:nvPr/>
+        </p:nvSpPr>
+        <p:spPr>
+          <a:xfrm>
+            <a:off x="444500" y="520700"/>
+            <a:ext cx="7937500" cy="546100"/>
+          </a:xfrm>
+          <a:prstGeom prst="rect">
+            <a:avLst/>
+          </a:prstGeom>
+          <a:noFill/>
+          <a:ln>
+            <a:noFill/>
+          </a:ln>
+        </p:spPr>
+        <p:txBody>
+          <a:bodyPr wrap="square" lIns="0" tIns="0" rIns="0" bIns="0"/>
+          <a:lstStyle/>
+          <a:p>
+            <a:r>
+              <a:rPr lang="hr-HR" sz="2350" b="1">
+                <a:solidFill>
+                  <a:srgbClr val="15171A"/>
+                </a:solidFill>
+                <a:latin typeface="Aptos"/>
+              </a:rPr>
+              <a:t>Clean VEPRAD fine-tune reproducira 3.86% test WER.</a:t>
+            </a:r>
+            <a:endParaRPr lang="hr-HR" sz="2350"/>
+          </a:p>
+        </p:txBody>
+      </p:sp>
+      <p:sp>
+        <p:nvSpPr>
+          <p:cNvPr id="4" name="Support"/>
+          <p:cNvSpPr txBox="1"/>
+          <p:nvPr/>
+        </p:nvSpPr>
+        <p:spPr>
+          <a:xfrm>
+            <a:off x="444500" y="1130300"/>
+            <a:ext cx="7937500" cy="266700"/>
+          </a:xfrm>
+          <a:prstGeom prst="rect">
+            <a:avLst/>
+          </a:prstGeom>
+          <a:noFill/>
+          <a:ln>
+            <a:noFill/>
+          </a:ln>
+        </p:spPr>
+        <p:txBody>
+          <a:bodyPr wrap="square" lIns="0" tIns="0" rIns="0" bIns="0"/>
+          <a:lstStyle/>
+          <a:p>
+            <a:r>
+              <a:rPr lang="hr-HR" sz="1080">
+                <a:solidFill>
+                  <a:srgbClr val="6F6A5B"/>
+                </a:solidFill>
+                <a:latin typeface="Aptos"/>
+              </a:rPr>
+              <a:t>Zasebni HF/Wav2Vec2 run na istom clean split protokolu; nije PaddleSpeech/DeepSpeech2 trening.</a:t>
+            </a:r>
+            <a:endParaRPr lang="hr-HR" sz="1080"/>
+          </a:p>
+        </p:txBody>
+      </p:sp>
+      <p:sp>
+        <p:nvSpPr>
+          <p:cNvPr id="5" name="Rule"/>
+          <p:cNvSpPr/>
+          <p:nvPr/>
+        </p:nvSpPr>
+        <p:spPr>
+          <a:xfrm>
+            <a:off x="444500" y="1447800"/>
+            <a:ext cx="736600" cy="44450"/>
+          </a:xfrm>
+          <a:prstGeom prst="rect">
+            <a:avLst/>
+          </a:prstGeom>
+          <a:solidFill>
+            <a:srgbClr val="E24A2A"/>
+          </a:solidFill>
+          <a:ln>
+            <a:noFill/>
+          </a:ln>
+        </p:spPr>
+      </p:sp>
+      <p:sp>
+        <p:nvSpPr>
+          <p:cNvPr id="6" name="Rectangle"/>
+          <p:cNvSpPr/>
+          <p:nvPr/>
+        </p:nvSpPr>
+        <p:spPr>
+          <a:xfrm>
+            <a:off x="444500" y="1587500"/>
+            <a:ext cx="2667000" cy="920750"/>
+          </a:xfrm>
+          <a:prstGeom prst="rect">
+            <a:avLst/>
+          </a:prstGeom>
+          <a:solidFill>
+            <a:srgbClr val="15171A"/>
+          </a:solidFill>
+          <a:ln>
+            <a:noFill/>
+          </a:ln>
+        </p:spPr>
+      </p:sp>
+      <p:sp>
+        <p:nvSpPr>
+          <p:cNvPr id="7" name="Text"/>
+          <p:cNvSpPr txBox="1"/>
+          <p:nvPr/>
+        </p:nvSpPr>
+        <p:spPr>
+          <a:xfrm>
+            <a:off x="596900" y="1727200"/>
+            <a:ext cx="2286000" cy="152400"/>
+          </a:xfrm>
+          <a:prstGeom prst="rect">
+            <a:avLst/>
+          </a:prstGeom>
+          <a:noFill/>
+          <a:ln>
+            <a:noFill/>
+          </a:ln>
+        </p:spPr>
+        <p:txBody>
+          <a:bodyPr wrap="square" lIns="0" tIns="0" rIns="0" bIns="0"/>
+          <a:lstStyle/>
+          <a:p>
+            <a:r>
+              <a:rPr lang="hr-HR" sz="1300" b="1">
+                <a:solidFill>
+                  <a:srgbClr val="F8F3E8"/>
+                </a:solidFill>
+                <a:latin typeface="Aptos"/>
+              </a:rPr>
+              <a:t>Model</a:t>
+            </a:r>
+            <a:endParaRPr lang="hr-HR" sz="1300"/>
+          </a:p>
+        </p:txBody>
+      </p:sp>
+      <p:sp>
+        <p:nvSpPr>
+          <p:cNvPr id="8" name="Text"/>
+          <p:cNvSpPr txBox="1"/>
+          <p:nvPr/>
+        </p:nvSpPr>
+        <p:spPr>
+          <a:xfrm>
+            <a:off x="596900" y="1955800"/>
+            <a:ext cx="2286000" cy="177800"/>
+          </a:xfrm>
+          <a:prstGeom prst="rect">
+            <a:avLst/>
+          </a:prstGeom>
+          <a:noFill/>
+          <a:ln>
+            <a:noFill/>
+          </a:ln>
+        </p:spPr>
+        <p:txBody>
+          <a:bodyPr wrap="square" lIns="0" tIns="0" rIns="0" bIns="0"/>
+          <a:lstStyle/>
+          <a:p>
+            <a:r>
+              <a:rPr lang="hr-HR" sz="1500" b="1">
+                <a:solidFill>
+                  <a:srgbClr val="F8F3E8"/>
+                </a:solidFill>
+                <a:latin typeface="Aptos"/>
+              </a:rPr>
+              <a:t>CLASSLA Wav2Vec2</a:t>
+            </a:r>
+            <a:endParaRPr lang="hr-HR" sz="1500"/>
+          </a:p>
+        </p:txBody>
+      </p:sp>
+      <p:sp>
+        <p:nvSpPr>
+          <p:cNvPr id="9" name="Text"/>
+          <p:cNvSpPr txBox="1"/>
+          <p:nvPr/>
+        </p:nvSpPr>
+        <p:spPr>
+          <a:xfrm>
+            <a:off x="596900" y="2209800"/>
+            <a:ext cx="2286000" cy="215900"/>
+          </a:xfrm>
+          <a:prstGeom prst="rect">
+            <a:avLst/>
+          </a:prstGeom>
+          <a:noFill/>
+          <a:ln>
+            <a:noFill/>
+          </a:ln>
+        </p:spPr>
+        <p:txBody>
+          <a:bodyPr wrap="square" lIns="0" tIns="0" rIns="0" bIns="0"/>
+          <a:lstStyle/>
+          <a:p>
+            <a:r>
+              <a:rPr lang="hr-HR" sz="960">
+                <a:solidFill>
+                  <a:srgbClr val="F8F3E8"/>
+                </a:solidFill>
+                <a:latin typeface="Aptos"/>
+              </a:rPr>
+              <a:t>Large HR checkpoint + LM decoder</a:t>
+            </a:r>
+            <a:endParaRPr lang="hr-HR" sz="960"/>
+          </a:p>
+        </p:txBody>
+      </p:sp>
+      <p:sp>
+        <p:nvSpPr>
+          <p:cNvPr id="10" name="Rectangle"/>
+          <p:cNvSpPr/>
+          <p:nvPr/>
+        </p:nvSpPr>
+        <p:spPr>
+          <a:xfrm>
+            <a:off x="3587750" y="1587500"/>
+            <a:ext cx="2667000" cy="920750"/>
+          </a:xfrm>
+          <a:prstGeom prst="rect">
+            <a:avLst/>
+          </a:prstGeom>
+          <a:solidFill>
+            <a:srgbClr val="2C8C99"/>
+          </a:solidFill>
+          <a:ln>
+            <a:noFill/>
+          </a:ln>
+        </p:spPr>
+      </p:sp>
+      <p:sp>
+        <p:nvSpPr>
+          <p:cNvPr id="11" name="Text"/>
+          <p:cNvSpPr txBox="1"/>
+          <p:nvPr/>
+        </p:nvSpPr>
+        <p:spPr>
+          <a:xfrm>
+            <a:off x="3740150" y="1727200"/>
+            <a:ext cx="2286000" cy="152400"/>
+          </a:xfrm>
+          <a:prstGeom prst="rect">
+            <a:avLst/>
+          </a:prstGeom>
+          <a:noFill/>
+          <a:ln>
+            <a:noFill/>
+          </a:ln>
+        </p:spPr>
+        <p:txBody>
+          <a:bodyPr wrap="square" lIns="0" tIns="0" rIns="0" bIns="0"/>
+          <a:lstStyle/>
+          <a:p>
+            <a:r>
+              <a:rPr lang="hr-HR" sz="1300" b="1">
+                <a:solidFill>
+                  <a:srgbClr val="F8F3E8"/>
+                </a:solidFill>
+                <a:latin typeface="Aptos"/>
+              </a:rPr>
+              <a:t>Trening</a:t>
+            </a:r>
+            <a:endParaRPr lang="hr-HR" sz="1300"/>
+          </a:p>
+        </p:txBody>
+      </p:sp>
+      <p:sp>
+        <p:nvSpPr>
+          <p:cNvPr id="12" name="Text"/>
+          <p:cNvSpPr txBox="1"/>
+          <p:nvPr/>
+        </p:nvSpPr>
+        <p:spPr>
+          <a:xfrm>
+            <a:off x="3740150" y="1955800"/>
+            <a:ext cx="2286000" cy="177800"/>
+          </a:xfrm>
+          <a:prstGeom prst="rect">
+            <a:avLst/>
+          </a:prstGeom>
+          <a:noFill/>
+          <a:ln>
+            <a:noFill/>
+          </a:ln>
+        </p:spPr>
+        <p:txBody>
+          <a:bodyPr wrap="square" lIns="0" tIns="0" rIns="0" bIns="0"/>
+          <a:lstStyle/>
+          <a:p>
+            <a:r>
+              <a:rPr lang="hr-HR" sz="1500" b="1">
+                <a:solidFill>
+                  <a:srgbClr val="F8F3E8"/>
+                </a:solidFill>
+                <a:latin typeface="Aptos"/>
+              </a:rPr>
+              <a:t>8 epochs · 408 updates</a:t>
+            </a:r>
+            <a:endParaRPr lang="hr-HR" sz="1500"/>
+          </a:p>
+        </p:txBody>
+      </p:sp>
+      <p:sp>
+        <p:nvSpPr>
+          <p:cNvPr id="13" name="Text"/>
+          <p:cNvSpPr txBox="1"/>
+          <p:nvPr/>
+        </p:nvSpPr>
+        <p:spPr>
+          <a:xfrm>
+            <a:off x="3740150" y="2209800"/>
+            <a:ext cx="2286000" cy="215900"/>
+          </a:xfrm>
+          <a:prstGeom prst="rect">
+            <a:avLst/>
+          </a:prstGeom>
+          <a:noFill/>
+          <a:ln>
+            <a:noFill/>
+          </a:ln>
+        </p:spPr>
+        <p:txBody>
+          <a:bodyPr wrap="square" lIns="0" tIns="0" rIns="0" bIns="0"/>
+          <a:lstStyle/>
+          <a:p>
+            <a:r>
+              <a:rPr lang="hr-HR" sz="960">
+                <a:solidFill>
+                  <a:srgbClr val="F8F3E8"/>
+                </a:solidFill>
+                <a:latin typeface="Aptos"/>
+              </a:rPr>
+              <a:t>3298 train iskaza, 5.03 h, fp16, lr 3e-4</a:t>
+            </a:r>
+            <a:endParaRPr lang="hr-HR" sz="960"/>
+          </a:p>
+        </p:txBody>
+      </p:sp>
+      <p:sp>
+        <p:nvSpPr>
+          <p:cNvPr id="14" name="Rectangle"/>
+          <p:cNvSpPr/>
+          <p:nvPr/>
+        </p:nvSpPr>
+        <p:spPr>
+          <a:xfrm>
+            <a:off x="6731000" y="1587500"/>
+            <a:ext cx="2667000" cy="920750"/>
+          </a:xfrm>
+          <a:prstGeom prst="rect">
+            <a:avLst/>
+          </a:prstGeom>
+          <a:solidFill>
+            <a:srgbClr val="F0B429"/>
+          </a:solidFill>
+          <a:ln>
+            <a:noFill/>
+          </a:ln>
+        </p:spPr>
+      </p:sp>
+      <p:sp>
+        <p:nvSpPr>
+          <p:cNvPr id="15" name="Text"/>
+          <p:cNvSpPr txBox="1"/>
+          <p:nvPr/>
+        </p:nvSpPr>
+        <p:spPr>
+          <a:xfrm>
+            <a:off x="6883400" y="1727200"/>
+            <a:ext cx="2286000" cy="152400"/>
+          </a:xfrm>
+          <a:prstGeom prst="rect">
+            <a:avLst/>
+          </a:prstGeom>
+          <a:noFill/>
+          <a:ln>
+            <a:noFill/>
+          </a:ln>
+        </p:spPr>
+        <p:txBody>
+          <a:bodyPr wrap="square" lIns="0" tIns="0" rIns="0" bIns="0"/>
+          <a:lstStyle/>
+          <a:p>
+            <a:r>
+              <a:rPr lang="hr-HR" sz="1300" b="1">
+                <a:solidFill>
+                  <a:srgbClr val="15171A"/>
+                </a:solidFill>
+                <a:latin typeface="Aptos"/>
+              </a:rPr>
+              <a:t>Split</a:t>
+            </a:r>
+            <a:endParaRPr lang="hr-HR" sz="1300"/>
+          </a:p>
+        </p:txBody>
+      </p:sp>
+      <p:sp>
+        <p:nvSpPr>
+          <p:cNvPr id="16" name="Text"/>
+          <p:cNvSpPr txBox="1"/>
+          <p:nvPr/>
+        </p:nvSpPr>
+        <p:spPr>
+          <a:xfrm>
+            <a:off x="6883400" y="1955800"/>
+            <a:ext cx="2286000" cy="177800"/>
+          </a:xfrm>
+          <a:prstGeom prst="rect">
+            <a:avLst/>
+          </a:prstGeom>
+          <a:noFill/>
+          <a:ln>
+            <a:noFill/>
+          </a:ln>
+        </p:spPr>
+        <p:txBody>
+          <a:bodyPr wrap="square" lIns="0" tIns="0" rIns="0" bIns="0"/>
+          <a:lstStyle/>
+          <a:p>
+            <a:r>
+              <a:rPr lang="hr-HR" sz="1500" b="1">
+                <a:solidFill>
+                  <a:srgbClr val="15171A"/>
+                </a:solidFill>
+                <a:latin typeface="Aptos"/>
+              </a:rPr>
+              <a:t>clean CV + frozen test</a:t>
+            </a:r>
+            <a:endParaRPr lang="hr-HR" sz="1500"/>
+          </a:p>
+        </p:txBody>
+      </p:sp>
+      <p:sp>
+        <p:nvSpPr>
+          <p:cNvPr id="17" name="Text"/>
+          <p:cNvSpPr txBox="1"/>
+          <p:nvPr/>
+        </p:nvSpPr>
+        <p:spPr>
+          <a:xfrm>
+            <a:off x="6883400" y="2209800"/>
+            <a:ext cx="2286000" cy="215900"/>
+          </a:xfrm>
+          <a:prstGeom prst="rect">
+            <a:avLst/>
+          </a:prstGeom>
+          <a:noFill/>
+          <a:ln>
+            <a:noFill/>
+          </a:ln>
+        </p:spPr>
+        <p:txBody>
+          <a:bodyPr wrap="square" lIns="0" tIns="0" rIns="0" bIns="0"/>
+          <a:lstStyle/>
+          <a:p>
+            <a:r>
+              <a:rPr lang="hr-HR" sz="960">
+                <a:solidFill>
+                  <a:srgbClr val="15171A"/>
+                </a:solidFill>
+                <a:latin typeface="Aptos"/>
+              </a:rPr>
+              <a:t>val unseen: m05/m11/z07; test unseen: m04/z06/z14</a:t>
+            </a:r>
+            <a:endParaRPr lang="hr-HR" sz="960"/>
+          </a:p>
+        </p:txBody>
+      </p:sp>
+      <p:sp>
+        <p:nvSpPr>
+          <p:cNvPr id="18" name="Text"/>
+          <p:cNvSpPr txBox="1"/>
+          <p:nvPr/>
+        </p:nvSpPr>
+        <p:spPr>
+          <a:xfrm>
+            <a:off x="444500" y="2806700"/>
+            <a:ext cx="4064000" cy="190500"/>
+          </a:xfrm>
+          <a:prstGeom prst="rect">
+            <a:avLst/>
+          </a:prstGeom>
+          <a:noFill/>
+          <a:ln>
+            <a:noFill/>
+          </a:ln>
+        </p:spPr>
+        <p:txBody>
+          <a:bodyPr wrap="square" lIns="0" tIns="0" rIns="0" bIns="0"/>
+          <a:lstStyle/>
+          <a:p>
+            <a:r>
+              <a:rPr lang="hr-HR" sz="1800" b="1">
+                <a:solidFill>
+                  <a:srgbClr val="15171A"/>
+                </a:solidFill>
+                <a:latin typeface="Aptos"/>
+              </a:rPr>
+              <a:t>Validation + test rezultati</a:t>
+            </a:r>
+            <a:endParaRPr lang="hr-HR" sz="1800"/>
+          </a:p>
+        </p:txBody>
+      </p:sp>
+      <p:sp>
+        <p:nvSpPr>
+          <p:cNvPr id="19" name="Rule"/>
+          <p:cNvSpPr/>
+          <p:nvPr/>
+        </p:nvSpPr>
+        <p:spPr>
+          <a:xfrm>
+            <a:off x="444500" y="3048000"/>
+            <a:ext cx="571500" cy="38100"/>
+          </a:xfrm>
+          <a:prstGeom prst="rect">
+            <a:avLst/>
+          </a:prstGeom>
+          <a:solidFill>
+            <a:srgbClr val="E24A2A"/>
+          </a:solidFill>
+          <a:ln>
+            <a:noFill/>
+          </a:ln>
+        </p:spPr>
+      </p:sp>
+      <p:sp>
+        <p:nvSpPr>
+          <p:cNvPr id="20" name="Table background"/>
+          <p:cNvSpPr/>
+          <p:nvPr/>
+        </p:nvSpPr>
+        <p:spPr>
+          <a:xfrm>
+            <a:off x="444500" y="3270250"/>
+            <a:ext cx="8064500" cy="1778000"/>
+          </a:xfrm>
+          <a:prstGeom prst="rect">
+            <a:avLst/>
+          </a:prstGeom>
+          <a:solidFill>
+            <a:srgbClr val="F8F3E8"/>
+          </a:solidFill>
+          <a:ln w="12700">
+            <a:solidFill>
+              <a:srgbClr val="D6C8B5"/>
+            </a:solidFill>
+          </a:ln>
+        </p:spPr>
+      </p:sp>
+      <p:sp>
+        <p:nvSpPr>
+          <p:cNvPr id="21" name="Table header"/>
+          <p:cNvSpPr/>
+          <p:nvPr/>
+        </p:nvSpPr>
+        <p:spPr>
+          <a:xfrm>
+            <a:off x="444500" y="3270250"/>
+            <a:ext cx="8064500" cy="355600"/>
+          </a:xfrm>
+          <a:prstGeom prst="rect">
+            <a:avLst/>
+          </a:prstGeom>
+          <a:solidFill>
+            <a:srgbClr val="2C8C99"/>
+          </a:solidFill>
+          <a:ln>
+            <a:noFill/>
+          </a:ln>
+        </p:spPr>
+      </p:sp>
+      <p:sp>
+        <p:nvSpPr>
+          <p:cNvPr id="22" name="Table stripe"/>
+          <p:cNvSpPr/>
+          <p:nvPr/>
+        </p:nvSpPr>
+        <p:spPr>
+          <a:xfrm>
+            <a:off x="444500" y="3981450"/>
+            <a:ext cx="8064500" cy="355600"/>
+          </a:xfrm>
+          <a:prstGeom prst="rect">
+            <a:avLst/>
+          </a:prstGeom>
+          <a:solidFill>
+            <a:srgbClr val="F2DFC7"/>
+          </a:solidFill>
+          <a:ln>
+            <a:noFill/>
+          </a:ln>
+        </p:spPr>
+      </p:sp>
+      <p:sp>
+        <p:nvSpPr>
+          <p:cNvPr id="23" name="Table stripe"/>
+          <p:cNvSpPr/>
+          <p:nvPr/>
+        </p:nvSpPr>
+        <p:spPr>
+          <a:xfrm>
+            <a:off x="444500" y="4692650"/>
+            <a:ext cx="8064500" cy="355600"/>
+          </a:xfrm>
+          <a:prstGeom prst="rect">
+            <a:avLst/>
+          </a:prstGeom>
+          <a:solidFill>
+            <a:srgbClr val="F2DFC7"/>
+          </a:solidFill>
+          <a:ln>
+            <a:noFill/>
+          </a:ln>
+        </p:spPr>
+      </p:sp>
+      <p:sp>
+        <p:nvSpPr>
+          <p:cNvPr id="24" name="Header"/>
+          <p:cNvSpPr txBox="1"/>
+          <p:nvPr/>
+        </p:nvSpPr>
+        <p:spPr>
+          <a:xfrm>
+            <a:off x="495300" y="3327400"/>
+            <a:ext cx="1930400" cy="279400"/>
+          </a:xfrm>
+          <a:prstGeom prst="rect">
+            <a:avLst/>
+          </a:prstGeom>
+          <a:noFill/>
+          <a:ln>
+            <a:noFill/>
+          </a:ln>
+        </p:spPr>
+        <p:txBody>
+          <a:bodyPr wrap="square" lIns="0" tIns="0" rIns="0" bIns="0"/>
+          <a:lstStyle/>
+          <a:p>
+            <a:r>
+              <a:rPr lang="hr-HR" sz="900" b="1">
+                <a:solidFill>
+                  <a:srgbClr val="F8F3E8"/>
+                </a:solidFill>
+                <a:latin typeface="Aptos"/>
+              </a:rPr>
+              <a:t>Decoder</a:t>
+            </a:r>
+            <a:endParaRPr lang="hr-HR" sz="900"/>
+          </a:p>
+        </p:txBody>
+      </p:sp>
+      <p:sp>
+        <p:nvSpPr>
+          <p:cNvPr id="25" name="Header"/>
+          <p:cNvSpPr txBox="1"/>
+          <p:nvPr/>
+        </p:nvSpPr>
+        <p:spPr>
+          <a:xfrm>
+            <a:off x="2527300" y="3327400"/>
+            <a:ext cx="819150" cy="279400"/>
+          </a:xfrm>
+          <a:prstGeom prst="rect">
+            <a:avLst/>
+          </a:prstGeom>
+          <a:noFill/>
+          <a:ln>
+            <a:noFill/>
+          </a:ln>
+        </p:spPr>
+        <p:txBody>
+          <a:bodyPr wrap="square" lIns="0" tIns="0" rIns="0" bIns="0"/>
+          <a:lstStyle/>
+          <a:p>
+            <a:r>
+              <a:rPr lang="hr-HR" sz="900" b="1">
+                <a:solidFill>
+                  <a:srgbClr val="F8F3E8"/>
+                </a:solidFill>
+                <a:latin typeface="Aptos"/>
+              </a:rPr>
+              <a:t>Val WER</a:t>
+            </a:r>
+            <a:endParaRPr lang="hr-HR" sz="900"/>
+          </a:p>
+        </p:txBody>
+      </p:sp>
+      <p:sp>
+        <p:nvSpPr>
+          <p:cNvPr id="26" name="Header"/>
+          <p:cNvSpPr txBox="1"/>
+          <p:nvPr/>
+        </p:nvSpPr>
+        <p:spPr>
+          <a:xfrm>
+            <a:off x="3448050" y="3327400"/>
+            <a:ext cx="819150" cy="279400"/>
+          </a:xfrm>
+          <a:prstGeom prst="rect">
+            <a:avLst/>
+          </a:prstGeom>
+          <a:noFill/>
+          <a:ln>
+            <a:noFill/>
+          </a:ln>
+        </p:spPr>
+        <p:txBody>
+          <a:bodyPr wrap="square" lIns="0" tIns="0" rIns="0" bIns="0"/>
+          <a:lstStyle/>
+          <a:p>
+            <a:r>
+              <a:rPr lang="hr-HR" sz="900" b="1">
+                <a:solidFill>
+                  <a:srgbClr val="F8F3E8"/>
+                </a:solidFill>
+                <a:latin typeface="Aptos"/>
+              </a:rPr>
+              <a:t>Val CER</a:t>
+            </a:r>
+            <a:endParaRPr lang="hr-HR" sz="900"/>
+          </a:p>
+        </p:txBody>
+      </p:sp>
+      <p:sp>
+        <p:nvSpPr>
+          <p:cNvPr id="27" name="Header"/>
+          <p:cNvSpPr txBox="1"/>
+          <p:nvPr/>
+        </p:nvSpPr>
+        <p:spPr>
+          <a:xfrm>
+            <a:off x="4368800" y="3327400"/>
+            <a:ext cx="819150" cy="279400"/>
+          </a:xfrm>
+          <a:prstGeom prst="rect">
+            <a:avLst/>
+          </a:prstGeom>
+          <a:noFill/>
+          <a:ln>
+            <a:noFill/>
+          </a:ln>
+        </p:spPr>
+        <p:txBody>
+          <a:bodyPr wrap="square" lIns="0" tIns="0" rIns="0" bIns="0"/>
+          <a:lstStyle/>
+          <a:p>
+            <a:r>
+              <a:rPr lang="hr-HR" sz="900" b="1">
+                <a:solidFill>
+                  <a:srgbClr val="F8F3E8"/>
+                </a:solidFill>
+                <a:latin typeface="Aptos"/>
+              </a:rPr>
+              <a:t>Test WER</a:t>
+            </a:r>
+            <a:endParaRPr lang="hr-HR" sz="900"/>
+          </a:p>
+        </p:txBody>
+      </p:sp>
+      <p:sp>
+        <p:nvSpPr>
+          <p:cNvPr id="28" name="Header"/>
+          <p:cNvSpPr txBox="1"/>
+          <p:nvPr/>
+        </p:nvSpPr>
+        <p:spPr>
+          <a:xfrm>
+            <a:off x="5289550" y="3327400"/>
+            <a:ext cx="819150" cy="279400"/>
+          </a:xfrm>
+          <a:prstGeom prst="rect">
+            <a:avLst/>
+          </a:prstGeom>
+          <a:noFill/>
+          <a:ln>
+            <a:noFill/>
+          </a:ln>
+        </p:spPr>
+        <p:txBody>
+          <a:bodyPr wrap="square" lIns="0" tIns="0" rIns="0" bIns="0"/>
+          <a:lstStyle/>
+          <a:p>
+            <a:r>
+              <a:rPr lang="hr-HR" sz="900" b="1">
+                <a:solidFill>
+                  <a:srgbClr val="F8F3E8"/>
+                </a:solidFill>
+                <a:latin typeface="Aptos"/>
+              </a:rPr>
+              <a:t>Test CER</a:t>
+            </a:r>
+            <a:endParaRPr lang="hr-HR" sz="900"/>
+          </a:p>
+        </p:txBody>
+      </p:sp>
+      <p:sp>
+        <p:nvSpPr>
+          <p:cNvPr id="29" name="Header"/>
+          <p:cNvSpPr txBox="1"/>
+          <p:nvPr/>
+        </p:nvSpPr>
+        <p:spPr>
+          <a:xfrm>
+            <a:off x="6210300" y="3327400"/>
+            <a:ext cx="1073150" cy="279400"/>
+          </a:xfrm>
+          <a:prstGeom prst="rect">
+            <a:avLst/>
+          </a:prstGeom>
+          <a:noFill/>
+          <a:ln>
+            <a:noFill/>
+          </a:ln>
+        </p:spPr>
+        <p:txBody>
+          <a:bodyPr wrap="square" lIns="0" tIns="0" rIns="0" bIns="0"/>
+          <a:lstStyle/>
+          <a:p>
+            <a:r>
+              <a:rPr lang="hr-HR" sz="900" b="1">
+                <a:solidFill>
+                  <a:srgbClr val="F8F3E8"/>
+                </a:solidFill>
+                <a:latin typeface="Aptos"/>
+              </a:rPr>
+              <a:t>Test unseen WER</a:t>
+            </a:r>
+            <a:endParaRPr lang="hr-HR" sz="900"/>
+          </a:p>
+        </p:txBody>
+      </p:sp>
+      <p:sp>
+        <p:nvSpPr>
+          <p:cNvPr id="30" name="Header"/>
+          <p:cNvSpPr txBox="1"/>
+          <p:nvPr/>
+        </p:nvSpPr>
+        <p:spPr>
+          <a:xfrm>
+            <a:off x="7385050" y="3327400"/>
+            <a:ext cx="1073150" cy="279400"/>
+          </a:xfrm>
+          <a:prstGeom prst="rect">
+            <a:avLst/>
+          </a:prstGeom>
+          <a:noFill/>
+          <a:ln>
+            <a:noFill/>
+          </a:ln>
+        </p:spPr>
+        <p:txBody>
+          <a:bodyPr wrap="square" lIns="0" tIns="0" rIns="0" bIns="0"/>
+          <a:lstStyle/>
+          <a:p>
+            <a:r>
+              <a:rPr lang="hr-HR" sz="900" b="1">
+                <a:solidFill>
+                  <a:srgbClr val="F8F3E8"/>
+                </a:solidFill>
+                <a:latin typeface="Aptos"/>
+              </a:rPr>
+              <a:t>Test unseen CER</a:t>
+            </a:r>
+            <a:endParaRPr lang="hr-HR" sz="900"/>
+          </a:p>
+        </p:txBody>
+      </p:sp>
+      <p:sp>
+        <p:nvSpPr>
+          <p:cNvPr id="31" name="Cell"/>
+          <p:cNvSpPr txBox="1"/>
+          <p:nvPr/>
+        </p:nvSpPr>
+        <p:spPr>
+          <a:xfrm>
+            <a:off x="495300" y="3676650"/>
+            <a:ext cx="1930400" cy="292100"/>
+          </a:xfrm>
+          <a:prstGeom prst="rect">
+            <a:avLst/>
+          </a:prstGeom>
+          <a:noFill/>
+          <a:ln>
+            <a:noFill/>
+          </a:ln>
+        </p:spPr>
+        <p:txBody>
+          <a:bodyPr wrap="square" lIns="0" tIns="0" rIns="0" bIns="0"/>
+          <a:lstStyle/>
+          <a:p>
+            <a:r>
+              <a:rPr lang="hr-HR" sz="900" b="1">
+                <a:solidFill>
+                  <a:srgbClr val="15171A"/>
+                </a:solidFill>
+                <a:latin typeface="Aptos"/>
+              </a:rPr>
+              <a:t>pre-finetune greedy</a:t>
+            </a:r>
+            <a:endParaRPr lang="hr-HR" sz="900"/>
+          </a:p>
+        </p:txBody>
+      </p:sp>
+      <p:sp>
+        <p:nvSpPr>
+          <p:cNvPr id="32" name="Cell"/>
+          <p:cNvSpPr txBox="1"/>
+          <p:nvPr/>
+        </p:nvSpPr>
+        <p:spPr>
+          <a:xfrm>
+            <a:off x="2527300" y="3676650"/>
+            <a:ext cx="819150" cy="292100"/>
+          </a:xfrm>
+          <a:prstGeom prst="rect">
+            <a:avLst/>
+          </a:prstGeom>
+          <a:noFill/>
+          <a:ln>
+            <a:noFill/>
+          </a:ln>
+        </p:spPr>
+        <p:txBody>
+          <a:bodyPr wrap="square" lIns="0" tIns="0" rIns="0" bIns="0"/>
+          <a:lstStyle/>
+          <a:p>
+            <a:r>
+              <a:rPr lang="hr-HR" sz="900">
+                <a:solidFill>
+                  <a:srgbClr val="20282C"/>
+                </a:solidFill>
+                <a:latin typeface="Aptos"/>
+              </a:rPr>
+              <a:t>0.303</a:t>
+            </a:r>
+            <a:endParaRPr lang="hr-HR" sz="900"/>
+          </a:p>
+        </p:txBody>
+      </p:sp>
+      <p:sp>
+        <p:nvSpPr>
+          <p:cNvPr id="33" name="Cell"/>
+          <p:cNvSpPr txBox="1"/>
+          <p:nvPr/>
+        </p:nvSpPr>
+        <p:spPr>
+          <a:xfrm>
+            <a:off x="3448050" y="3676650"/>
+            <a:ext cx="819150" cy="292100"/>
+          </a:xfrm>
+          <a:prstGeom prst="rect">
+            <a:avLst/>
+          </a:prstGeom>
+          <a:noFill/>
+          <a:ln>
+            <a:noFill/>
+          </a:ln>
+        </p:spPr>
+        <p:txBody>
+          <a:bodyPr wrap="square" lIns="0" tIns="0" rIns="0" bIns="0"/>
+          <a:lstStyle/>
+          <a:p>
+            <a:r>
+              <a:rPr lang="hr-HR" sz="900">
+                <a:solidFill>
+                  <a:srgbClr val="20282C"/>
+                </a:solidFill>
+                <a:latin typeface="Aptos"/>
+              </a:rPr>
+              <a:t>0.149</a:t>
+            </a:r>
+            <a:endParaRPr lang="hr-HR" sz="900"/>
+          </a:p>
+        </p:txBody>
+      </p:sp>
+      <p:sp>
+        <p:nvSpPr>
+          <p:cNvPr id="34" name="Cell"/>
+          <p:cNvSpPr txBox="1"/>
+          <p:nvPr/>
+        </p:nvSpPr>
+        <p:spPr>
+          <a:xfrm>
+            <a:off x="4368800" y="3676650"/>
+            <a:ext cx="819150" cy="292100"/>
+          </a:xfrm>
+          <a:prstGeom prst="rect">
+            <a:avLst/>
+          </a:prstGeom>
+          <a:noFill/>
+          <a:ln>
+            <a:noFill/>
+          </a:ln>
+        </p:spPr>
+        <p:txBody>
+          <a:bodyPr wrap="square" lIns="0" tIns="0" rIns="0" bIns="0"/>
+          <a:lstStyle/>
+          <a:p>
+            <a:r>
+              <a:rPr lang="hr-HR" sz="900">
+                <a:solidFill>
+                  <a:srgbClr val="20282C"/>
+                </a:solidFill>
+                <a:latin typeface="Aptos"/>
+              </a:rPr>
+              <a:t>0.309</a:t>
+            </a:r>
+            <a:endParaRPr lang="hr-HR" sz="900"/>
+          </a:p>
+        </p:txBody>
+      </p:sp>
+      <p:sp>
+        <p:nvSpPr>
+          <p:cNvPr id="35" name="Cell"/>
+          <p:cNvSpPr txBox="1"/>
+          <p:nvPr/>
+        </p:nvSpPr>
+        <p:spPr>
+          <a:xfrm>
+            <a:off x="5289550" y="3676650"/>
+            <a:ext cx="819150" cy="292100"/>
+          </a:xfrm>
+          <a:prstGeom prst="rect">
+            <a:avLst/>
+          </a:prstGeom>
+          <a:noFill/>
+          <a:ln>
+            <a:noFill/>
+          </a:ln>
+        </p:spPr>
+        <p:txBody>
+          <a:bodyPr wrap="square" lIns="0" tIns="0" rIns="0" bIns="0"/>
+          <a:lstStyle/>
+          <a:p>
+            <a:r>
+              <a:rPr lang="hr-HR" sz="900">
+                <a:solidFill>
+                  <a:srgbClr val="20282C"/>
+                </a:solidFill>
+                <a:latin typeface="Aptos"/>
+              </a:rPr>
+              <a:t>0.154</a:t>
+            </a:r>
+            <a:endParaRPr lang="hr-HR" sz="900"/>
+          </a:p>
+        </p:txBody>
+      </p:sp>
+      <p:sp>
+        <p:nvSpPr>
+          <p:cNvPr id="36" name="Cell"/>
+          <p:cNvSpPr txBox="1"/>
+          <p:nvPr/>
+        </p:nvSpPr>
+        <p:spPr>
+          <a:xfrm>
+            <a:off x="6210300" y="3676650"/>
+            <a:ext cx="1073150" cy="292100"/>
+          </a:xfrm>
+          <a:prstGeom prst="rect">
+            <a:avLst/>
+          </a:prstGeom>
+          <a:noFill/>
+          <a:ln>
+            <a:noFill/>
+          </a:ln>
+        </p:spPr>
+        <p:txBody>
+          <a:bodyPr wrap="square" lIns="0" tIns="0" rIns="0" bIns="0"/>
+          <a:lstStyle/>
+          <a:p>
+            <a:r>
+              <a:rPr lang="hr-HR" sz="900">
+                <a:solidFill>
+                  <a:srgbClr val="20282C"/>
+                </a:solidFill>
+                <a:latin typeface="Aptos"/>
+              </a:rPr>
+              <a:t>0.337</a:t>
+            </a:r>
+            <a:endParaRPr lang="hr-HR" sz="900"/>
+          </a:p>
+        </p:txBody>
+      </p:sp>
+      <p:sp>
+        <p:nvSpPr>
+          <p:cNvPr id="37" name="Cell"/>
+          <p:cNvSpPr txBox="1"/>
+          <p:nvPr/>
+        </p:nvSpPr>
+        <p:spPr>
+          <a:xfrm>
+            <a:off x="7385050" y="3676650"/>
+            <a:ext cx="1073150" cy="292100"/>
+          </a:xfrm>
+          <a:prstGeom prst="rect">
+            <a:avLst/>
+          </a:prstGeom>
+          <a:noFill/>
+          <a:ln>
+            <a:noFill/>
+          </a:ln>
+        </p:spPr>
+        <p:txBody>
+          <a:bodyPr wrap="square" lIns="0" tIns="0" rIns="0" bIns="0"/>
+          <a:lstStyle/>
+          <a:p>
+            <a:r>
+              <a:rPr lang="hr-HR" sz="900">
+                <a:solidFill>
+                  <a:srgbClr val="20282C"/>
+                </a:solidFill>
+                <a:latin typeface="Aptos"/>
+              </a:rPr>
+              <a:t>0.169</a:t>
+            </a:r>
+            <a:endParaRPr lang="hr-HR" sz="900"/>
+          </a:p>
+        </p:txBody>
+      </p:sp>
+      <p:sp>
+        <p:nvSpPr>
+          <p:cNvPr id="38" name="Cell"/>
+          <p:cNvSpPr txBox="1"/>
+          <p:nvPr/>
+        </p:nvSpPr>
+        <p:spPr>
+          <a:xfrm>
+            <a:off x="495300" y="4032250"/>
+            <a:ext cx="1930400" cy="292100"/>
+          </a:xfrm>
+          <a:prstGeom prst="rect">
+            <a:avLst/>
+          </a:prstGeom>
+          <a:noFill/>
+          <a:ln>
+            <a:noFill/>
+          </a:ln>
+        </p:spPr>
+        <p:txBody>
+          <a:bodyPr wrap="square" lIns="0" tIns="0" rIns="0" bIns="0"/>
+          <a:lstStyle/>
+          <a:p>
+            <a:r>
+              <a:rPr lang="hr-HR" sz="900" b="1">
+                <a:solidFill>
+                  <a:srgbClr val="15171A"/>
+                </a:solidFill>
+                <a:latin typeface="Aptos"/>
+              </a:rPr>
+              <a:t>pre-finetune bundled LM</a:t>
+            </a:r>
+            <a:endParaRPr lang="hr-HR" sz="900"/>
+          </a:p>
+        </p:txBody>
+      </p:sp>
+      <p:sp>
+        <p:nvSpPr>
+          <p:cNvPr id="39" name="Cell"/>
+          <p:cNvSpPr txBox="1"/>
+          <p:nvPr/>
+        </p:nvSpPr>
+        <p:spPr>
+          <a:xfrm>
+            <a:off x="2527300" y="4032250"/>
+            <a:ext cx="819150" cy="292100"/>
+          </a:xfrm>
+          <a:prstGeom prst="rect">
+            <a:avLst/>
+          </a:prstGeom>
+          <a:noFill/>
+          <a:ln>
+            <a:noFill/>
+          </a:ln>
+        </p:spPr>
+        <p:txBody>
+          <a:bodyPr wrap="square" lIns="0" tIns="0" rIns="0" bIns="0"/>
+          <a:lstStyle/>
+          <a:p>
+            <a:r>
+              <a:rPr lang="hr-HR" sz="900">
+                <a:solidFill>
+                  <a:srgbClr val="20282C"/>
+                </a:solidFill>
+                <a:latin typeface="Aptos"/>
+              </a:rPr>
+              <a:t>0.284</a:t>
+            </a:r>
+            <a:endParaRPr lang="hr-HR" sz="900"/>
+          </a:p>
+        </p:txBody>
+      </p:sp>
+      <p:sp>
+        <p:nvSpPr>
+          <p:cNvPr id="40" name="Cell"/>
+          <p:cNvSpPr txBox="1"/>
+          <p:nvPr/>
+        </p:nvSpPr>
+        <p:spPr>
+          <a:xfrm>
+            <a:off x="3448050" y="4032250"/>
+            <a:ext cx="819150" cy="292100"/>
+          </a:xfrm>
+          <a:prstGeom prst="rect">
+            <a:avLst/>
+          </a:prstGeom>
+          <a:noFill/>
+          <a:ln>
+            <a:noFill/>
+          </a:ln>
+        </p:spPr>
+        <p:txBody>
+          <a:bodyPr wrap="square" lIns="0" tIns="0" rIns="0" bIns="0"/>
+          <a:lstStyle/>
+          <a:p>
+            <a:r>
+              <a:rPr lang="hr-HR" sz="900">
+                <a:solidFill>
+                  <a:srgbClr val="20282C"/>
+                </a:solidFill>
+                <a:latin typeface="Aptos"/>
+              </a:rPr>
+              <a:t>0.147</a:t>
+            </a:r>
+            <a:endParaRPr lang="hr-HR" sz="900"/>
+          </a:p>
+        </p:txBody>
+      </p:sp>
+      <p:sp>
+        <p:nvSpPr>
+          <p:cNvPr id="41" name="Cell"/>
+          <p:cNvSpPr txBox="1"/>
+          <p:nvPr/>
+        </p:nvSpPr>
+        <p:spPr>
+          <a:xfrm>
+            <a:off x="4368800" y="4032250"/>
+            <a:ext cx="819150" cy="292100"/>
+          </a:xfrm>
+          <a:prstGeom prst="rect">
+            <a:avLst/>
+          </a:prstGeom>
+          <a:noFill/>
+          <a:ln>
+            <a:noFill/>
+          </a:ln>
+        </p:spPr>
+        <p:txBody>
+          <a:bodyPr wrap="square" lIns="0" tIns="0" rIns="0" bIns="0"/>
+          <a:lstStyle/>
+          <a:p>
+            <a:r>
+              <a:rPr lang="hr-HR" sz="900">
+                <a:solidFill>
+                  <a:srgbClr val="20282C"/>
+                </a:solidFill>
+                <a:latin typeface="Aptos"/>
+              </a:rPr>
+              <a:t>0.294</a:t>
+            </a:r>
+            <a:endParaRPr lang="hr-HR" sz="900"/>
+          </a:p>
+        </p:txBody>
+      </p:sp>
+      <p:sp>
+        <p:nvSpPr>
+          <p:cNvPr id="42" name="Cell"/>
+          <p:cNvSpPr txBox="1"/>
+          <p:nvPr/>
+        </p:nvSpPr>
+        <p:spPr>
+          <a:xfrm>
+            <a:off x="5289550" y="4032250"/>
+            <a:ext cx="819150" cy="292100"/>
+          </a:xfrm>
+          <a:prstGeom prst="rect">
+            <a:avLst/>
+          </a:prstGeom>
+          <a:noFill/>
+          <a:ln>
+            <a:noFill/>
+          </a:ln>
+        </p:spPr>
+        <p:txBody>
+          <a:bodyPr wrap="square" lIns="0" tIns="0" rIns="0" bIns="0"/>
+          <a:lstStyle/>
+          <a:p>
+            <a:r>
+              <a:rPr lang="hr-HR" sz="900">
+                <a:solidFill>
+                  <a:srgbClr val="20282C"/>
+                </a:solidFill>
+                <a:latin typeface="Aptos"/>
+              </a:rPr>
+              <a:t>0.155</a:t>
+            </a:r>
+            <a:endParaRPr lang="hr-HR" sz="900"/>
+          </a:p>
+        </p:txBody>
+      </p:sp>
+      <p:sp>
+        <p:nvSpPr>
+          <p:cNvPr id="43" name="Cell"/>
+          <p:cNvSpPr txBox="1"/>
+          <p:nvPr/>
+        </p:nvSpPr>
+        <p:spPr>
+          <a:xfrm>
+            <a:off x="6210300" y="4032250"/>
+            <a:ext cx="1073150" cy="292100"/>
+          </a:xfrm>
+          <a:prstGeom prst="rect">
+            <a:avLst/>
+          </a:prstGeom>
+          <a:noFill/>
+          <a:ln>
+            <a:noFill/>
+          </a:ln>
+        </p:spPr>
+        <p:txBody>
+          <a:bodyPr wrap="square" lIns="0" tIns="0" rIns="0" bIns="0"/>
+          <a:lstStyle/>
+          <a:p>
+            <a:r>
+              <a:rPr lang="hr-HR" sz="900">
+                <a:solidFill>
+                  <a:srgbClr val="20282C"/>
+                </a:solidFill>
+                <a:latin typeface="Aptos"/>
+              </a:rPr>
+              <a:t>0.320</a:t>
+            </a:r>
+            <a:endParaRPr lang="hr-HR" sz="900"/>
+          </a:p>
+        </p:txBody>
+      </p:sp>
+      <p:sp>
+        <p:nvSpPr>
+          <p:cNvPr id="44" name="Cell"/>
+          <p:cNvSpPr txBox="1"/>
+          <p:nvPr/>
+        </p:nvSpPr>
+        <p:spPr>
+          <a:xfrm>
+            <a:off x="7385050" y="4032250"/>
+            <a:ext cx="1073150" cy="292100"/>
+          </a:xfrm>
+          <a:prstGeom prst="rect">
+            <a:avLst/>
+          </a:prstGeom>
+          <a:noFill/>
+          <a:ln>
+            <a:noFill/>
+          </a:ln>
+        </p:spPr>
+        <p:txBody>
+          <a:bodyPr wrap="square" lIns="0" tIns="0" rIns="0" bIns="0"/>
+          <a:lstStyle/>
+          <a:p>
+            <a:r>
+              <a:rPr lang="hr-HR" sz="900">
+                <a:solidFill>
+                  <a:srgbClr val="20282C"/>
+                </a:solidFill>
+                <a:latin typeface="Aptos"/>
+              </a:rPr>
+              <a:t>0.170</a:t>
+            </a:r>
+            <a:endParaRPr lang="hr-HR" sz="900"/>
+          </a:p>
+        </p:txBody>
+      </p:sp>
+      <p:sp>
+        <p:nvSpPr>
+          <p:cNvPr id="45" name="Cell"/>
+          <p:cNvSpPr txBox="1"/>
+          <p:nvPr/>
+        </p:nvSpPr>
+        <p:spPr>
+          <a:xfrm>
+            <a:off x="495300" y="4387850"/>
+            <a:ext cx="1930400" cy="292100"/>
+          </a:xfrm>
+          <a:prstGeom prst="rect">
+            <a:avLst/>
+          </a:prstGeom>
+          <a:noFill/>
+          <a:ln>
+            <a:noFill/>
+          </a:ln>
+        </p:spPr>
+        <p:txBody>
+          <a:bodyPr wrap="square" lIns="0" tIns="0" rIns="0" bIns="0"/>
+          <a:lstStyle/>
+          <a:p>
+            <a:r>
+              <a:rPr lang="hr-HR" sz="900" b="1">
+                <a:solidFill>
+                  <a:srgbClr val="15171A"/>
+                </a:solidFill>
+                <a:latin typeface="Aptos"/>
+              </a:rPr>
+              <a:t>fine-tuned greedy</a:t>
+            </a:r>
+            <a:endParaRPr lang="hr-HR" sz="900"/>
+          </a:p>
+        </p:txBody>
+      </p:sp>
+      <p:sp>
+        <p:nvSpPr>
+          <p:cNvPr id="46" name="Cell"/>
+          <p:cNvSpPr txBox="1"/>
+          <p:nvPr/>
+        </p:nvSpPr>
+        <p:spPr>
+          <a:xfrm>
+            <a:off x="2527300" y="4387850"/>
+            <a:ext cx="819150" cy="292100"/>
+          </a:xfrm>
+          <a:prstGeom prst="rect">
+            <a:avLst/>
+          </a:prstGeom>
+          <a:noFill/>
+          <a:ln>
+            <a:noFill/>
+          </a:ln>
+        </p:spPr>
+        <p:txBody>
+          <a:bodyPr wrap="square" lIns="0" tIns="0" rIns="0" bIns="0"/>
+          <a:lstStyle/>
+          <a:p>
+            <a:r>
+              <a:rPr lang="hr-HR" sz="900">
+                <a:solidFill>
+                  <a:srgbClr val="20282C"/>
+                </a:solidFill>
+                <a:latin typeface="Aptos"/>
+              </a:rPr>
+              <a:t>0.031</a:t>
+            </a:r>
+            <a:endParaRPr lang="hr-HR" sz="900"/>
+          </a:p>
+        </p:txBody>
+      </p:sp>
+      <p:sp>
+        <p:nvSpPr>
+          <p:cNvPr id="47" name="Cell"/>
+          <p:cNvSpPr txBox="1"/>
+          <p:nvPr/>
+        </p:nvSpPr>
+        <p:spPr>
+          <a:xfrm>
+            <a:off x="3448050" y="4387850"/>
+            <a:ext cx="819150" cy="292100"/>
+          </a:xfrm>
+          <a:prstGeom prst="rect">
+            <a:avLst/>
+          </a:prstGeom>
+          <a:noFill/>
+          <a:ln>
+            <a:noFill/>
+          </a:ln>
+        </p:spPr>
+        <p:txBody>
+          <a:bodyPr wrap="square" lIns="0" tIns="0" rIns="0" bIns="0"/>
+          <a:lstStyle/>
+          <a:p>
+            <a:r>
+              <a:rPr lang="hr-HR" sz="900">
+                <a:solidFill>
+                  <a:srgbClr val="20282C"/>
+                </a:solidFill>
+                <a:latin typeface="Aptos"/>
+              </a:rPr>
+              <a:t>0.008</a:t>
+            </a:r>
+            <a:endParaRPr lang="hr-HR" sz="900"/>
+          </a:p>
+        </p:txBody>
+      </p:sp>
+      <p:sp>
+        <p:nvSpPr>
+          <p:cNvPr id="48" name="Cell"/>
+          <p:cNvSpPr txBox="1"/>
+          <p:nvPr/>
+        </p:nvSpPr>
+        <p:spPr>
+          <a:xfrm>
+            <a:off x="4368800" y="4387850"/>
+            <a:ext cx="819150" cy="292100"/>
+          </a:xfrm>
+          <a:prstGeom prst="rect">
+            <a:avLst/>
+          </a:prstGeom>
+          <a:noFill/>
+          <a:ln>
+            <a:noFill/>
+          </a:ln>
+        </p:spPr>
+        <p:txBody>
+          <a:bodyPr wrap="square" lIns="0" tIns="0" rIns="0" bIns="0"/>
+          <a:lstStyle/>
+          <a:p>
+            <a:r>
+              <a:rPr lang="hr-HR" sz="900">
+                <a:solidFill>
+                  <a:srgbClr val="20282C"/>
+                </a:solidFill>
+                <a:latin typeface="Aptos"/>
+              </a:rPr>
+              <a:t>0.039</a:t>
+            </a:r>
+            <a:endParaRPr lang="hr-HR" sz="900"/>
+          </a:p>
+        </p:txBody>
+      </p:sp>
+      <p:sp>
+        <p:nvSpPr>
+          <p:cNvPr id="49" name="Cell"/>
+          <p:cNvSpPr txBox="1"/>
+          <p:nvPr/>
+        </p:nvSpPr>
+        <p:spPr>
+          <a:xfrm>
+            <a:off x="5289550" y="4387850"/>
+            <a:ext cx="819150" cy="292100"/>
+          </a:xfrm>
+          <a:prstGeom prst="rect">
+            <a:avLst/>
+          </a:prstGeom>
+          <a:noFill/>
+          <a:ln>
+            <a:noFill/>
+          </a:ln>
+        </p:spPr>
+        <p:txBody>
+          <a:bodyPr wrap="square" lIns="0" tIns="0" rIns="0" bIns="0"/>
+          <a:lstStyle/>
+          <a:p>
+            <a:r>
+              <a:rPr lang="hr-HR" sz="900">
+                <a:solidFill>
+                  <a:srgbClr val="20282C"/>
+                </a:solidFill>
+                <a:latin typeface="Aptos"/>
+              </a:rPr>
+              <a:t>0.008</a:t>
+            </a:r>
+            <a:endParaRPr lang="hr-HR" sz="900"/>
+          </a:p>
+        </p:txBody>
+      </p:sp>
+      <p:sp>
+        <p:nvSpPr>
+          <p:cNvPr id="50" name="Cell"/>
+          <p:cNvSpPr txBox="1"/>
+          <p:nvPr/>
+        </p:nvSpPr>
+        <p:spPr>
+          <a:xfrm>
+            <a:off x="6210300" y="4387850"/>
+            <a:ext cx="1073150" cy="292100"/>
+          </a:xfrm>
+          <a:prstGeom prst="rect">
+            <a:avLst/>
+          </a:prstGeom>
+          <a:noFill/>
+          <a:ln>
+            <a:noFill/>
+          </a:ln>
+        </p:spPr>
+        <p:txBody>
+          <a:bodyPr wrap="square" lIns="0" tIns="0" rIns="0" bIns="0"/>
+          <a:lstStyle/>
+          <a:p>
+            <a:r>
+              <a:rPr lang="hr-HR" sz="900">
+                <a:solidFill>
+                  <a:srgbClr val="20282C"/>
+                </a:solidFill>
+                <a:latin typeface="Aptos"/>
+              </a:rPr>
+              <a:t>0.050</a:t>
+            </a:r>
+            <a:endParaRPr lang="hr-HR" sz="900"/>
+          </a:p>
+        </p:txBody>
+      </p:sp>
+      <p:sp>
+        <p:nvSpPr>
+          <p:cNvPr id="51" name="Cell"/>
+          <p:cNvSpPr txBox="1"/>
+          <p:nvPr/>
+        </p:nvSpPr>
+        <p:spPr>
+          <a:xfrm>
+            <a:off x="7385050" y="4387850"/>
+            <a:ext cx="1073150" cy="292100"/>
+          </a:xfrm>
+          <a:prstGeom prst="rect">
+            <a:avLst/>
+          </a:prstGeom>
+          <a:noFill/>
+          <a:ln>
+            <a:noFill/>
+          </a:ln>
+        </p:spPr>
+        <p:txBody>
+          <a:bodyPr wrap="square" lIns="0" tIns="0" rIns="0" bIns="0"/>
+          <a:lstStyle/>
+          <a:p>
+            <a:r>
+              <a:rPr lang="hr-HR" sz="900">
+                <a:solidFill>
+                  <a:srgbClr val="20282C"/>
+                </a:solidFill>
+                <a:latin typeface="Aptos"/>
+              </a:rPr>
+              <a:t>0.010</a:t>
+            </a:r>
+            <a:endParaRPr lang="hr-HR" sz="900"/>
+          </a:p>
+        </p:txBody>
+      </p:sp>
+      <p:sp>
+        <p:nvSpPr>
+          <p:cNvPr id="52" name="Cell"/>
+          <p:cNvSpPr txBox="1"/>
+          <p:nvPr/>
+        </p:nvSpPr>
+        <p:spPr>
+          <a:xfrm>
+            <a:off x="495300" y="4743450"/>
+            <a:ext cx="1930400" cy="292100"/>
+          </a:xfrm>
+          <a:prstGeom prst="rect">
+            <a:avLst/>
+          </a:prstGeom>
+          <a:noFill/>
+          <a:ln>
+            <a:noFill/>
+          </a:ln>
+        </p:spPr>
+        <p:txBody>
+          <a:bodyPr wrap="square" lIns="0" tIns="0" rIns="0" bIns="0"/>
+          <a:lstStyle/>
+          <a:p>
+            <a:r>
+              <a:rPr lang="hr-HR" sz="900" b="1">
+                <a:solidFill>
+                  <a:srgbClr val="15171A"/>
+                </a:solidFill>
+                <a:latin typeface="Aptos"/>
+              </a:rPr>
+              <a:t>fine-tuned bundled LM</a:t>
+            </a:r>
+            <a:endParaRPr lang="hr-HR" sz="900"/>
+          </a:p>
+        </p:txBody>
+      </p:sp>
+      <p:sp>
+        <p:nvSpPr>
+          <p:cNvPr id="53" name="Cell"/>
+          <p:cNvSpPr txBox="1"/>
+          <p:nvPr/>
+        </p:nvSpPr>
+        <p:spPr>
+          <a:xfrm>
+            <a:off x="2527300" y="4743450"/>
+            <a:ext cx="819150" cy="292100"/>
+          </a:xfrm>
+          <a:prstGeom prst="rect">
+            <a:avLst/>
+          </a:prstGeom>
+          <a:noFill/>
+          <a:ln>
+            <a:noFill/>
+          </a:ln>
+        </p:spPr>
+        <p:txBody>
+          <a:bodyPr wrap="square" lIns="0" tIns="0" rIns="0" bIns="0"/>
+          <a:lstStyle/>
+          <a:p>
+            <a:r>
+              <a:rPr lang="hr-HR" sz="900">
+                <a:solidFill>
+                  <a:srgbClr val="20282C"/>
+                </a:solidFill>
+                <a:latin typeface="Aptos"/>
+              </a:rPr>
+              <a:t>0.037</a:t>
+            </a:r>
+            <a:endParaRPr lang="hr-HR" sz="900"/>
+          </a:p>
+        </p:txBody>
+      </p:sp>
+      <p:sp>
+        <p:nvSpPr>
+          <p:cNvPr id="54" name="Cell"/>
+          <p:cNvSpPr txBox="1"/>
+          <p:nvPr/>
+        </p:nvSpPr>
+        <p:spPr>
+          <a:xfrm>
+            <a:off x="3448050" y="4743450"/>
+            <a:ext cx="819150" cy="292100"/>
+          </a:xfrm>
+          <a:prstGeom prst="rect">
+            <a:avLst/>
+          </a:prstGeom>
+          <a:noFill/>
+          <a:ln>
+            <a:noFill/>
+          </a:ln>
+        </p:spPr>
+        <p:txBody>
+          <a:bodyPr wrap="square" lIns="0" tIns="0" rIns="0" bIns="0"/>
+          <a:lstStyle/>
+          <a:p>
+            <a:r>
+              <a:rPr lang="hr-HR" sz="900">
+                <a:solidFill>
+                  <a:srgbClr val="20282C"/>
+                </a:solidFill>
+                <a:latin typeface="Aptos"/>
+              </a:rPr>
+              <a:t>0.010</a:t>
+            </a:r>
+            <a:endParaRPr lang="hr-HR" sz="900"/>
+          </a:p>
+        </p:txBody>
+      </p:sp>
+      <p:sp>
+        <p:nvSpPr>
+          <p:cNvPr id="55" name="Cell"/>
+          <p:cNvSpPr txBox="1"/>
+          <p:nvPr/>
+        </p:nvSpPr>
+        <p:spPr>
+          <a:xfrm>
+            <a:off x="4368800" y="4743450"/>
+            <a:ext cx="819150" cy="292100"/>
+          </a:xfrm>
+          <a:prstGeom prst="rect">
+            <a:avLst/>
+          </a:prstGeom>
+          <a:noFill/>
+          <a:ln>
+            <a:noFill/>
+          </a:ln>
+        </p:spPr>
+        <p:txBody>
+          <a:bodyPr wrap="square" lIns="0" tIns="0" rIns="0" bIns="0"/>
+          <a:lstStyle/>
+          <a:p>
+            <a:r>
+              <a:rPr lang="hr-HR" sz="900">
+                <a:solidFill>
+                  <a:srgbClr val="20282C"/>
+                </a:solidFill>
+                <a:latin typeface="Aptos"/>
+              </a:rPr>
+              <a:t>0.042</a:t>
+            </a:r>
+            <a:endParaRPr lang="hr-HR" sz="900"/>
+          </a:p>
+        </p:txBody>
+      </p:sp>
+      <p:sp>
+        <p:nvSpPr>
+          <p:cNvPr id="56" name="Cell"/>
+          <p:cNvSpPr txBox="1"/>
+          <p:nvPr/>
+        </p:nvSpPr>
+        <p:spPr>
+          <a:xfrm>
+            <a:off x="5289550" y="4743450"/>
+            <a:ext cx="819150" cy="292100"/>
+          </a:xfrm>
+          <a:prstGeom prst="rect">
+            <a:avLst/>
+          </a:prstGeom>
+          <a:noFill/>
+          <a:ln>
+            <a:noFill/>
+          </a:ln>
+        </p:spPr>
+        <p:txBody>
+          <a:bodyPr wrap="square" lIns="0" tIns="0" rIns="0" bIns="0"/>
+          <a:lstStyle/>
+          <a:p>
+            <a:r>
+              <a:rPr lang="hr-HR" sz="900">
+                <a:solidFill>
+                  <a:srgbClr val="20282C"/>
+                </a:solidFill>
+                <a:latin typeface="Aptos"/>
+              </a:rPr>
+              <a:t>0.009</a:t>
+            </a:r>
+            <a:endParaRPr lang="hr-HR" sz="900"/>
+          </a:p>
+        </p:txBody>
+      </p:sp>
+      <p:sp>
+        <p:nvSpPr>
+          <p:cNvPr id="57" name="Cell"/>
+          <p:cNvSpPr txBox="1"/>
+          <p:nvPr/>
+        </p:nvSpPr>
+        <p:spPr>
+          <a:xfrm>
+            <a:off x="6210300" y="4743450"/>
+            <a:ext cx="1073150" cy="292100"/>
+          </a:xfrm>
+          <a:prstGeom prst="rect">
+            <a:avLst/>
+          </a:prstGeom>
+          <a:noFill/>
+          <a:ln>
+            <a:noFill/>
+          </a:ln>
+        </p:spPr>
+        <p:txBody>
+          <a:bodyPr wrap="square" lIns="0" tIns="0" rIns="0" bIns="0"/>
+          <a:lstStyle/>
+          <a:p>
+            <a:r>
+              <a:rPr lang="hr-HR" sz="900">
+                <a:solidFill>
+                  <a:srgbClr val="20282C"/>
+                </a:solidFill>
+                <a:latin typeface="Aptos"/>
+              </a:rPr>
+              <a:t>0.051</a:t>
+            </a:r>
+            <a:endParaRPr lang="hr-HR" sz="900"/>
+          </a:p>
+        </p:txBody>
+      </p:sp>
+      <p:sp>
+        <p:nvSpPr>
+          <p:cNvPr id="58" name="Cell"/>
+          <p:cNvSpPr txBox="1"/>
+          <p:nvPr/>
+        </p:nvSpPr>
+        <p:spPr>
+          <a:xfrm>
+            <a:off x="7385050" y="4743450"/>
+            <a:ext cx="1073150" cy="292100"/>
+          </a:xfrm>
+          <a:prstGeom prst="rect">
+            <a:avLst/>
+          </a:prstGeom>
+          <a:noFill/>
+          <a:ln>
+            <a:noFill/>
+          </a:ln>
+        </p:spPr>
+        <p:txBody>
+          <a:bodyPr wrap="square" lIns="0" tIns="0" rIns="0" bIns="0"/>
+          <a:lstStyle/>
+          <a:p>
+            <a:r>
+              <a:rPr lang="hr-HR" sz="900">
+                <a:solidFill>
+                  <a:srgbClr val="20282C"/>
+                </a:solidFill>
+                <a:latin typeface="Aptos"/>
+              </a:rPr>
+              <a:t>0.011</a:t>
+            </a:r>
+            <a:endParaRPr lang="hr-HR" sz="900"/>
+          </a:p>
+        </p:txBody>
+      </p:sp>
+      <p:sp>
+        <p:nvSpPr>
+          <p:cNvPr id="59" name="Text"/>
+          <p:cNvSpPr txBox="1"/>
+          <p:nvPr/>
+        </p:nvSpPr>
+        <p:spPr>
+          <a:xfrm>
+            <a:off x="444500" y="4953000"/>
+            <a:ext cx="8636000" cy="215900"/>
+          </a:xfrm>
+          <a:prstGeom prst="rect">
+            <a:avLst/>
+          </a:prstGeom>
+          <a:noFill/>
+          <a:ln>
+            <a:noFill/>
+          </a:ln>
+        </p:spPr>
+        <p:txBody>
+          <a:bodyPr wrap="square" lIns="0" tIns="0" rIns="0" bIns="0"/>
+          <a:lstStyle/>
+          <a:p>
+            <a:r>
+              <a:rPr lang="hr-HR" sz="1150">
+                <a:solidFill>
+                  <a:srgbClr val="6F6A5B"/>
+                </a:solidFill>
+                <a:latin typeface="Aptos"/>
+              </a:rPr>
+              <a:t>CER je prikazan bez razmaka. Bundled LM je fiksni eksterni ParlaMint LM iz checkpointa; ne treniramo VEPRAD KenLM, pa nema text-only LM curenja iz traina prema val/testu.</a:t>
+            </a:r>
+            <a:endParaRPr lang="hr-HR" sz="1150"/>
+          </a:p>
+        </p:txBody>
+      </p:sp>
+      <p:sp>
+        <p:nvSpPr>
+          <p:cNvPr id="60" name="Rectangle"/>
+          <p:cNvSpPr/>
+          <p:nvPr/>
+        </p:nvSpPr>
+        <p:spPr>
+          <a:xfrm>
+            <a:off x="571500" y="5365750"/>
+            <a:ext cx="2476500" cy="666750"/>
+          </a:xfrm>
+          <a:prstGeom prst="rect">
+            <a:avLst/>
+          </a:prstGeom>
+          <a:solidFill>
+            <a:srgbClr val="E24A2A"/>
+          </a:solidFill>
+          <a:ln>
+            <a:noFill/>
+          </a:ln>
+        </p:spPr>
+      </p:sp>
+      <p:sp>
+        <p:nvSpPr>
+          <p:cNvPr id="61" name="Text"/>
+          <p:cNvSpPr txBox="1"/>
+          <p:nvPr/>
+        </p:nvSpPr>
+        <p:spPr>
+          <a:xfrm>
+            <a:off x="723900" y="5473700"/>
+            <a:ext cx="2095500" cy="139700"/>
+          </a:xfrm>
+          <a:prstGeom prst="rect">
+            <a:avLst/>
+          </a:prstGeom>
+          <a:noFill/>
+          <a:ln>
+            <a:noFill/>
+          </a:ln>
+        </p:spPr>
+        <p:txBody>
+          <a:bodyPr wrap="square" lIns="0" tIns="0" rIns="0" bIns="0"/>
+          <a:lstStyle/>
+          <a:p>
+            <a:r>
+              <a:rPr lang="hr-HR" sz="1250" b="1">
+                <a:solidFill>
+                  <a:srgbClr val="F8F3E8"/>
+                </a:solidFill>
+                <a:latin typeface="Aptos"/>
+              </a:rPr>
+              <a:t>Najbolji full test</a:t>
+            </a:r>
+            <a:endParaRPr lang="hr-HR" sz="1250"/>
+          </a:p>
+        </p:txBody>
+      </p:sp>
+      <p:sp>
+        <p:nvSpPr>
+          <p:cNvPr id="62" name="Text"/>
+          <p:cNvSpPr txBox="1"/>
+          <p:nvPr/>
+        </p:nvSpPr>
+        <p:spPr>
+          <a:xfrm>
+            <a:off x="723900" y="5651500"/>
+            <a:ext cx="2095500" cy="177800"/>
+          </a:xfrm>
+          <a:prstGeom prst="rect">
+            <a:avLst/>
+          </a:prstGeom>
+          <a:noFill/>
+          <a:ln>
+            <a:noFill/>
+          </a:ln>
+        </p:spPr>
+        <p:txBody>
+          <a:bodyPr wrap="square" lIns="0" tIns="0" rIns="0" bIns="0"/>
+          <a:lstStyle/>
+          <a:p>
+            <a:r>
+              <a:rPr lang="hr-HR" sz="1650" b="1">
+                <a:solidFill>
+                  <a:srgbClr val="F8F3E8"/>
+                </a:solidFill>
+                <a:latin typeface="Aptos"/>
+              </a:rPr>
+              <a:t>greedy fine-tuned</a:t>
+            </a:r>
+            <a:endParaRPr lang="hr-HR" sz="1650"/>
+          </a:p>
+        </p:txBody>
+      </p:sp>
+      <p:sp>
+        <p:nvSpPr>
+          <p:cNvPr id="63" name="Text"/>
+          <p:cNvSpPr txBox="1"/>
+          <p:nvPr/>
+        </p:nvSpPr>
+        <p:spPr>
+          <a:xfrm>
+            <a:off x="723900" y="5854700"/>
+            <a:ext cx="2095500" cy="127000"/>
+          </a:xfrm>
+          <a:prstGeom prst="rect">
+            <a:avLst/>
+          </a:prstGeom>
+          <a:noFill/>
+          <a:ln>
+            <a:noFill/>
+          </a:ln>
+        </p:spPr>
+        <p:txBody>
+          <a:bodyPr wrap="square" lIns="0" tIns="0" rIns="0" bIns="0"/>
+          <a:lstStyle/>
+          <a:p>
+            <a:r>
+              <a:rPr lang="hr-HR" sz="1050">
+                <a:solidFill>
+                  <a:srgbClr val="F8F3E8"/>
+                </a:solidFill>
+                <a:latin typeface="Aptos"/>
+              </a:rPr>
+              <a:t>3.86% WER · 0.75% CER</a:t>
+            </a:r>
+            <a:endParaRPr lang="hr-HR" sz="1050"/>
+          </a:p>
+        </p:txBody>
+      </p:sp>
+      <p:sp>
+        <p:nvSpPr>
+          <p:cNvPr id="64" name="Rectangle"/>
+          <p:cNvSpPr/>
+          <p:nvPr/>
+        </p:nvSpPr>
+        <p:spPr>
+          <a:xfrm>
+            <a:off x="3302000" y="5365750"/>
+            <a:ext cx="2476500" cy="666750"/>
+          </a:xfrm>
+          <a:prstGeom prst="rect">
+            <a:avLst/>
+          </a:prstGeom>
+          <a:solidFill>
+            <a:srgbClr val="2C8C99"/>
+          </a:solidFill>
+          <a:ln>
+            <a:noFill/>
+          </a:ln>
+        </p:spPr>
+      </p:sp>
+      <p:sp>
+        <p:nvSpPr>
+          <p:cNvPr id="65" name="Text"/>
+          <p:cNvSpPr txBox="1"/>
+          <p:nvPr/>
+        </p:nvSpPr>
+        <p:spPr>
+          <a:xfrm>
+            <a:off x="3454400" y="5473700"/>
+            <a:ext cx="2095500" cy="139700"/>
+          </a:xfrm>
+          <a:prstGeom prst="rect">
+            <a:avLst/>
+          </a:prstGeom>
+          <a:noFill/>
+          <a:ln>
+            <a:noFill/>
+          </a:ln>
+        </p:spPr>
+        <p:txBody>
+          <a:bodyPr wrap="square" lIns="0" tIns="0" rIns="0" bIns="0"/>
+          <a:lstStyle/>
+          <a:p>
+            <a:r>
+              <a:rPr lang="hr-HR" sz="1250" b="1">
+                <a:solidFill>
+                  <a:srgbClr val="F8F3E8"/>
+                </a:solidFill>
+                <a:latin typeface="Aptos"/>
+              </a:rPr>
+              <a:t>Unseen speakers</a:t>
+            </a:r>
+            <a:endParaRPr lang="hr-HR" sz="1250"/>
+          </a:p>
+        </p:txBody>
+      </p:sp>
+      <p:sp>
+        <p:nvSpPr>
+          <p:cNvPr id="66" name="Text"/>
+          <p:cNvSpPr txBox="1"/>
+          <p:nvPr/>
+        </p:nvSpPr>
+        <p:spPr>
+          <a:xfrm>
+            <a:off x="3454400" y="5651500"/>
+            <a:ext cx="2095500" cy="177800"/>
+          </a:xfrm>
+          <a:prstGeom prst="rect">
+            <a:avLst/>
+          </a:prstGeom>
+          <a:noFill/>
+          <a:ln>
+            <a:noFill/>
+          </a:ln>
+        </p:spPr>
+        <p:txBody>
+          <a:bodyPr wrap="square" lIns="0" tIns="0" rIns="0" bIns="0"/>
+          <a:lstStyle/>
+          <a:p>
+            <a:r>
+              <a:rPr lang="hr-HR" sz="1650" b="1">
+                <a:solidFill>
+                  <a:srgbClr val="F8F3E8"/>
+                </a:solidFill>
+                <a:latin typeface="Aptos"/>
+              </a:rPr>
+              <a:t>stroži dio testa</a:t>
+            </a:r>
+            <a:endParaRPr lang="hr-HR" sz="1650"/>
+          </a:p>
+        </p:txBody>
+      </p:sp>
+      <p:sp>
+        <p:nvSpPr>
+          <p:cNvPr id="67" name="Text"/>
+          <p:cNvSpPr txBox="1"/>
+          <p:nvPr/>
+        </p:nvSpPr>
+        <p:spPr>
+          <a:xfrm>
+            <a:off x="3454400" y="5854700"/>
+            <a:ext cx="2095500" cy="127000"/>
+          </a:xfrm>
+          <a:prstGeom prst="rect">
+            <a:avLst/>
+          </a:prstGeom>
+          <a:noFill/>
+          <a:ln>
+            <a:noFill/>
+          </a:ln>
+        </p:spPr>
+        <p:txBody>
+          <a:bodyPr wrap="square" lIns="0" tIns="0" rIns="0" bIns="0"/>
+          <a:lstStyle/>
+          <a:p>
+            <a:r>
+              <a:rPr lang="hr-HR" sz="1050">
+                <a:solidFill>
+                  <a:srgbClr val="F8F3E8"/>
+                </a:solidFill>
+                <a:latin typeface="Aptos"/>
+              </a:rPr>
+              <a:t>4.97% WER · 0.99% CER</a:t>
+            </a:r>
+            <a:endParaRPr lang="hr-HR" sz="1050"/>
+          </a:p>
+        </p:txBody>
+      </p:sp>
+      <p:sp>
+        <p:nvSpPr>
+          <p:cNvPr id="68" name="Rectangle"/>
+          <p:cNvSpPr/>
+          <p:nvPr/>
+        </p:nvSpPr>
+        <p:spPr>
+          <a:xfrm>
+            <a:off x="6032500" y="5365750"/>
+            <a:ext cx="2476500" cy="666750"/>
+          </a:xfrm>
+          <a:prstGeom prst="rect">
+            <a:avLst/>
+          </a:prstGeom>
+          <a:solidFill>
+            <a:srgbClr val="F0B429"/>
+          </a:solidFill>
+          <a:ln>
+            <a:noFill/>
+          </a:ln>
+        </p:spPr>
+      </p:sp>
+      <p:sp>
+        <p:nvSpPr>
+          <p:cNvPr id="69" name="Text"/>
+          <p:cNvSpPr txBox="1"/>
+          <p:nvPr/>
+        </p:nvSpPr>
+        <p:spPr>
+          <a:xfrm>
+            <a:off x="6184900" y="5473700"/>
+            <a:ext cx="2095500" cy="139700"/>
+          </a:xfrm>
+          <a:prstGeom prst="rect">
+            <a:avLst/>
+          </a:prstGeom>
+          <a:noFill/>
+          <a:ln>
+            <a:noFill/>
+          </a:ln>
+        </p:spPr>
+        <p:txBody>
+          <a:bodyPr wrap="square" lIns="0" tIns="0" rIns="0" bIns="0"/>
+          <a:lstStyle/>
+          <a:p>
+            <a:r>
+              <a:rPr lang="hr-HR" sz="1250" b="1">
+                <a:solidFill>
+                  <a:srgbClr val="15171A"/>
+                </a:solidFill>
+                <a:latin typeface="Aptos"/>
+              </a:rPr>
+              <a:t>LM nakon fine-tunea</a:t>
+            </a:r>
+            <a:endParaRPr lang="hr-HR" sz="1250"/>
+          </a:p>
+        </p:txBody>
+      </p:sp>
+      <p:sp>
+        <p:nvSpPr>
+          <p:cNvPr id="70" name="Text"/>
+          <p:cNvSpPr txBox="1"/>
+          <p:nvPr/>
+        </p:nvSpPr>
+        <p:spPr>
+          <a:xfrm>
+            <a:off x="6184900" y="5651500"/>
+            <a:ext cx="2095500" cy="177800"/>
+          </a:xfrm>
+          <a:prstGeom prst="rect">
+            <a:avLst/>
+          </a:prstGeom>
+          <a:noFill/>
+          <a:ln>
+            <a:noFill/>
+          </a:ln>
+        </p:spPr>
+        <p:txBody>
+          <a:bodyPr wrap="square" lIns="0" tIns="0" rIns="0" bIns="0"/>
+          <a:lstStyle/>
+          <a:p>
+            <a:r>
+              <a:rPr lang="hr-HR" sz="1650" b="1">
+                <a:solidFill>
+                  <a:srgbClr val="15171A"/>
+                </a:solidFill>
+                <a:latin typeface="Aptos"/>
+              </a:rPr>
+              <a:t>blago lošiji</a:t>
+            </a:r>
+            <a:endParaRPr lang="hr-HR" sz="1650"/>
+          </a:p>
+        </p:txBody>
+      </p:sp>
+      <p:sp>
+        <p:nvSpPr>
+          <p:cNvPr id="71" name="Text"/>
+          <p:cNvSpPr txBox="1"/>
+          <p:nvPr/>
+        </p:nvSpPr>
+        <p:spPr>
+          <a:xfrm>
+            <a:off x="6184900" y="5854700"/>
+            <a:ext cx="2095500" cy="127000"/>
+          </a:xfrm>
+          <a:prstGeom prst="rect">
+            <a:avLst/>
+          </a:prstGeom>
+          <a:noFill/>
+          <a:ln>
+            <a:noFill/>
+          </a:ln>
+        </p:spPr>
+        <p:txBody>
+          <a:bodyPr wrap="square" lIns="0" tIns="0" rIns="0" bIns="0"/>
+          <a:lstStyle/>
+          <a:p>
+            <a:r>
+              <a:rPr lang="hr-HR" sz="1050">
+                <a:solidFill>
+                  <a:srgbClr val="15171A"/>
+                </a:solidFill>
+                <a:latin typeface="Aptos"/>
+              </a:rPr>
+              <a:t>4.24% vs 3.86% WER</a:t>
+            </a:r>
+            <a:endParaRPr lang="hr-HR" sz="1050"/>
+          </a:p>
+        </p:txBody>
+      </p:sp>
+    </p:spTree>
+  </p:cSld>
+  <p:clrMapOvr>
+    <a:masterClrMapping/>
+  </p:clrMapOvr>
+</p:sld>
+</file>
+
+<file path=ppt/slides/slide9.xml><?xml version="1.0" encoding="utf-8"?>
 <p:sld xmlns:a="http://schemas.openxmlformats.org/drawingml/2006/main" xmlns:r="http://schemas.openxmlformats.org/officeDocument/2006/relationships" xmlns:p="http://schemas.openxmlformats.org/presentationml/2006/main">
   <p:cSld>
     <p:bg>

--- a/presentation/ROGJ_Deepspeech2_topic_presentation.pptx
+++ b/presentation/ROGJ_Deepspeech2_topic_presentation.pptx
@@ -9679,7 +9679,7 @@
                 </a:solidFill>
                 <a:latin typeface="Aptos"/>
               </a:rPr>
-              <a:t>08 · ČISTA HF REPRODUKCIJA</a:t>
+              <a:t>08 · NAJBOLJI MODEL?</a:t>
             </a:r>
             <a:endParaRPr lang="hr-HR" sz="1500"/>
           </a:p>
@@ -9715,7 +9715,7 @@
                 </a:solidFill>
                 <a:latin typeface="Aptos"/>
               </a:rPr>
-              <a:t>Clean VEPRAD fine-tune reproducira 3.86% test WER.</a:t>
+              <a:t>Fine-tune postojećeg pred-treniranog modela.</a:t>
             </a:r>
             <a:endParaRPr lang="hr-HR" sz="2350"/>
           </a:p>
@@ -9751,7 +9751,7 @@
                 </a:solidFill>
                 <a:latin typeface="Aptos"/>
               </a:rPr>
-              <a:t>Zasebni HF/Wav2Vec2 run na istom clean split protokolu; nije PaddleSpeech/DeepSpeech2 trening.</a:t>
+              <a:t>CLASSLA Wav2Vec2 fine-tune na train-setu; nije PaddleSpeech/DeepSpeech2 trening.</a:t>
             </a:r>
             <a:endParaRPr lang="hr-HR" sz="1080"/>
           </a:p>
@@ -9961,7 +9961,7 @@
                 </a:solidFill>
                 <a:latin typeface="Aptos"/>
               </a:rPr>
-              <a:t>Trening</a:t>
+              <a:t>Fine-tune</a:t>
             </a:r>
             <a:endParaRPr lang="hr-HR" sz="1300"/>
           </a:p>
